--- a/BrainSpark_Horizon_Director.pptx
+++ b/BrainSpark_Horizon_Director.pptx
@@ -21,9 +21,10 @@
     <p:sldId id="269" r:id="rId15"/>
     <p:sldId id="270" r:id="rId16"/>
     <p:sldId id="271" r:id="rId17"/>
+    <p:sldId id="272" r:id="rId18"/>
   </p:sldIdLst>
   <p:notesMasterIdLst>
-    <p:notesMasterId r:id="rId18"/>
+    <p:notesMasterId r:id="rId19"/>
   </p:notesMasterIdLst>
   <p:sldSz cx="12192000" cy="6858000"/>
   <p:notesSz cx="6858000" cy="12192000"/>
@@ -223,31 +224,31 @@
                 <c:formatCode>General</c:formatCode>
                 <c:ptCount val="9"/>
                 <c:pt idx="0">
-                  <c:v>20</c:v>
+                  <c:v>29</c:v>
                 </c:pt>
                 <c:pt idx="1">
-                  <c:v>13</c:v>
+                  <c:v>16</c:v>
                 </c:pt>
                 <c:pt idx="2">
-                  <c:v>11</c:v>
+                  <c:v>14</c:v>
                 </c:pt>
                 <c:pt idx="3">
-                  <c:v>14</c:v>
+                  <c:v>23</c:v>
                 </c:pt>
                 <c:pt idx="4">
                   <c:v>11</c:v>
                 </c:pt>
                 <c:pt idx="5">
-                  <c:v>12</c:v>
+                  <c:v>13</c:v>
                 </c:pt>
                 <c:pt idx="6">
-                  <c:v>15</c:v>
+                  <c:v>18</c:v>
                 </c:pt>
                 <c:pt idx="7">
-                  <c:v>12</c:v>
+                  <c:v>14</c:v>
                 </c:pt>
                 <c:pt idx="8">
-                  <c:v>31</c:v>
+                  <c:v>42</c:v>
                 </c:pt>
               </c:numCache>
             </c:numRef>
@@ -2031,7 +2032,7 @@
           <a:p>
             <a:r>
               <a:rPr lang="en-US" dirty="0"/>
-              <a:t>A prediction on its own is just an opinion with confidence — so underneath every prediction sits an evidence layer. Top left: patent filing velocity. If filings on a technology are accelerating year over year, that is an observable early signal — and the label is computed from the counts, not from anyone's opinion. Top right: deep research. The tool goes out, retrieves live sources and patents, and then — this is the part I love — if the AI writes a finding it cannot tie to a retrieved source, the code deletes it before we ever see it. It can even come back and say the evidence CHALLENGES our own register. Bottom left: three AI sceptics — an over-hype historian, a supply-chain realist, a regulatory analyst — who stamp agree, caution or challenge on every card. They can question timing; they are not allowed to touch a number. And bottom right, the ledger — we grade our own homework. Prediction plus accountability.</a:t>
+              <a:t>One question I got last time, and it was the right one: "a curated register is only good while somebody curates it — what happens when you get busy?" So this slide is what we did about it. First: the tool finds its own blind spots. Every technology is now classified by KIND — is it a material, a process, an architecture, a control strategy — and when we checked that classification against live research it found whole categories we were blind to. We did not notice those; the tool did. Second, and this one is a correction I want to own: an earlier version of the frontier check privileged one country when deciding what counted as leading-edge. That is a bias, not a judgement, and we took it out. Third, every technology now carries a proper dossier — what it is, who is actually shipping it, what it costs, and the case AGAINST it. If an entry has no counter-argument it is marketing, not foresight. And fourth, curation is now a measured backlog: one command grades the whole register on evidence, freshness and precision and prints what to fix next. The bottom line is the proof: the register went from a hundred and thirty-nine technologies to a hundred and eighty since I last stood here, and every addition came from the tool telling us what it was missing.</a:t>
             </a:r>
             <a:endParaRPr lang="en-US" dirty="0"/>
           </a:p>
@@ -2119,7 +2120,7 @@
           <a:p>
             <a:r>
               <a:rPr lang="en-US" dirty="0"/>
-              <a:t>So what does this actually change for the business? Four things, very concretely. One — sourcing: before we sign a seven-year contract, we check the technology future of that part. Will hydraulic brakes still be the right answer in year five, or are we signing up for legacy? Two — negotiation: if the cost curve says this part should be fifteen percent cheaper by 2029, that belongs in the LTA conversation, and now we have the maths behind it. Three — regulation: every obligation dated, statused, and mapped to the exact components it forces. No more surprises, and no more panicking over proposals that are not law. Four — the radar: our competitive segment, benchmarked continuously, including the disruptors. [point to pill] And the operating model matters as much as the features: minutes not weeks, self-serve, every engineer — not a gated analyst subscription.</a:t>
+              <a:t>A prediction on its own is just an opinion with confidence — so underneath every prediction sits an evidence layer. Top left: patent filing velocity. If filings on a technology are accelerating year over year, that is an observable early signal — and the label is computed from the counts, not from anyone's opinion. Top right: deep research. The tool goes out, retrieves live sources and patents, and then — this is the part I love — if the AI writes a finding it cannot tie to a retrieved source, the code deletes it before we ever see it. It can even come back and say the evidence CHALLENGES our own register. Bottom left: three AI sceptics — an over-hype historian, a supply-chain realist, a regulatory analyst — who stamp agree, caution or challenge on every card. They can question timing; they are not allowed to touch a number. And bottom right, the ledger — we grade our own homework. Prediction plus accountability.</a:t>
             </a:r>
             <a:endParaRPr lang="en-US" dirty="0"/>
           </a:p>
@@ -2207,7 +2208,7 @@
           <a:p>
             <a:r>
               <a:rPr lang="en-US" dirty="0"/>
-              <a:t>Last question before the close: why should you trust it enough to put its output in front of a board? Because we engineered it like a product, not a demo. Three hundred and twenty-six automated tests run on every change — and they enforce the honesty rules themselves: if someone adds a technology claiming high adoption without evidence, the build literally fails. It has been through an independent fact-check against primary sources, and every finding from that audit is fixed and locked into the tests. [point to navy card] And the quote on the right is the standard we hold it to: a foresight tool that never checks its own past predictions is astrology. This one checks. It scores its own old forecasts and shows us the error. I know very few humans with that discipline — now we have a tool with it.</a:t>
+              <a:t>So what does this actually change for the business? Four things, very concretely. One — sourcing: before we sign a seven-year contract, we check the technology future of that part. Will hydraulic brakes still be the right answer in year five, or are we signing up for legacy? Two — negotiation: if the cost curve says this part should be fifteen percent cheaper by 2029, that belongs in the LTA conversation, and now we have the maths behind it. Three — regulation: every obligation dated, statused, and mapped to the exact components it forces. No more surprises, and no more panicking over proposals that are not law. Four — the radar: our competitive segment, benchmarked continuously, including the disruptors. [point to pill] And the operating model matters as much as the features: minutes not weeks, self-serve, every engineer — not a gated analyst subscription.</a:t>
             </a:r>
             <a:endParaRPr lang="en-US" dirty="0"/>
           </a:p>
@@ -2295,7 +2296,7 @@
           <a:p>
             <a:r>
               <a:rPr lang="en-US" dirty="0"/>
-              <a:t>That is the story — but honestly, this tool is better experienced than described, and a live run takes under a minute. If you will allow me: I will open Horizon, click our Off-Road and Luxury lens, run a prediction, and export the report — right now, on this screen. [do the demo] Before I hand back, three small asks to take this from impressive to embedded. First: let me pilot it with two commodity teams for one quarter. Second: a free patent-database key — it costs nothing and lights up the evidence layer. Third: a quarterly re-curation slot in the calendar, so the prediction ledger starts scoring us and the tool gets sharper every cycle. [pause] Thank you — and I am happy to take questions, or better, take requests: name any part you own, and let us see its future together.</a:t>
+              <a:t>Last question before the close: why should you trust it enough to put its output in front of a board? Because we engineered it like a product, not a demo. Seven hundred and fifty-eight automated tests run on every change — and they enforce the honesty rules themselves: if someone adds a technology claiming high adoption without evidence, the build literally fails. It has been through an independent fact-check against primary sources, and every finding from that audit is fixed and locked into the tests. [point to navy card] And the quote on the right is the standard we hold it to: a foresight tool that never checks its own past predictions is astrology. This one checks. It scores its own old forecasts and shows us the error. I know very few humans with that discipline — now we have a tool with it.</a:t>
             </a:r>
             <a:endParaRPr lang="en-US" dirty="0"/>
           </a:p>
@@ -2319,6 +2320,94 @@
             <a:fld id="{F7021451-1387-4CA6-816F-3879F97B5CBC}" type="slidenum">
               <a:rPr lang="en-US"/>
               <a:t>16</a:t>
+            </a:fld>
+            <a:endParaRPr lang="en-US"/>
+          </a:p>
+        </p:txBody>
+      </p:sp>
+    </p:spTree>
+    <p:extLst>
+      <p:ext uri="{BB962C8B-B14F-4D97-AF65-F5344CB8AC3E}">
+        <p14:creationId xmlns:p14="http://schemas.microsoft.com/office/powerpoint/2010/main" val="1024086991"/>
+      </p:ext>
+    </p:extLst>
+  </p:cSld>
+  <p:clrMapOvr>
+    <a:masterClrMapping/>
+  </p:clrMapOvr>
+</p:notes>
+</file>
+
+<file path=ppt/notesSlides/notesSlide17.xml><?xml version="1.0" encoding="utf-8"?>
+<p:notes xmlns:a="http://schemas.openxmlformats.org/drawingml/2006/main" xmlns:r="http://schemas.openxmlformats.org/officeDocument/2006/relationships" xmlns:p="http://schemas.openxmlformats.org/presentationml/2006/main">
+  <p:cSld>
+    <p:spTree>
+      <p:nvGrpSpPr>
+        <p:cNvPr id="1" name=""/>
+        <p:cNvGrpSpPr/>
+        <p:nvPr/>
+      </p:nvGrpSpPr>
+      <p:grpSpPr>
+        <a:xfrm>
+          <a:off x="0" y="0"/>
+          <a:ext cx="0" cy="0"/>
+          <a:chOff x="0" y="0"/>
+          <a:chExt cx="0" cy="0"/>
+        </a:xfrm>
+      </p:grpSpPr>
+      <p:sp>
+        <p:nvSpPr>
+          <p:cNvPr id="2" name="Slide Image Placeholder 1"/>
+          <p:cNvSpPr>
+            <a:spLocks noGrp="1" noRot="1" noChangeAspect="1"/>
+          </p:cNvSpPr>
+          <p:nvPr>
+            <p:ph type="sldImg"/>
+          </p:nvPr>
+        </p:nvSpPr>
+        <p:spPr/>
+      </p:sp>
+      <p:sp>
+        <p:nvSpPr>
+          <p:cNvPr id="3" name="Notes Placeholder 2"/>
+          <p:cNvSpPr>
+            <a:spLocks noGrp="1"/>
+          </p:cNvSpPr>
+          <p:nvPr>
+            <p:ph type="body" idx="1"/>
+          </p:nvPr>
+        </p:nvSpPr>
+        <p:spPr/>
+        <p:txBody>
+          <a:bodyPr/>
+          <a:lstStyle/>
+          <a:p>
+            <a:r>
+              <a:rPr lang="en-US" dirty="0"/>
+              <a:t>That is the story — but honestly, this tool is better experienced than described, and a live run takes under a minute. If you will allow me: I will open Horizon, click our Off-Road and Luxury lens, run a prediction, and export the report — right now, on this screen. [do the demo] Before I hand back, three small asks to take this from impressive to embedded. First: let me pilot it with two commodity teams for one quarter. Second: a free patent-database key — it costs nothing and lights up the evidence layer. Third: a quarterly re-curation slot in the calendar, so the prediction ledger starts scoring us and the tool gets sharper every cycle. [pause] Thank you — and I am happy to take questions, or better, take requests: name any part you own, and let us see its future together.</a:t>
+            </a:r>
+            <a:endParaRPr lang="en-US" dirty="0"/>
+          </a:p>
+        </p:txBody>
+      </p:sp>
+      <p:sp>
+        <p:nvSpPr>
+          <p:cNvPr id="4" name="Slide Number Placeholder 3"/>
+          <p:cNvSpPr>
+            <a:spLocks noGrp="1"/>
+          </p:cNvSpPr>
+          <p:nvPr>
+            <p:ph type="sldNum" sz="quarter" idx="10"/>
+          </p:nvPr>
+        </p:nvSpPr>
+        <p:spPr/>
+        <p:txBody>
+          <a:bodyPr/>
+          <a:lstStyle/>
+          <a:p>
+            <a:fld id="{F7021451-1387-4CA6-816F-3879F97B5CBC}" type="slidenum">
+              <a:rPr lang="en-US"/>
+              <a:t>17</a:t>
             </a:fld>
             <a:endParaRPr lang="en-US"/>
           </a:p>
@@ -5995,7 +6084,7 @@
                 <a:ea typeface="Courier New" pitchFamily="34" charset="-122"/>
                 <a:cs typeface="Courier New" pitchFamily="34" charset="-120"/>
               </a:rPr>
-              <a:t>  ·  Technology Foresight Engine  ·  10/16</a:t>
+              <a:t>  ·  Technology Foresight Engine  ·  9/17</a:t>
             </a:r>
             <a:endParaRPr lang="en-US" sz="900" dirty="0"/>
           </a:p>
@@ -7130,7 +7219,7 @@
                 <a:ea typeface="Courier New" pitchFamily="34" charset="-122"/>
                 <a:cs typeface="Courier New" pitchFamily="34" charset="-120"/>
               </a:rPr>
-              <a:t>  ·  Technology Foresight Engine  ·  11/16</a:t>
+              <a:t>  ·  Technology Foresight Engine  ·  10/17</a:t>
             </a:r>
             <a:endParaRPr lang="en-US" sz="900" dirty="0"/>
           </a:p>
@@ -8004,7 +8093,7 @@
                 <a:ea typeface="Courier New" pitchFamily="34" charset="-122"/>
                 <a:cs typeface="Courier New" pitchFamily="34" charset="-120"/>
               </a:rPr>
-              <a:t>  ·  Technology Foresight Engine  ·  12/16</a:t>
+              <a:t>  ·  Technology Foresight Engine  ·  11/17</a:t>
             </a:r>
             <a:endParaRPr lang="en-US" sz="900" dirty="0"/>
           </a:p>
@@ -8051,7 +8140,7 @@
         <p:spPr>
           <a:xfrm>
             <a:off x="502920" y="347472"/>
-            <a:ext cx="1711757" cy="329184"/>
+            <a:ext cx="1980590" cy="329184"/>
           </a:xfrm>
           <a:prstGeom prst="roundRect">
             <a:avLst>
@@ -8073,7 +8162,7 @@
         <p:spPr>
           <a:xfrm>
             <a:off x="502920" y="347472"/>
-            <a:ext cx="1711757" cy="329184"/>
+            <a:ext cx="1980590" cy="329184"/>
           </a:xfrm>
           <a:prstGeom prst="rect">
             <a:avLst/>
@@ -8097,7 +8186,7 @@
                 <a:ea typeface="Courier New" pitchFamily="34" charset="-122"/>
                 <a:cs typeface="Courier New" pitchFamily="34" charset="-120"/>
               </a:rPr>
-              <a:t>EVIDENCE LAYER</a:t>
+              <a:t>IT CURATES ITSELF</a:t>
             </a:r>
             <a:endParaRPr lang="en-US" sz="1100" dirty="0"/>
           </a:p>
@@ -8136,7 +8225,7 @@
                 <a:ea typeface="Arial" pitchFamily="34" charset="-122"/>
                 <a:cs typeface="Arial" pitchFamily="34" charset="-120"/>
               </a:rPr>
-              <a:t>Prediction backed by retrieval — and graded afterwards</a:t>
+              <a:t>A register nobody maintains is a register that rots</a:t>
             </a:r>
             <a:endParaRPr lang="en-US" sz="2800" dirty="0"/>
           </a:p>
@@ -8144,83 +8233,46 @@
       </p:sp>
       <p:sp>
         <p:nvSpPr>
-          <p:cNvPr id="5" name="Shape 3"/>
-          <p:cNvSpPr/>
-          <p:nvPr/>
-        </p:nvSpPr>
-        <p:spPr>
-          <a:xfrm>
-            <a:off x="502920" y="1554480"/>
-            <a:ext cx="5440680" cy="1901952"/>
-          </a:xfrm>
-          <a:prstGeom prst="roundRect">
-            <a:avLst>
-              <a:gd name="adj" fmla="val 3365"/>
-            </a:avLst>
-          </a:prstGeom>
-          <a:solidFill>
-            <a:srgbClr val="FFFFFF"/>
-          </a:solidFill>
-          <a:ln w="9525">
-            <a:solidFill>
-              <a:srgbClr val="D7E0EA"/>
-            </a:solidFill>
-            <a:prstDash val="solid"/>
-          </a:ln>
-          <a:effectLst>
-            <a:outerShdw sx="100000" sy="100000" kx="0" ky="0" algn="bl" rotWithShape="0" blurRad="88900" dist="25400" dir="5400000">
-              <a:srgbClr val="9FB0C2">
-                <a:alpha val="30000"/>
-              </a:srgbClr>
-            </a:outerShdw>
-          </a:effectLst>
-        </p:spPr>
-      </p:sp>
-      <p:sp>
-        <p:nvSpPr>
-          <p:cNvPr id="6" name="Shape 4"/>
-          <p:cNvSpPr/>
-          <p:nvPr/>
-        </p:nvSpPr>
-        <p:spPr>
-          <a:xfrm>
-            <a:off x="502920" y="1554480"/>
-            <a:ext cx="5440680" cy="566928"/>
-          </a:xfrm>
-          <a:prstGeom prst="roundRect">
-            <a:avLst>
-              <a:gd name="adj" fmla="val 11290"/>
-            </a:avLst>
-          </a:prstGeom>
-          <a:solidFill>
-            <a:srgbClr val="0D9488"/>
-          </a:solidFill>
-          <a:ln/>
-        </p:spPr>
-      </p:sp>
-      <p:sp>
-        <p:nvSpPr>
-          <p:cNvPr id="7" name="Shape 5"/>
-          <p:cNvSpPr/>
-          <p:nvPr/>
-        </p:nvSpPr>
-        <p:spPr>
-          <a:xfrm>
-            <a:off x="630936" y="1627632"/>
-            <a:ext cx="420624" cy="420624"/>
-          </a:xfrm>
-          <a:prstGeom prst="ellipse">
-            <a:avLst/>
-          </a:prstGeom>
-          <a:solidFill>
-            <a:srgbClr val="0D9488"/>
-          </a:solidFill>
-          <a:ln/>
-        </p:spPr>
+          <p:cNvPr id="5" name="Text 3"/>
+          <p:cNvSpPr/>
+          <p:nvPr/>
+        </p:nvSpPr>
+        <p:spPr>
+          <a:xfrm>
+            <a:off x="502920" y="1417320"/>
+            <a:ext cx="11155680" cy="457200"/>
+          </a:xfrm>
+          <a:prstGeom prst="rect">
+            <a:avLst/>
+          </a:prstGeom>
+          <a:noFill/>
+          <a:ln/>
+        </p:spPr>
+        <p:txBody>
+          <a:bodyPr wrap="square" lIns="0" tIns="0" rIns="0" bIns="0" rtlCol="0" anchor="ctr"/>
+          <a:lstStyle/>
+          <a:p>
+            <a:pPr indent="0" marL="0">
+              <a:buNone/>
+            </a:pPr>
+            <a:r>
+              <a:rPr lang="en-US" sz="1350" dirty="0">
+                <a:solidFill>
+                  <a:srgbClr val="5B6B7F"/>
+                </a:solidFill>
+                <a:latin typeface="Arial" pitchFamily="34" charset="0"/>
+                <a:ea typeface="Arial" pitchFamily="34" charset="-122"/>
+                <a:cs typeface="Arial" pitchFamily="34" charset="-120"/>
+              </a:rPr>
+              <a:t>A curated list is only an advantage while somebody curates it. So the tool audits its own coverage — and tells us where it is thin, rather than answering confidently from a gap.</a:t>
+            </a:r>
+            <a:endParaRPr lang="en-US" sz="1350" dirty="0"/>
+          </a:p>
+        </p:txBody>
       </p:sp>
       <p:pic>
         <p:nvPicPr>
-          <p:cNvPr id="8" name="Image 0" descr="preencoded.png">    </p:cNvPr>
+          <p:cNvPr id="6" name="Image 0" descr="preencoded.png">    </p:cNvPr>
           <p:cNvPicPr>
             <a:picLocks noChangeAspect="1"/>
           </p:cNvPicPr>
@@ -8234,8 +8286,8 @@
         </p:blipFill>
         <p:spPr>
           <a:xfrm>
-            <a:off x="715061" y="1711757"/>
-            <a:ext cx="252374" cy="252374"/>
+            <a:off x="566928" y="2093976"/>
+            <a:ext cx="329184" cy="329184"/>
           </a:xfrm>
           <a:prstGeom prst="rect">
             <a:avLst/>
@@ -8244,69 +8296,69 @@
       </p:pic>
       <p:sp>
         <p:nvSpPr>
-          <p:cNvPr id="9" name="Text 6"/>
-          <p:cNvSpPr/>
-          <p:nvPr/>
-        </p:nvSpPr>
-        <p:spPr>
-          <a:xfrm>
-            <a:off x="1188720" y="1554480"/>
-            <a:ext cx="4572000" cy="566928"/>
-          </a:xfrm>
-          <a:prstGeom prst="rect">
-            <a:avLst/>
-          </a:prstGeom>
-          <a:noFill/>
-          <a:ln/>
-        </p:spPr>
-        <p:txBody>
-          <a:bodyPr wrap="square" lIns="0" tIns="0" rIns="0" bIns="0" rtlCol="0" anchor="ctr"/>
-          <a:lstStyle/>
-          <a:p>
-            <a:pPr indent="0" marL="0">
-              <a:buNone/>
-            </a:pPr>
-            <a:r>
-              <a:rPr lang="en-US" sz="1400" b="1" dirty="0">
-                <a:solidFill>
-                  <a:srgbClr val="FFFFFF"/>
+          <p:cNvPr id="7" name="Text 4"/>
+          <p:cNvSpPr/>
+          <p:nvPr/>
+        </p:nvSpPr>
+        <p:spPr>
+          <a:xfrm>
+            <a:off x="1097280" y="2057400"/>
+            <a:ext cx="10424160" cy="292608"/>
+          </a:xfrm>
+          <a:prstGeom prst="rect">
+            <a:avLst/>
+          </a:prstGeom>
+          <a:noFill/>
+          <a:ln/>
+        </p:spPr>
+        <p:txBody>
+          <a:bodyPr wrap="square" lIns="0" tIns="0" rIns="0" bIns="0" rtlCol="0" anchor="ctr"/>
+          <a:lstStyle/>
+          <a:p>
+            <a:pPr indent="0" marL="0">
+              <a:buNone/>
+            </a:pPr>
+            <a:r>
+              <a:rPr lang="en-US" sz="1500" b="1" dirty="0">
+                <a:solidFill>
+                  <a:srgbClr val="0D1F33"/>
                 </a:solidFill>
                 <a:latin typeface="Arial" pitchFamily="34" charset="0"/>
                 <a:ea typeface="Arial" pitchFamily="34" charset="-122"/>
                 <a:cs typeface="Arial" pitchFamily="34" charset="-120"/>
               </a:rPr>
-              <a:t>Patent-filing velocity</a:t>
-            </a:r>
-            <a:endParaRPr lang="en-US" sz="1400" dirty="0"/>
-          </a:p>
-        </p:txBody>
-      </p:sp>
-      <p:sp>
-        <p:nvSpPr>
-          <p:cNvPr id="10" name="Text 7"/>
-          <p:cNvSpPr/>
-          <p:nvPr/>
-        </p:nvSpPr>
-        <p:spPr>
-          <a:xfrm>
-            <a:off x="731520" y="2240280"/>
-            <a:ext cx="4983480" cy="1143000"/>
-          </a:xfrm>
-          <a:prstGeom prst="rect">
-            <a:avLst/>
-          </a:prstGeom>
-          <a:noFill/>
-          <a:ln/>
-        </p:spPr>
-        <p:txBody>
-          <a:bodyPr wrap="square" lIns="0" tIns="0" rIns="0" bIns="0" rtlCol="0" anchor="ctr"/>
-          <a:lstStyle/>
-          <a:p>
-            <a:pPr indent="0" marL="0">
-              <a:buNone/>
-            </a:pPr>
-            <a:r>
-              <a:rPr lang="en-US" sz="1050" dirty="0">
+              <a:t>It finds its own blind spots</a:t>
+            </a:r>
+            <a:endParaRPr lang="en-US" sz="1500" dirty="0"/>
+          </a:p>
+        </p:txBody>
+      </p:sp>
+      <p:sp>
+        <p:nvSpPr>
+          <p:cNvPr id="8" name="Text 5"/>
+          <p:cNvSpPr/>
+          <p:nvPr/>
+        </p:nvSpPr>
+        <p:spPr>
+          <a:xfrm>
+            <a:off x="1097280" y="2368296"/>
+            <a:ext cx="10424160" cy="566928"/>
+          </a:xfrm>
+          <a:prstGeom prst="rect">
+            <a:avLst/>
+          </a:prstGeom>
+          <a:noFill/>
+          <a:ln/>
+        </p:spPr>
+        <p:txBody>
+          <a:bodyPr wrap="square" lIns="0" tIns="0" rIns="0" bIns="0" rtlCol="0" anchor="ctr"/>
+          <a:lstStyle/>
+          <a:p>
+            <a:pPr indent="0" marL="0">
+              <a:buNone/>
+            </a:pPr>
+            <a:r>
+              <a:rPr lang="en-US" sz="1150" dirty="0">
                 <a:solidFill>
                   <a:srgbClr val="5B6B7F"/>
                 </a:solidFill>
@@ -8314,91 +8366,15 @@
                 <a:ea typeface="Arial" pitchFamily="34" charset="-122"/>
                 <a:cs typeface="Arial" pitchFamily="34" charset="-120"/>
               </a:rPr>
-              <a:t>US filings per year for each technology, with a computed accelerating / steady / declining label. A rising curve is an observable early signal — not an opinion.</a:t>
-            </a:r>
-            <a:endParaRPr lang="en-US" sz="1050" dirty="0"/>
-          </a:p>
-        </p:txBody>
-      </p:sp>
-      <p:sp>
-        <p:nvSpPr>
-          <p:cNvPr id="11" name="Shape 8"/>
-          <p:cNvSpPr/>
-          <p:nvPr/>
-        </p:nvSpPr>
-        <p:spPr>
-          <a:xfrm>
-            <a:off x="6217920" y="1554480"/>
-            <a:ext cx="5440680" cy="1901952"/>
-          </a:xfrm>
-          <a:prstGeom prst="roundRect">
-            <a:avLst>
-              <a:gd name="adj" fmla="val 3365"/>
-            </a:avLst>
-          </a:prstGeom>
-          <a:solidFill>
-            <a:srgbClr val="FFFFFF"/>
-          </a:solidFill>
-          <a:ln w="9525">
-            <a:solidFill>
-              <a:srgbClr val="D7E0EA"/>
-            </a:solidFill>
-            <a:prstDash val="solid"/>
-          </a:ln>
-          <a:effectLst>
-            <a:outerShdw sx="100000" sy="100000" kx="0" ky="0" algn="bl" rotWithShape="0" blurRad="88900" dist="25400" dir="5400000">
-              <a:srgbClr val="9FB0C2">
-                <a:alpha val="30000"/>
-              </a:srgbClr>
-            </a:outerShdw>
-          </a:effectLst>
-        </p:spPr>
-      </p:sp>
-      <p:sp>
-        <p:nvSpPr>
-          <p:cNvPr id="12" name="Shape 9"/>
-          <p:cNvSpPr/>
-          <p:nvPr/>
-        </p:nvSpPr>
-        <p:spPr>
-          <a:xfrm>
-            <a:off x="6217920" y="1554480"/>
-            <a:ext cx="5440680" cy="566928"/>
-          </a:xfrm>
-          <a:prstGeom prst="roundRect">
-            <a:avLst>
-              <a:gd name="adj" fmla="val 11290"/>
-            </a:avLst>
-          </a:prstGeom>
-          <a:solidFill>
-            <a:srgbClr val="F59E0B"/>
-          </a:solidFill>
-          <a:ln/>
-        </p:spPr>
-      </p:sp>
-      <p:sp>
-        <p:nvSpPr>
-          <p:cNvPr id="13" name="Shape 10"/>
-          <p:cNvSpPr/>
-          <p:nvPr/>
-        </p:nvSpPr>
-        <p:spPr>
-          <a:xfrm>
-            <a:off x="6345936" y="1627632"/>
-            <a:ext cx="420624" cy="420624"/>
-          </a:xfrm>
-          <a:prstGeom prst="ellipse">
-            <a:avLst/>
-          </a:prstGeom>
-          <a:solidFill>
-            <a:srgbClr val="F59E0B"/>
-          </a:solidFill>
-          <a:ln/>
-        </p:spPr>
+              <a:t>A KIND ontology classifies every technology — material, process, architecture, control. Whole categories the register was blind to were found by checking itself against live research, not by waiting for someone to notice.</a:t>
+            </a:r>
+            <a:endParaRPr lang="en-US" sz="1150" dirty="0"/>
+          </a:p>
+        </p:txBody>
       </p:sp>
       <p:pic>
         <p:nvPicPr>
-          <p:cNvPr id="14" name="Image 1" descr="preencoded.png">    </p:cNvPr>
+          <p:cNvPr id="9" name="Image 1" descr="preencoded.png">    </p:cNvPr>
           <p:cNvPicPr>
             <a:picLocks noChangeAspect="1"/>
           </p:cNvPicPr>
@@ -8412,8 +8388,8 @@
         </p:blipFill>
         <p:spPr>
           <a:xfrm>
-            <a:off x="6430061" y="1711757"/>
-            <a:ext cx="252374" cy="252374"/>
+            <a:off x="566928" y="3118104"/>
+            <a:ext cx="329184" cy="329184"/>
           </a:xfrm>
           <a:prstGeom prst="rect">
             <a:avLst/>
@@ -8422,69 +8398,69 @@
       </p:pic>
       <p:sp>
         <p:nvSpPr>
-          <p:cNvPr id="15" name="Text 11"/>
-          <p:cNvSpPr/>
-          <p:nvPr/>
-        </p:nvSpPr>
-        <p:spPr>
-          <a:xfrm>
-            <a:off x="6903720" y="1554480"/>
-            <a:ext cx="4572000" cy="566928"/>
-          </a:xfrm>
-          <a:prstGeom prst="rect">
-            <a:avLst/>
-          </a:prstGeom>
-          <a:noFill/>
-          <a:ln/>
-        </p:spPr>
-        <p:txBody>
-          <a:bodyPr wrap="square" lIns="0" tIns="0" rIns="0" bIns="0" rtlCol="0" anchor="ctr"/>
-          <a:lstStyle/>
-          <a:p>
-            <a:pPr indent="0" marL="0">
-              <a:buNone/>
-            </a:pPr>
-            <a:r>
-              <a:rPr lang="en-US" sz="1400" b="1" dirty="0">
-                <a:solidFill>
-                  <a:srgbClr val="FFFFFF"/>
+          <p:cNvPr id="10" name="Text 6"/>
+          <p:cNvSpPr/>
+          <p:nvPr/>
+        </p:nvSpPr>
+        <p:spPr>
+          <a:xfrm>
+            <a:off x="1097280" y="3081528"/>
+            <a:ext cx="10424160" cy="292608"/>
+          </a:xfrm>
+          <a:prstGeom prst="rect">
+            <a:avLst/>
+          </a:prstGeom>
+          <a:noFill/>
+          <a:ln/>
+        </p:spPr>
+        <p:txBody>
+          <a:bodyPr wrap="square" lIns="0" tIns="0" rIns="0" bIns="0" rtlCol="0" anchor="ctr"/>
+          <a:lstStyle/>
+          <a:p>
+            <a:pPr indent="0" marL="0">
+              <a:buNone/>
+            </a:pPr>
+            <a:r>
+              <a:rPr lang="en-US" sz="1500" b="1" dirty="0">
+                <a:solidFill>
+                  <a:srgbClr val="0D1F33"/>
                 </a:solidFill>
                 <a:latin typeface="Arial" pitchFamily="34" charset="0"/>
                 <a:ea typeface="Arial" pitchFamily="34" charset="-122"/>
                 <a:cs typeface="Arial" pitchFamily="34" charset="-120"/>
               </a:rPr>
-              <a:t>Deep research, cite-or-drop</a:t>
-            </a:r>
-            <a:endParaRPr lang="en-US" sz="1400" dirty="0"/>
-          </a:p>
-        </p:txBody>
-      </p:sp>
-      <p:sp>
-        <p:nvSpPr>
-          <p:cNvPr id="16" name="Text 12"/>
-          <p:cNvSpPr/>
-          <p:nvPr/>
-        </p:nvSpPr>
-        <p:spPr>
-          <a:xfrm>
-            <a:off x="6446520" y="2240280"/>
-            <a:ext cx="4983480" cy="1143000"/>
-          </a:xfrm>
-          <a:prstGeom prst="rect">
-            <a:avLst/>
-          </a:prstGeom>
-          <a:noFill/>
-          <a:ln/>
-        </p:spPr>
-        <p:txBody>
-          <a:bodyPr wrap="square" lIns="0" tIns="0" rIns="0" bIns="0" rtlCol="0" anchor="ctr"/>
-          <a:lstStyle/>
-          <a:p>
-            <a:pPr indent="0" marL="0">
-              <a:buNone/>
-            </a:pPr>
-            <a:r>
-              <a:rPr lang="en-US" sz="1050" dirty="0">
+              <a:t>The frontier check is region-neutral</a:t>
+            </a:r>
+            <a:endParaRPr lang="en-US" sz="1500" dirty="0"/>
+          </a:p>
+        </p:txBody>
+      </p:sp>
+      <p:sp>
+        <p:nvSpPr>
+          <p:cNvPr id="11" name="Text 7"/>
+          <p:cNvSpPr/>
+          <p:nvPr/>
+        </p:nvSpPr>
+        <p:spPr>
+          <a:xfrm>
+            <a:off x="1097280" y="3392424"/>
+            <a:ext cx="10424160" cy="566928"/>
+          </a:xfrm>
+          <a:prstGeom prst="rect">
+            <a:avLst/>
+          </a:prstGeom>
+          <a:noFill/>
+          <a:ln/>
+        </p:spPr>
+        <p:txBody>
+          <a:bodyPr wrap="square" lIns="0" tIns="0" rIns="0" bIns="0" rtlCol="0" anchor="ctr"/>
+          <a:lstStyle/>
+          <a:p>
+            <a:pPr indent="0" marL="0">
+              <a:buNone/>
+            </a:pPr>
+            <a:r>
+              <a:rPr lang="en-US" sz="1150" dirty="0">
                 <a:solidFill>
                   <a:srgbClr val="5B6B7F"/>
                 </a:solidFill>
@@ -8492,91 +8468,15 @@
                 <a:ea typeface="Arial" pitchFamily="34" charset="-122"/>
                 <a:cs typeface="Arial" pitchFamily="34" charset="-120"/>
               </a:rPr>
-              <a:t>Live web + patent retrieval, then AI synthesis where every finding must cite a retrieved source. Uncited claims are dropped in code — and it reports whether evidence supports or challenges the register.</a:t>
-            </a:r>
-            <a:endParaRPr lang="en-US" sz="1050" dirty="0"/>
-          </a:p>
-        </p:txBody>
-      </p:sp>
-      <p:sp>
-        <p:nvSpPr>
-          <p:cNvPr id="17" name="Shape 13"/>
-          <p:cNvSpPr/>
-          <p:nvPr/>
-        </p:nvSpPr>
-        <p:spPr>
-          <a:xfrm>
-            <a:off x="502920" y="3639312"/>
-            <a:ext cx="5440680" cy="1901952"/>
-          </a:xfrm>
-          <a:prstGeom prst="roundRect">
-            <a:avLst>
-              <a:gd name="adj" fmla="val 3365"/>
-            </a:avLst>
-          </a:prstGeom>
-          <a:solidFill>
-            <a:srgbClr val="FFFFFF"/>
-          </a:solidFill>
-          <a:ln w="9525">
-            <a:solidFill>
-              <a:srgbClr val="D7E0EA"/>
-            </a:solidFill>
-            <a:prstDash val="solid"/>
-          </a:ln>
-          <a:effectLst>
-            <a:outerShdw sx="100000" sy="100000" kx="0" ky="0" algn="bl" rotWithShape="0" blurRad="88900" dist="25400" dir="5400000">
-              <a:srgbClr val="9FB0C2">
-                <a:alpha val="30000"/>
-              </a:srgbClr>
-            </a:outerShdw>
-          </a:effectLst>
-        </p:spPr>
-      </p:sp>
-      <p:sp>
-        <p:nvSpPr>
-          <p:cNvPr id="18" name="Shape 14"/>
-          <p:cNvSpPr/>
-          <p:nvPr/>
-        </p:nvSpPr>
-        <p:spPr>
-          <a:xfrm>
-            <a:off x="502920" y="3639312"/>
-            <a:ext cx="5440680" cy="566928"/>
-          </a:xfrm>
-          <a:prstGeom prst="roundRect">
-            <a:avLst>
-              <a:gd name="adj" fmla="val 11290"/>
-            </a:avLst>
-          </a:prstGeom>
-          <a:solidFill>
-            <a:srgbClr val="6D28D9"/>
-          </a:solidFill>
-          <a:ln/>
-        </p:spPr>
-      </p:sp>
-      <p:sp>
-        <p:nvSpPr>
-          <p:cNvPr id="19" name="Shape 15"/>
-          <p:cNvSpPr/>
-          <p:nvPr/>
-        </p:nvSpPr>
-        <p:spPr>
-          <a:xfrm>
-            <a:off x="630936" y="3712464"/>
-            <a:ext cx="420624" cy="420624"/>
-          </a:xfrm>
-          <a:prstGeom prst="ellipse">
-            <a:avLst/>
-          </a:prstGeom>
-          <a:solidFill>
-            <a:srgbClr val="6D28D9"/>
-          </a:solidFill>
-          <a:ln/>
-        </p:spPr>
+              <a:t>An earlier version privileged one country when deciding what counted as "frontier". That is a bias, not a judgement, and it was removed — the check now reads the same wherever the evidence comes from.</a:t>
+            </a:r>
+            <a:endParaRPr lang="en-US" sz="1150" dirty="0"/>
+          </a:p>
+        </p:txBody>
       </p:sp>
       <p:pic>
         <p:nvPicPr>
-          <p:cNvPr id="20" name="Image 2" descr="preencoded.png">    </p:cNvPr>
+          <p:cNvPr id="12" name="Image 2" descr="preencoded.png">    </p:cNvPr>
           <p:cNvPicPr>
             <a:picLocks noChangeAspect="1"/>
           </p:cNvPicPr>
@@ -8590,8 +8490,8 @@
         </p:blipFill>
         <p:spPr>
           <a:xfrm>
-            <a:off x="715061" y="3796589"/>
-            <a:ext cx="252374" cy="252374"/>
+            <a:off x="566928" y="4142232"/>
+            <a:ext cx="329184" cy="329184"/>
           </a:xfrm>
           <a:prstGeom prst="rect">
             <a:avLst/>
@@ -8600,69 +8500,69 @@
       </p:pic>
       <p:sp>
         <p:nvSpPr>
-          <p:cNvPr id="21" name="Text 16"/>
-          <p:cNvSpPr/>
-          <p:nvPr/>
-        </p:nvSpPr>
-        <p:spPr>
-          <a:xfrm>
-            <a:off x="1188720" y="3639312"/>
-            <a:ext cx="4572000" cy="566928"/>
-          </a:xfrm>
-          <a:prstGeom prst="rect">
-            <a:avLst/>
-          </a:prstGeom>
-          <a:noFill/>
-          <a:ln/>
-        </p:spPr>
-        <p:txBody>
-          <a:bodyPr wrap="square" lIns="0" tIns="0" rIns="0" bIns="0" rtlCol="0" anchor="ctr"/>
-          <a:lstStyle/>
-          <a:p>
-            <a:pPr indent="0" marL="0">
-              <a:buNone/>
-            </a:pPr>
-            <a:r>
-              <a:rPr lang="en-US" sz="1400" b="1" dirty="0">
-                <a:solidFill>
-                  <a:srgbClr val="FFFFFF"/>
+          <p:cNvPr id="13" name="Text 8"/>
+          <p:cNvSpPr/>
+          <p:nvPr/>
+        </p:nvSpPr>
+        <p:spPr>
+          <a:xfrm>
+            <a:off x="1097280" y="4105656"/>
+            <a:ext cx="10424160" cy="292608"/>
+          </a:xfrm>
+          <a:prstGeom prst="rect">
+            <a:avLst/>
+          </a:prstGeom>
+          <a:noFill/>
+          <a:ln/>
+        </p:spPr>
+        <p:txBody>
+          <a:bodyPr wrap="square" lIns="0" tIns="0" rIns="0" bIns="0" rtlCol="0" anchor="ctr"/>
+          <a:lstStyle/>
+          <a:p>
+            <a:pPr indent="0" marL="0">
+              <a:buNone/>
+            </a:pPr>
+            <a:r>
+              <a:rPr lang="en-US" sz="1500" b="1" dirty="0">
+                <a:solidFill>
+                  <a:srgbClr val="0D1F33"/>
                 </a:solidFill>
                 <a:latin typeface="Arial" pitchFamily="34" charset="0"/>
                 <a:ea typeface="Arial" pitchFamily="34" charset="-122"/>
                 <a:cs typeface="Arial" pitchFamily="34" charset="-120"/>
               </a:rPr>
-              <a:t>Expert panel critique</a:t>
-            </a:r>
-            <a:endParaRPr lang="en-US" sz="1400" dirty="0"/>
-          </a:p>
-        </p:txBody>
-      </p:sp>
-      <p:sp>
-        <p:nvSpPr>
-          <p:cNvPr id="22" name="Text 17"/>
-          <p:cNvSpPr/>
-          <p:nvPr/>
-        </p:nvSpPr>
-        <p:spPr>
-          <a:xfrm>
-            <a:off x="731520" y="4325112"/>
-            <a:ext cx="4983480" cy="1143000"/>
-          </a:xfrm>
-          <a:prstGeom prst="rect">
-            <a:avLst/>
-          </a:prstGeom>
-          <a:noFill/>
-          <a:ln/>
-        </p:spPr>
-        <p:txBody>
-          <a:bodyPr wrap="square" lIns="0" tIns="0" rIns="0" bIns="0" rtlCol="0" anchor="ctr"/>
-          <a:lstStyle/>
-          <a:p>
-            <a:pPr indent="0" marL="0">
-              <a:buNone/>
-            </a:pPr>
-            <a:r>
-              <a:rPr lang="en-US" sz="1050" dirty="0">
+              <a:t>Every technology gets a dossier</a:t>
+            </a:r>
+            <a:endParaRPr lang="en-US" sz="1500" dirty="0"/>
+          </a:p>
+        </p:txBody>
+      </p:sp>
+      <p:sp>
+        <p:nvSpPr>
+          <p:cNvPr id="14" name="Text 9"/>
+          <p:cNvSpPr/>
+          <p:nvPr/>
+        </p:nvSpPr>
+        <p:spPr>
+          <a:xfrm>
+            <a:off x="1097280" y="4416552"/>
+            <a:ext cx="10424160" cy="566928"/>
+          </a:xfrm>
+          <a:prstGeom prst="rect">
+            <a:avLst/>
+          </a:prstGeom>
+          <a:noFill/>
+          <a:ln/>
+        </p:spPr>
+        <p:txBody>
+          <a:bodyPr wrap="square" lIns="0" tIns="0" rIns="0" bIns="0" rtlCol="0" anchor="ctr"/>
+          <a:lstStyle/>
+          <a:p>
+            <a:pPr indent="0" marL="0">
+              <a:buNone/>
+            </a:pPr>
+            <a:r>
+              <a:rPr lang="en-US" sz="1150" dirty="0">
                 <a:solidFill>
                   <a:srgbClr val="5B6B7F"/>
                 </a:solidFill>
@@ -8670,91 +8570,15 @@
                 <a:ea typeface="Arial" pitchFamily="34" charset="-122"/>
                 <a:cs typeface="Arial" pitchFamily="34" charset="-120"/>
               </a:rPr>
-              <a:t>Three AI sceptics — over-hype historian, supply-chain realist, regulatory analyst — stamp agree / caution / challenge on each card. They critique timing; they cannot change a number.</a:t>
-            </a:r>
-            <a:endParaRPr lang="en-US" sz="1050" dirty="0"/>
-          </a:p>
-        </p:txBody>
-      </p:sp>
-      <p:sp>
-        <p:nvSpPr>
-          <p:cNvPr id="23" name="Shape 18"/>
-          <p:cNvSpPr/>
-          <p:nvPr/>
-        </p:nvSpPr>
-        <p:spPr>
-          <a:xfrm>
-            <a:off x="6217920" y="3639312"/>
-            <a:ext cx="5440680" cy="1901952"/>
-          </a:xfrm>
-          <a:prstGeom prst="roundRect">
-            <a:avLst>
-              <a:gd name="adj" fmla="val 3365"/>
-            </a:avLst>
-          </a:prstGeom>
-          <a:solidFill>
-            <a:srgbClr val="FFFFFF"/>
-          </a:solidFill>
-          <a:ln w="9525">
-            <a:solidFill>
-              <a:srgbClr val="D7E0EA"/>
-            </a:solidFill>
-            <a:prstDash val="solid"/>
-          </a:ln>
-          <a:effectLst>
-            <a:outerShdw sx="100000" sy="100000" kx="0" ky="0" algn="bl" rotWithShape="0" blurRad="88900" dist="25400" dir="5400000">
-              <a:srgbClr val="9FB0C2">
-                <a:alpha val="30000"/>
-              </a:srgbClr>
-            </a:outerShdw>
-          </a:effectLst>
-        </p:spPr>
-      </p:sp>
-      <p:sp>
-        <p:nvSpPr>
-          <p:cNvPr id="24" name="Shape 19"/>
-          <p:cNvSpPr/>
-          <p:nvPr/>
-        </p:nvSpPr>
-        <p:spPr>
-          <a:xfrm>
-            <a:off x="6217920" y="3639312"/>
-            <a:ext cx="5440680" cy="566928"/>
-          </a:xfrm>
-          <a:prstGeom prst="roundRect">
-            <a:avLst>
-              <a:gd name="adj" fmla="val 11290"/>
-            </a:avLst>
-          </a:prstGeom>
-          <a:solidFill>
-            <a:srgbClr val="0D1F33"/>
-          </a:solidFill>
-          <a:ln/>
-        </p:spPr>
-      </p:sp>
-      <p:sp>
-        <p:nvSpPr>
-          <p:cNvPr id="25" name="Shape 20"/>
-          <p:cNvSpPr/>
-          <p:nvPr/>
-        </p:nvSpPr>
-        <p:spPr>
-          <a:xfrm>
-            <a:off x="6345936" y="3712464"/>
-            <a:ext cx="420624" cy="420624"/>
-          </a:xfrm>
-          <a:prstGeom prst="ellipse">
-            <a:avLst/>
-          </a:prstGeom>
-          <a:solidFill>
-            <a:srgbClr val="0D1F33"/>
-          </a:solidFill>
-          <a:ln/>
-        </p:spPr>
+              <a:t>Not a one-line claim: what it is, who is shipping it, what it costs, and the case AGAINST it. A foresight entry with no counter-argument is marketing.</a:t>
+            </a:r>
+            <a:endParaRPr lang="en-US" sz="1150" dirty="0"/>
+          </a:p>
+        </p:txBody>
       </p:sp>
       <p:pic>
         <p:nvPicPr>
-          <p:cNvPr id="26" name="Image 3" descr="preencoded.png">    </p:cNvPr>
+          <p:cNvPr id="15" name="Image 3" descr="preencoded.png">    </p:cNvPr>
           <p:cNvPicPr>
             <a:picLocks noChangeAspect="1"/>
           </p:cNvPicPr>
@@ -8768,8 +8592,8 @@
         </p:blipFill>
         <p:spPr>
           <a:xfrm>
-            <a:off x="6430061" y="3796589"/>
-            <a:ext cx="252374" cy="252374"/>
+            <a:off x="566928" y="5166360"/>
+            <a:ext cx="329184" cy="329184"/>
           </a:xfrm>
           <a:prstGeom prst="rect">
             <a:avLst/>
@@ -8778,69 +8602,69 @@
       </p:pic>
       <p:sp>
         <p:nvSpPr>
-          <p:cNvPr id="27" name="Text 21"/>
-          <p:cNvSpPr/>
-          <p:nvPr/>
-        </p:nvSpPr>
-        <p:spPr>
-          <a:xfrm>
-            <a:off x="6903720" y="3639312"/>
-            <a:ext cx="4572000" cy="566928"/>
-          </a:xfrm>
-          <a:prstGeom prst="rect">
-            <a:avLst/>
-          </a:prstGeom>
-          <a:noFill/>
-          <a:ln/>
-        </p:spPr>
-        <p:txBody>
-          <a:bodyPr wrap="square" lIns="0" tIns="0" rIns="0" bIns="0" rtlCol="0" anchor="ctr"/>
-          <a:lstStyle/>
-          <a:p>
-            <a:pPr indent="0" marL="0">
-              <a:buNone/>
-            </a:pPr>
-            <a:r>
-              <a:rPr lang="en-US" sz="1400" b="1" dirty="0">
-                <a:solidFill>
-                  <a:srgbClr val="FFFFFF"/>
+          <p:cNvPr id="16" name="Text 10"/>
+          <p:cNvSpPr/>
+          <p:nvPr/>
+        </p:nvSpPr>
+        <p:spPr>
+          <a:xfrm>
+            <a:off x="1097280" y="5129784"/>
+            <a:ext cx="10424160" cy="292608"/>
+          </a:xfrm>
+          <a:prstGeom prst="rect">
+            <a:avLst/>
+          </a:prstGeom>
+          <a:noFill/>
+          <a:ln/>
+        </p:spPr>
+        <p:txBody>
+          <a:bodyPr wrap="square" lIns="0" tIns="0" rIns="0" bIns="0" rtlCol="0" anchor="ctr"/>
+          <a:lstStyle/>
+          <a:p>
+            <a:pPr indent="0" marL="0">
+              <a:buNone/>
+            </a:pPr>
+            <a:r>
+              <a:rPr lang="en-US" sz="1500" b="1" dirty="0">
+                <a:solidFill>
+                  <a:srgbClr val="0D1F33"/>
                 </a:solidFill>
                 <a:latin typeface="Arial" pitchFamily="34" charset="0"/>
                 <a:ea typeface="Arial" pitchFamily="34" charset="-122"/>
                 <a:cs typeface="Arial" pitchFamily="34" charset="-120"/>
               </a:rPr>
-              <a:t>Prediction Ledger</a:t>
-            </a:r>
-            <a:endParaRPr lang="en-US" sz="1400" dirty="0"/>
-          </a:p>
-        </p:txBody>
-      </p:sp>
-      <p:sp>
-        <p:nvSpPr>
-          <p:cNvPr id="28" name="Text 22"/>
-          <p:cNvSpPr/>
-          <p:nvPr/>
-        </p:nvSpPr>
-        <p:spPr>
-          <a:xfrm>
-            <a:off x="6446520" y="4325112"/>
-            <a:ext cx="4983480" cy="1143000"/>
-          </a:xfrm>
-          <a:prstGeom prst="rect">
-            <a:avLst/>
-          </a:prstGeom>
-          <a:noFill/>
-          <a:ln/>
-        </p:spPr>
-        <p:txBody>
-          <a:bodyPr wrap="square" lIns="0" tIns="0" rIns="0" bIns="0" rtlCol="0" anchor="ctr"/>
-          <a:lstStyle/>
-          <a:p>
-            <a:pPr indent="0" marL="0">
-              <a:buNone/>
-            </a:pPr>
-            <a:r>
-              <a:rPr lang="en-US" sz="1050" dirty="0">
+              <a:t>Curation is a measured backlog</a:t>
+            </a:r>
+            <a:endParaRPr lang="en-US" sz="1500" dirty="0"/>
+          </a:p>
+        </p:txBody>
+      </p:sp>
+      <p:sp>
+        <p:nvSpPr>
+          <p:cNvPr id="17" name="Text 11"/>
+          <p:cNvSpPr/>
+          <p:nvPr/>
+        </p:nvSpPr>
+        <p:spPr>
+          <a:xfrm>
+            <a:off x="1097280" y="5440680"/>
+            <a:ext cx="10424160" cy="566928"/>
+          </a:xfrm>
+          <a:prstGeom prst="rect">
+            <a:avLst/>
+          </a:prstGeom>
+          <a:noFill/>
+          <a:ln/>
+        </p:spPr>
+        <p:txBody>
+          <a:bodyPr wrap="square" lIns="0" tIns="0" rIns="0" bIns="0" rtlCol="0" anchor="ctr"/>
+          <a:lstStyle/>
+          <a:p>
+            <a:pPr indent="0" marL="0">
+              <a:buNone/>
+            </a:pPr>
+            <a:r>
+              <a:rPr lang="en-US" sz="1150" dirty="0">
                 <a:solidFill>
                   <a:srgbClr val="5B6B7F"/>
                 </a:solidFill>
@@ -8848,15 +8672,54 @@
                 <a:ea typeface="Arial" pitchFamily="34" charset="-122"/>
                 <a:cs typeface="Arial" pitchFamily="34" charset="-120"/>
               </a:rPr>
-              <a:t>Every forecast can be snapshotted. On re-curation the tool scores its own past projections — mean error, shown to us. "A foresight tool that never checks its past predictions is astrology."</a:t>
-            </a:r>
-            <a:endParaRPr lang="en-US" sz="1050" dirty="0"/>
-          </a:p>
-        </p:txBody>
-      </p:sp>
-      <p:sp>
-        <p:nvSpPr>
-          <p:cNvPr id="29" name="Text 23"/>
+              <a:t>`npm run horizon:audit` grades the register on evidence, freshness and precision, and prints what to fix next. Curation debt is visible instead of accumulating quietly.</a:t>
+            </a:r>
+            <a:endParaRPr lang="en-US" sz="1150" dirty="0"/>
+          </a:p>
+        </p:txBody>
+      </p:sp>
+      <p:sp>
+        <p:nvSpPr>
+          <p:cNvPr id="18" name="Text 12"/>
+          <p:cNvSpPr/>
+          <p:nvPr/>
+        </p:nvSpPr>
+        <p:spPr>
+          <a:xfrm>
+            <a:off x="502920" y="5870448"/>
+            <a:ext cx="11155680" cy="420624"/>
+          </a:xfrm>
+          <a:prstGeom prst="rect">
+            <a:avLst/>
+          </a:prstGeom>
+          <a:noFill/>
+          <a:ln/>
+        </p:spPr>
+        <p:txBody>
+          <a:bodyPr wrap="square" rtlCol="0" anchor="ctr"/>
+          <a:lstStyle/>
+          <a:p>
+            <a:pPr algn="ctr" indent="0" marL="0">
+              <a:buNone/>
+            </a:pPr>
+            <a:r>
+              <a:rPr lang="en-US" sz="1400" b="1" i="1" dirty="0">
+                <a:solidFill>
+                  <a:srgbClr val="0D1F33"/>
+                </a:solidFill>
+                <a:latin typeface="Arial" pitchFamily="34" charset="0"/>
+                <a:ea typeface="Arial" pitchFamily="34" charset="-122"/>
+                <a:cs typeface="Arial" pitchFamily="34" charset="-120"/>
+              </a:rPr>
+              <a:t>139 technologies at the last telling, 180 today — every addition found by the tool, not by us.</a:t>
+            </a:r>
+            <a:endParaRPr lang="en-US" sz="1400" dirty="0"/>
+          </a:p>
+        </p:txBody>
+      </p:sp>
+      <p:sp>
+        <p:nvSpPr>
+          <p:cNvPr id="19" name="Text 13"/>
           <p:cNvSpPr/>
           <p:nvPr/>
         </p:nvSpPr>
@@ -8915,7 +8778,7 @@
                 <a:ea typeface="Courier New" pitchFamily="34" charset="-122"/>
                 <a:cs typeface="Courier New" pitchFamily="34" charset="-120"/>
               </a:rPr>
-              <a:t>  ·  Technology Foresight Engine  ·  13/16</a:t>
+              <a:t>  ·  Technology Foresight Engine  ·  12/17</a:t>
             </a:r>
             <a:endParaRPr lang="en-US" sz="900" dirty="0"/>
           </a:p>
@@ -9008,7 +8871,7 @@
                 <a:ea typeface="Courier New" pitchFamily="34" charset="-122"/>
                 <a:cs typeface="Courier New" pitchFamily="34" charset="-120"/>
               </a:rPr>
-              <a:t>BUSINESS VALUE</a:t>
+              <a:t>EVIDENCE LAYER</a:t>
             </a:r>
             <a:endParaRPr lang="en-US" sz="1100" dirty="0"/>
           </a:p>
@@ -9047,7 +8910,7 @@
                 <a:ea typeface="Arial" pitchFamily="34" charset="-122"/>
                 <a:cs typeface="Arial" pitchFamily="34" charset="-120"/>
               </a:rPr>
-              <a:t>What this changes for us</a:t>
+              <a:t>Prediction backed by retrieval — and graded afterwards</a:t>
             </a:r>
             <a:endParaRPr lang="en-US" sz="2800" dirty="0"/>
           </a:p>
@@ -9062,11 +8925,11 @@
         <p:spPr>
           <a:xfrm>
             <a:off x="502920" y="1554480"/>
-            <a:ext cx="5440680" cy="1755648"/>
+            <a:ext cx="5440680" cy="1901952"/>
           </a:xfrm>
           <a:prstGeom prst="roundRect">
             <a:avLst>
-              <a:gd name="adj" fmla="val 3646"/>
+              <a:gd name="adj" fmla="val 3365"/>
             </a:avLst>
           </a:prstGeom>
           <a:solidFill>
@@ -9095,19 +8958,18 @@
         </p:nvSpPr>
         <p:spPr>
           <a:xfrm>
-            <a:off x="566928" y="1618488"/>
-            <a:ext cx="137160" cy="0"/>
-          </a:xfrm>
-          <a:prstGeom prst="line">
-            <a:avLst/>
-          </a:prstGeom>
-          <a:noFill/>
-          <a:ln w="19050">
-            <a:solidFill>
-              <a:srgbClr val="F59E0B"/>
-            </a:solidFill>
-            <a:prstDash val="solid"/>
-          </a:ln>
+            <a:off x="502920" y="1554480"/>
+            <a:ext cx="5440680" cy="566928"/>
+          </a:xfrm>
+          <a:prstGeom prst="roundRect">
+            <a:avLst>
+              <a:gd name="adj" fmla="val 11290"/>
+            </a:avLst>
+          </a:prstGeom>
+          <a:solidFill>
+            <a:srgbClr val="0D9488"/>
+          </a:solidFill>
+          <a:ln/>
         </p:spPr>
       </p:sp>
       <p:sp>
@@ -9118,90 +8980,21 @@
         </p:nvSpPr>
         <p:spPr>
           <a:xfrm>
-            <a:off x="566928" y="1618488"/>
-            <a:ext cx="0" cy="137160"/>
-          </a:xfrm>
-          <a:prstGeom prst="line">
-            <a:avLst/>
-          </a:prstGeom>
-          <a:noFill/>
-          <a:ln w="19050">
-            <a:solidFill>
-              <a:srgbClr val="F59E0B"/>
-            </a:solidFill>
-            <a:prstDash val="solid"/>
-          </a:ln>
-        </p:spPr>
-      </p:sp>
-      <p:sp>
-        <p:nvSpPr>
-          <p:cNvPr id="8" name="Shape 6"/>
-          <p:cNvSpPr/>
-          <p:nvPr/>
-        </p:nvSpPr>
-        <p:spPr>
-          <a:xfrm>
-            <a:off x="5742432" y="3246120"/>
-            <a:ext cx="137160" cy="0"/>
-          </a:xfrm>
-          <a:prstGeom prst="line">
-            <a:avLst/>
-          </a:prstGeom>
-          <a:noFill/>
-          <a:ln w="19050">
-            <a:solidFill>
-              <a:srgbClr val="F59E0B"/>
-            </a:solidFill>
-            <a:prstDash val="solid"/>
-          </a:ln>
-        </p:spPr>
-      </p:sp>
-      <p:sp>
-        <p:nvSpPr>
-          <p:cNvPr id="9" name="Shape 7"/>
-          <p:cNvSpPr/>
-          <p:nvPr/>
-        </p:nvSpPr>
-        <p:spPr>
-          <a:xfrm>
-            <a:off x="5879592" y="3108960"/>
-            <a:ext cx="0" cy="137160"/>
-          </a:xfrm>
-          <a:prstGeom prst="line">
-            <a:avLst/>
-          </a:prstGeom>
-          <a:noFill/>
-          <a:ln w="19050">
-            <a:solidFill>
-              <a:srgbClr val="F59E0B"/>
-            </a:solidFill>
-            <a:prstDash val="solid"/>
-          </a:ln>
-        </p:spPr>
-      </p:sp>
-      <p:sp>
-        <p:nvSpPr>
-          <p:cNvPr id="10" name="Shape 8"/>
-          <p:cNvSpPr/>
-          <p:nvPr/>
-        </p:nvSpPr>
-        <p:spPr>
-          <a:xfrm>
-            <a:off x="722376" y="1773936"/>
-            <a:ext cx="566928" cy="566928"/>
+            <a:off x="630936" y="1627632"/>
+            <a:ext cx="420624" cy="420624"/>
           </a:xfrm>
           <a:prstGeom prst="ellipse">
             <a:avLst/>
           </a:prstGeom>
           <a:solidFill>
-            <a:srgbClr val="0D1F33"/>
+            <a:srgbClr val="0D9488"/>
           </a:solidFill>
           <a:ln/>
         </p:spPr>
       </p:sp>
       <p:pic>
         <p:nvPicPr>
-          <p:cNvPr id="11" name="Image 0" descr="preencoded.png">    </p:cNvPr>
+          <p:cNvPr id="8" name="Image 0" descr="preencoded.png">    </p:cNvPr>
           <p:cNvPicPr>
             <a:picLocks noChangeAspect="1"/>
           </p:cNvPicPr>
@@ -9215,8 +9008,8 @@
         </p:blipFill>
         <p:spPr>
           <a:xfrm>
-            <a:off x="852769" y="1904329"/>
-            <a:ext cx="306141" cy="306141"/>
+            <a:off x="715061" y="1711757"/>
+            <a:ext cx="252374" cy="252374"/>
           </a:xfrm>
           <a:prstGeom prst="rect">
             <a:avLst/>
@@ -9225,69 +9018,69 @@
       </p:pic>
       <p:sp>
         <p:nvSpPr>
-          <p:cNvPr id="12" name="Text 9"/>
-          <p:cNvSpPr/>
-          <p:nvPr/>
-        </p:nvSpPr>
-        <p:spPr>
-          <a:xfrm>
-            <a:off x="1463040" y="1737360"/>
-            <a:ext cx="4315968" cy="292608"/>
-          </a:xfrm>
-          <a:prstGeom prst="rect">
-            <a:avLst/>
-          </a:prstGeom>
-          <a:noFill/>
-          <a:ln/>
-        </p:spPr>
-        <p:txBody>
-          <a:bodyPr wrap="square" lIns="0" tIns="0" rIns="0" bIns="0" rtlCol="0" anchor="ctr"/>
-          <a:lstStyle/>
-          <a:p>
-            <a:pPr indent="0" marL="0">
-              <a:buNone/>
-            </a:pPr>
-            <a:r>
-              <a:rPr lang="en-US" sz="1450" b="1" dirty="0">
-                <a:solidFill>
-                  <a:srgbClr val="0D1F33"/>
+          <p:cNvPr id="9" name="Text 6"/>
+          <p:cNvSpPr/>
+          <p:nvPr/>
+        </p:nvSpPr>
+        <p:spPr>
+          <a:xfrm>
+            <a:off x="1188720" y="1554480"/>
+            <a:ext cx="4572000" cy="566928"/>
+          </a:xfrm>
+          <a:prstGeom prst="rect">
+            <a:avLst/>
+          </a:prstGeom>
+          <a:noFill/>
+          <a:ln/>
+        </p:spPr>
+        <p:txBody>
+          <a:bodyPr wrap="square" lIns="0" tIns="0" rIns="0" bIns="0" rtlCol="0" anchor="ctr"/>
+          <a:lstStyle/>
+          <a:p>
+            <a:pPr indent="0" marL="0">
+              <a:buNone/>
+            </a:pPr>
+            <a:r>
+              <a:rPr lang="en-US" sz="1400" b="1" dirty="0">
+                <a:solidFill>
+                  <a:srgbClr val="FFFFFF"/>
                 </a:solidFill>
                 <a:latin typeface="Arial" pitchFamily="34" charset="0"/>
                 <a:ea typeface="Arial" pitchFamily="34" charset="-122"/>
                 <a:cs typeface="Arial" pitchFamily="34" charset="-120"/>
               </a:rPr>
-              <a:t>Sharper sourcing decisions</a:t>
-            </a:r>
-            <a:endParaRPr lang="en-US" sz="1450" dirty="0"/>
-          </a:p>
-        </p:txBody>
-      </p:sp>
-      <p:sp>
-        <p:nvSpPr>
-          <p:cNvPr id="13" name="Text 10"/>
-          <p:cNvSpPr/>
-          <p:nvPr/>
-        </p:nvSpPr>
-        <p:spPr>
-          <a:xfrm>
-            <a:off x="1463040" y="2048256"/>
-            <a:ext cx="4315968" cy="1143000"/>
-          </a:xfrm>
-          <a:prstGeom prst="rect">
-            <a:avLst/>
-          </a:prstGeom>
-          <a:noFill/>
-          <a:ln/>
-        </p:spPr>
-        <p:txBody>
-          <a:bodyPr wrap="square" lIns="0" tIns="0" rIns="0" bIns="0" rtlCol="0" anchor="ctr"/>
-          <a:lstStyle/>
-          <a:p>
-            <a:pPr indent="0" marL="0">
-              <a:buNone/>
-            </a:pPr>
-            <a:r>
-              <a:rPr lang="en-US" sz="1100" dirty="0">
+              <a:t>Patent-filing velocity</a:t>
+            </a:r>
+            <a:endParaRPr lang="en-US" sz="1400" dirty="0"/>
+          </a:p>
+        </p:txBody>
+      </p:sp>
+      <p:sp>
+        <p:nvSpPr>
+          <p:cNvPr id="10" name="Text 7"/>
+          <p:cNvSpPr/>
+          <p:nvPr/>
+        </p:nvSpPr>
+        <p:spPr>
+          <a:xfrm>
+            <a:off x="731520" y="2240280"/>
+            <a:ext cx="4983480" cy="1143000"/>
+          </a:xfrm>
+          <a:prstGeom prst="rect">
+            <a:avLst/>
+          </a:prstGeom>
+          <a:noFill/>
+          <a:ln/>
+        </p:spPr>
+        <p:txBody>
+          <a:bodyPr wrap="square" lIns="0" tIns="0" rIns="0" bIns="0" rtlCol="0" anchor="ctr"/>
+          <a:lstStyle/>
+          <a:p>
+            <a:pPr indent="0" marL="0">
+              <a:buNone/>
+            </a:pPr>
+            <a:r>
+              <a:rPr lang="en-US" sz="1050" dirty="0">
                 <a:solidFill>
                   <a:srgbClr val="5B6B7F"/>
                 </a:solidFill>
@@ -9295,26 +9088,26 @@
                 <a:ea typeface="Arial" pitchFamily="34" charset="-122"/>
                 <a:cs typeface="Arial" pitchFamily="34" charset="-120"/>
               </a:rPr>
-              <a:t>Check the technology future of a part before the 7-year contract: what replaces it, when, at what cost trajectory — with confidence tiers on every call.</a:t>
-            </a:r>
-            <a:endParaRPr lang="en-US" sz="1100" dirty="0"/>
-          </a:p>
-        </p:txBody>
-      </p:sp>
-      <p:sp>
-        <p:nvSpPr>
-          <p:cNvPr id="14" name="Shape 11"/>
+              <a:t>US filings per year for each technology, with a computed accelerating / steady / declining label. A rising curve is an observable early signal — not an opinion.</a:t>
+            </a:r>
+            <a:endParaRPr lang="en-US" sz="1050" dirty="0"/>
+          </a:p>
+        </p:txBody>
+      </p:sp>
+      <p:sp>
+        <p:nvSpPr>
+          <p:cNvPr id="11" name="Shape 8"/>
           <p:cNvSpPr/>
           <p:nvPr/>
         </p:nvSpPr>
         <p:spPr>
           <a:xfrm>
             <a:off x="6217920" y="1554480"/>
-            <a:ext cx="5440680" cy="1755648"/>
+            <a:ext cx="5440680" cy="1901952"/>
           </a:xfrm>
           <a:prstGeom prst="roundRect">
             <a:avLst>
-              <a:gd name="adj" fmla="val 3646"/>
+              <a:gd name="adj" fmla="val 3365"/>
             </a:avLst>
           </a:prstGeom>
           <a:solidFill>
@@ -9337,109 +9130,19 @@
       </p:sp>
       <p:sp>
         <p:nvSpPr>
-          <p:cNvPr id="15" name="Shape 12"/>
-          <p:cNvSpPr/>
-          <p:nvPr/>
-        </p:nvSpPr>
-        <p:spPr>
-          <a:xfrm>
-            <a:off x="6281928" y="1618488"/>
-            <a:ext cx="137160" cy="0"/>
-          </a:xfrm>
-          <a:prstGeom prst="line">
-            <a:avLst/>
-          </a:prstGeom>
-          <a:noFill/>
-          <a:ln w="19050">
-            <a:solidFill>
-              <a:srgbClr val="F59E0B"/>
-            </a:solidFill>
-            <a:prstDash val="solid"/>
-          </a:ln>
-        </p:spPr>
-      </p:sp>
-      <p:sp>
-        <p:nvSpPr>
-          <p:cNvPr id="16" name="Shape 13"/>
-          <p:cNvSpPr/>
-          <p:nvPr/>
-        </p:nvSpPr>
-        <p:spPr>
-          <a:xfrm>
-            <a:off x="6281928" y="1618488"/>
-            <a:ext cx="0" cy="137160"/>
-          </a:xfrm>
-          <a:prstGeom prst="line">
-            <a:avLst/>
-          </a:prstGeom>
-          <a:noFill/>
-          <a:ln w="19050">
-            <a:solidFill>
-              <a:srgbClr val="F59E0B"/>
-            </a:solidFill>
-            <a:prstDash val="solid"/>
-          </a:ln>
-        </p:spPr>
-      </p:sp>
-      <p:sp>
-        <p:nvSpPr>
-          <p:cNvPr id="17" name="Shape 14"/>
-          <p:cNvSpPr/>
-          <p:nvPr/>
-        </p:nvSpPr>
-        <p:spPr>
-          <a:xfrm>
-            <a:off x="11457432" y="3246120"/>
-            <a:ext cx="137160" cy="0"/>
-          </a:xfrm>
-          <a:prstGeom prst="line">
-            <a:avLst/>
-          </a:prstGeom>
-          <a:noFill/>
-          <a:ln w="19050">
-            <a:solidFill>
-              <a:srgbClr val="F59E0B"/>
-            </a:solidFill>
-            <a:prstDash val="solid"/>
-          </a:ln>
-        </p:spPr>
-      </p:sp>
-      <p:sp>
-        <p:nvSpPr>
-          <p:cNvPr id="18" name="Shape 15"/>
-          <p:cNvSpPr/>
-          <p:nvPr/>
-        </p:nvSpPr>
-        <p:spPr>
-          <a:xfrm>
-            <a:off x="11594592" y="3108960"/>
-            <a:ext cx="0" cy="137160"/>
-          </a:xfrm>
-          <a:prstGeom prst="line">
-            <a:avLst/>
-          </a:prstGeom>
-          <a:noFill/>
-          <a:ln w="19050">
-            <a:solidFill>
-              <a:srgbClr val="F59E0B"/>
-            </a:solidFill>
-            <a:prstDash val="solid"/>
-          </a:ln>
-        </p:spPr>
-      </p:sp>
-      <p:sp>
-        <p:nvSpPr>
-          <p:cNvPr id="19" name="Shape 16"/>
-          <p:cNvSpPr/>
-          <p:nvPr/>
-        </p:nvSpPr>
-        <p:spPr>
-          <a:xfrm>
-            <a:off x="6437376" y="1773936"/>
-            <a:ext cx="566928" cy="566928"/>
-          </a:xfrm>
-          <a:prstGeom prst="ellipse">
-            <a:avLst/>
+          <p:cNvPr id="12" name="Shape 9"/>
+          <p:cNvSpPr/>
+          <p:nvPr/>
+        </p:nvSpPr>
+        <p:spPr>
+          <a:xfrm>
+            <a:off x="6217920" y="1554480"/>
+            <a:ext cx="5440680" cy="566928"/>
+          </a:xfrm>
+          <a:prstGeom prst="roundRect">
+            <a:avLst>
+              <a:gd name="adj" fmla="val 11290"/>
+            </a:avLst>
           </a:prstGeom>
           <a:solidFill>
             <a:srgbClr val="F59E0B"/>
@@ -9447,9 +9150,29 @@
           <a:ln/>
         </p:spPr>
       </p:sp>
+      <p:sp>
+        <p:nvSpPr>
+          <p:cNvPr id="13" name="Shape 10"/>
+          <p:cNvSpPr/>
+          <p:nvPr/>
+        </p:nvSpPr>
+        <p:spPr>
+          <a:xfrm>
+            <a:off x="6345936" y="1627632"/>
+            <a:ext cx="420624" cy="420624"/>
+          </a:xfrm>
+          <a:prstGeom prst="ellipse">
+            <a:avLst/>
+          </a:prstGeom>
+          <a:solidFill>
+            <a:srgbClr val="F59E0B"/>
+          </a:solidFill>
+          <a:ln/>
+        </p:spPr>
+      </p:sp>
       <p:pic>
         <p:nvPicPr>
-          <p:cNvPr id="20" name="Image 1" descr="preencoded.png">    </p:cNvPr>
+          <p:cNvPr id="14" name="Image 1" descr="preencoded.png">    </p:cNvPr>
           <p:cNvPicPr>
             <a:picLocks noChangeAspect="1"/>
           </p:cNvPicPr>
@@ -9463,8 +9186,8 @@
         </p:blipFill>
         <p:spPr>
           <a:xfrm>
-            <a:off x="6567769" y="1904329"/>
-            <a:ext cx="306141" cy="306141"/>
+            <a:off x="6430061" y="1711757"/>
+            <a:ext cx="252374" cy="252374"/>
           </a:xfrm>
           <a:prstGeom prst="rect">
             <a:avLst/>
@@ -9473,69 +9196,69 @@
       </p:pic>
       <p:sp>
         <p:nvSpPr>
-          <p:cNvPr id="21" name="Text 17"/>
-          <p:cNvSpPr/>
-          <p:nvPr/>
-        </p:nvSpPr>
-        <p:spPr>
-          <a:xfrm>
-            <a:off x="7178040" y="1737360"/>
-            <a:ext cx="4315968" cy="292608"/>
-          </a:xfrm>
-          <a:prstGeom prst="rect">
-            <a:avLst/>
-          </a:prstGeom>
-          <a:noFill/>
-          <a:ln/>
-        </p:spPr>
-        <p:txBody>
-          <a:bodyPr wrap="square" lIns="0" tIns="0" rIns="0" bIns="0" rtlCol="0" anchor="ctr"/>
-          <a:lstStyle/>
-          <a:p>
-            <a:pPr indent="0" marL="0">
-              <a:buNone/>
-            </a:pPr>
-            <a:r>
-              <a:rPr lang="en-US" sz="1450" b="1" dirty="0">
-                <a:solidFill>
-                  <a:srgbClr val="0D1F33"/>
+          <p:cNvPr id="15" name="Text 11"/>
+          <p:cNvSpPr/>
+          <p:nvPr/>
+        </p:nvSpPr>
+        <p:spPr>
+          <a:xfrm>
+            <a:off x="6903720" y="1554480"/>
+            <a:ext cx="4572000" cy="566928"/>
+          </a:xfrm>
+          <a:prstGeom prst="rect">
+            <a:avLst/>
+          </a:prstGeom>
+          <a:noFill/>
+          <a:ln/>
+        </p:spPr>
+        <p:txBody>
+          <a:bodyPr wrap="square" lIns="0" tIns="0" rIns="0" bIns="0" rtlCol="0" anchor="ctr"/>
+          <a:lstStyle/>
+          <a:p>
+            <a:pPr indent="0" marL="0">
+              <a:buNone/>
+            </a:pPr>
+            <a:r>
+              <a:rPr lang="en-US" sz="1400" b="1" dirty="0">
+                <a:solidFill>
+                  <a:srgbClr val="FFFFFF"/>
                 </a:solidFill>
                 <a:latin typeface="Arial" pitchFamily="34" charset="0"/>
                 <a:ea typeface="Arial" pitchFamily="34" charset="-122"/>
                 <a:cs typeface="Arial" pitchFamily="34" charset="-120"/>
               </a:rPr>
-              <a:t>Negotiation leverage</a:t>
-            </a:r>
-            <a:endParaRPr lang="en-US" sz="1450" dirty="0"/>
-          </a:p>
-        </p:txBody>
-      </p:sp>
-      <p:sp>
-        <p:nvSpPr>
-          <p:cNvPr id="22" name="Text 18"/>
-          <p:cNvSpPr/>
-          <p:nvPr/>
-        </p:nvSpPr>
-        <p:spPr>
-          <a:xfrm>
-            <a:off x="7178040" y="2048256"/>
-            <a:ext cx="4315968" cy="1143000"/>
-          </a:xfrm>
-          <a:prstGeom prst="rect">
-            <a:avLst/>
-          </a:prstGeom>
-          <a:noFill/>
-          <a:ln/>
-        </p:spPr>
-        <p:txBody>
-          <a:bodyPr wrap="square" lIns="0" tIns="0" rIns="0" bIns="0" rtlCol="0" anchor="ctr"/>
-          <a:lstStyle/>
-          <a:p>
-            <a:pPr indent="0" marL="0">
-              <a:buNone/>
-            </a:pPr>
-            <a:r>
-              <a:rPr lang="en-US" sz="1100" dirty="0">
+              <a:t>Deep research, cite-or-drop</a:t>
+            </a:r>
+            <a:endParaRPr lang="en-US" sz="1400" dirty="0"/>
+          </a:p>
+        </p:txBody>
+      </p:sp>
+      <p:sp>
+        <p:nvSpPr>
+          <p:cNvPr id="16" name="Text 12"/>
+          <p:cNvSpPr/>
+          <p:nvPr/>
+        </p:nvSpPr>
+        <p:spPr>
+          <a:xfrm>
+            <a:off x="6446520" y="2240280"/>
+            <a:ext cx="4983480" cy="1143000"/>
+          </a:xfrm>
+          <a:prstGeom prst="rect">
+            <a:avLst/>
+          </a:prstGeom>
+          <a:noFill/>
+          <a:ln/>
+        </p:spPr>
+        <p:txBody>
+          <a:bodyPr wrap="square" lIns="0" tIns="0" rIns="0" bIns="0" rtlCol="0" anchor="ctr"/>
+          <a:lstStyle/>
+          <a:p>
+            <a:pPr indent="0" marL="0">
+              <a:buNone/>
+            </a:pPr>
+            <a:r>
+              <a:rPr lang="en-US" sz="1050" dirty="0">
                 <a:solidFill>
                   <a:srgbClr val="5B6B7F"/>
                 </a:solidFill>
@@ -9543,26 +9266,26 @@
                 <a:ea typeface="Arial" pitchFamily="34" charset="-122"/>
                 <a:cs typeface="Arial" pitchFamily="34" charset="-120"/>
               </a:rPr>
-              <a:t>Wright’s-law trajectories say what a part SHOULD cost in 2029-31 — a defensible fact base for LTAs, productivity clauses and make-vs-buy.</a:t>
-            </a:r>
-            <a:endParaRPr lang="en-US" sz="1100" dirty="0"/>
-          </a:p>
-        </p:txBody>
-      </p:sp>
-      <p:sp>
-        <p:nvSpPr>
-          <p:cNvPr id="23" name="Shape 19"/>
-          <p:cNvSpPr/>
-          <p:nvPr/>
-        </p:nvSpPr>
-        <p:spPr>
-          <a:xfrm>
-            <a:off x="502920" y="3493008"/>
-            <a:ext cx="5440680" cy="1755648"/>
+              <a:t>Live web + patent retrieval, then AI synthesis where every finding must cite a retrieved source. Uncited claims are dropped in code — and it reports whether evidence supports or challenges the register.</a:t>
+            </a:r>
+            <a:endParaRPr lang="en-US" sz="1050" dirty="0"/>
+          </a:p>
+        </p:txBody>
+      </p:sp>
+      <p:sp>
+        <p:nvSpPr>
+          <p:cNvPr id="17" name="Shape 13"/>
+          <p:cNvSpPr/>
+          <p:nvPr/>
+        </p:nvSpPr>
+        <p:spPr>
+          <a:xfrm>
+            <a:off x="502920" y="3639312"/>
+            <a:ext cx="5440680" cy="1901952"/>
           </a:xfrm>
           <a:prstGeom prst="roundRect">
             <a:avLst>
-              <a:gd name="adj" fmla="val 3646"/>
+              <a:gd name="adj" fmla="val 3365"/>
             </a:avLst>
           </a:prstGeom>
           <a:solidFill>
@@ -9585,119 +9308,49 @@
       </p:sp>
       <p:sp>
         <p:nvSpPr>
-          <p:cNvPr id="24" name="Shape 20"/>
-          <p:cNvSpPr/>
-          <p:nvPr/>
-        </p:nvSpPr>
-        <p:spPr>
-          <a:xfrm>
-            <a:off x="566928" y="3557016"/>
-            <a:ext cx="137160" cy="0"/>
-          </a:xfrm>
-          <a:prstGeom prst="line">
-            <a:avLst/>
-          </a:prstGeom>
-          <a:noFill/>
-          <a:ln w="19050">
-            <a:solidFill>
-              <a:srgbClr val="F59E0B"/>
-            </a:solidFill>
-            <a:prstDash val="solid"/>
-          </a:ln>
-        </p:spPr>
-      </p:sp>
-      <p:sp>
-        <p:nvSpPr>
-          <p:cNvPr id="25" name="Shape 21"/>
-          <p:cNvSpPr/>
-          <p:nvPr/>
-        </p:nvSpPr>
-        <p:spPr>
-          <a:xfrm>
-            <a:off x="566928" y="3557016"/>
-            <a:ext cx="0" cy="137160"/>
-          </a:xfrm>
-          <a:prstGeom prst="line">
-            <a:avLst/>
-          </a:prstGeom>
-          <a:noFill/>
-          <a:ln w="19050">
-            <a:solidFill>
-              <a:srgbClr val="F59E0B"/>
-            </a:solidFill>
-            <a:prstDash val="solid"/>
-          </a:ln>
-        </p:spPr>
-      </p:sp>
-      <p:sp>
-        <p:nvSpPr>
-          <p:cNvPr id="26" name="Shape 22"/>
-          <p:cNvSpPr/>
-          <p:nvPr/>
-        </p:nvSpPr>
-        <p:spPr>
-          <a:xfrm>
-            <a:off x="5742432" y="5184648"/>
-            <a:ext cx="137160" cy="0"/>
-          </a:xfrm>
-          <a:prstGeom prst="line">
-            <a:avLst/>
-          </a:prstGeom>
-          <a:noFill/>
-          <a:ln w="19050">
-            <a:solidFill>
-              <a:srgbClr val="F59E0B"/>
-            </a:solidFill>
-            <a:prstDash val="solid"/>
-          </a:ln>
-        </p:spPr>
-      </p:sp>
-      <p:sp>
-        <p:nvSpPr>
-          <p:cNvPr id="27" name="Shape 23"/>
-          <p:cNvSpPr/>
-          <p:nvPr/>
-        </p:nvSpPr>
-        <p:spPr>
-          <a:xfrm>
-            <a:off x="5879592" y="5047488"/>
-            <a:ext cx="0" cy="137160"/>
-          </a:xfrm>
-          <a:prstGeom prst="line">
-            <a:avLst/>
-          </a:prstGeom>
-          <a:noFill/>
-          <a:ln w="19050">
-            <a:solidFill>
-              <a:srgbClr val="F59E0B"/>
-            </a:solidFill>
-            <a:prstDash val="solid"/>
-          </a:ln>
-        </p:spPr>
-      </p:sp>
-      <p:sp>
-        <p:nvSpPr>
-          <p:cNvPr id="28" name="Shape 24"/>
-          <p:cNvSpPr/>
-          <p:nvPr/>
-        </p:nvSpPr>
-        <p:spPr>
-          <a:xfrm>
-            <a:off x="722376" y="3712464"/>
-            <a:ext cx="566928" cy="566928"/>
+          <p:cNvPr id="18" name="Shape 14"/>
+          <p:cNvSpPr/>
+          <p:nvPr/>
+        </p:nvSpPr>
+        <p:spPr>
+          <a:xfrm>
+            <a:off x="502920" y="3639312"/>
+            <a:ext cx="5440680" cy="566928"/>
+          </a:xfrm>
+          <a:prstGeom prst="roundRect">
+            <a:avLst>
+              <a:gd name="adj" fmla="val 11290"/>
+            </a:avLst>
+          </a:prstGeom>
+          <a:solidFill>
+            <a:srgbClr val="6D28D9"/>
+          </a:solidFill>
+          <a:ln/>
+        </p:spPr>
+      </p:sp>
+      <p:sp>
+        <p:nvSpPr>
+          <p:cNvPr id="19" name="Shape 15"/>
+          <p:cNvSpPr/>
+          <p:nvPr/>
+        </p:nvSpPr>
+        <p:spPr>
+          <a:xfrm>
+            <a:off x="630936" y="3712464"/>
+            <a:ext cx="420624" cy="420624"/>
           </a:xfrm>
           <a:prstGeom prst="ellipse">
             <a:avLst/>
           </a:prstGeom>
           <a:solidFill>
-            <a:srgbClr val="0D9488"/>
+            <a:srgbClr val="6D28D9"/>
           </a:solidFill>
           <a:ln/>
         </p:spPr>
       </p:sp>
       <p:pic>
         <p:nvPicPr>
-          <p:cNvPr id="29" name="Image 2" descr="preencoded.png">    </p:cNvPr>
+          <p:cNvPr id="20" name="Image 2" descr="preencoded.png">    </p:cNvPr>
           <p:cNvPicPr>
             <a:picLocks noChangeAspect="1"/>
           </p:cNvPicPr>
@@ -9711,8 +9364,8 @@
         </p:blipFill>
         <p:spPr>
           <a:xfrm>
-            <a:off x="852769" y="3842857"/>
-            <a:ext cx="306141" cy="306141"/>
+            <a:off x="715061" y="3796589"/>
+            <a:ext cx="252374" cy="252374"/>
           </a:xfrm>
           <a:prstGeom prst="rect">
             <a:avLst/>
@@ -9721,69 +9374,69 @@
       </p:pic>
       <p:sp>
         <p:nvSpPr>
-          <p:cNvPr id="30" name="Text 25"/>
-          <p:cNvSpPr/>
-          <p:nvPr/>
-        </p:nvSpPr>
-        <p:spPr>
-          <a:xfrm>
-            <a:off x="1463040" y="3675888"/>
-            <a:ext cx="4315968" cy="292608"/>
-          </a:xfrm>
-          <a:prstGeom prst="rect">
-            <a:avLst/>
-          </a:prstGeom>
-          <a:noFill/>
-          <a:ln/>
-        </p:spPr>
-        <p:txBody>
-          <a:bodyPr wrap="square" lIns="0" tIns="0" rIns="0" bIns="0" rtlCol="0" anchor="ctr"/>
-          <a:lstStyle/>
-          <a:p>
-            <a:pPr indent="0" marL="0">
-              <a:buNone/>
-            </a:pPr>
-            <a:r>
-              <a:rPr lang="en-US" sz="1450" b="1" dirty="0">
-                <a:solidFill>
-                  <a:srgbClr val="0D1F33"/>
+          <p:cNvPr id="21" name="Text 16"/>
+          <p:cNvSpPr/>
+          <p:nvPr/>
+        </p:nvSpPr>
+        <p:spPr>
+          <a:xfrm>
+            <a:off x="1188720" y="3639312"/>
+            <a:ext cx="4572000" cy="566928"/>
+          </a:xfrm>
+          <a:prstGeom prst="rect">
+            <a:avLst/>
+          </a:prstGeom>
+          <a:noFill/>
+          <a:ln/>
+        </p:spPr>
+        <p:txBody>
+          <a:bodyPr wrap="square" lIns="0" tIns="0" rIns="0" bIns="0" rtlCol="0" anchor="ctr"/>
+          <a:lstStyle/>
+          <a:p>
+            <a:pPr indent="0" marL="0">
+              <a:buNone/>
+            </a:pPr>
+            <a:r>
+              <a:rPr lang="en-US" sz="1400" b="1" dirty="0">
+                <a:solidFill>
+                  <a:srgbClr val="FFFFFF"/>
                 </a:solidFill>
                 <a:latin typeface="Arial" pitchFamily="34" charset="0"/>
                 <a:ea typeface="Arial" pitchFamily="34" charset="-122"/>
                 <a:cs typeface="Arial" pitchFamily="34" charset="-120"/>
               </a:rPr>
-              <a:t>Regulatory de-risking</a:t>
-            </a:r>
-            <a:endParaRPr lang="en-US" sz="1450" dirty="0"/>
-          </a:p>
-        </p:txBody>
-      </p:sp>
-      <p:sp>
-        <p:nvSpPr>
-          <p:cNvPr id="31" name="Text 26"/>
-          <p:cNvSpPr/>
-          <p:nvPr/>
-        </p:nvSpPr>
-        <p:spPr>
-          <a:xfrm>
-            <a:off x="1463040" y="3986784"/>
-            <a:ext cx="4315968" cy="1143000"/>
-          </a:xfrm>
-          <a:prstGeom prst="rect">
-            <a:avLst/>
-          </a:prstGeom>
-          <a:noFill/>
-          <a:ln/>
-        </p:spPr>
-        <p:txBody>
-          <a:bodyPr wrap="square" lIns="0" tIns="0" rIns="0" bIns="0" rtlCol="0" anchor="ctr"/>
-          <a:lstStyle/>
-          <a:p>
-            <a:pPr indent="0" marL="0">
-              <a:buNone/>
-            </a:pPr>
-            <a:r>
-              <a:rPr lang="en-US" sz="1100" dirty="0">
+              <a:t>Expert panel critique</a:t>
+            </a:r>
+            <a:endParaRPr lang="en-US" sz="1400" dirty="0"/>
+          </a:p>
+        </p:txBody>
+      </p:sp>
+      <p:sp>
+        <p:nvSpPr>
+          <p:cNvPr id="22" name="Text 17"/>
+          <p:cNvSpPr/>
+          <p:nvPr/>
+        </p:nvSpPr>
+        <p:spPr>
+          <a:xfrm>
+            <a:off x="731520" y="4325112"/>
+            <a:ext cx="4983480" cy="1143000"/>
+          </a:xfrm>
+          <a:prstGeom prst="rect">
+            <a:avLst/>
+          </a:prstGeom>
+          <a:noFill/>
+          <a:ln/>
+        </p:spPr>
+        <p:txBody>
+          <a:bodyPr wrap="square" lIns="0" tIns="0" rIns="0" bIns="0" rtlCol="0" anchor="ctr"/>
+          <a:lstStyle/>
+          <a:p>
+            <a:pPr indent="0" marL="0">
+              <a:buNone/>
+            </a:pPr>
+            <a:r>
+              <a:rPr lang="en-US" sz="1050" dirty="0">
                 <a:solidFill>
                   <a:srgbClr val="5B6B7F"/>
                 </a:solidFill>
@@ -9791,26 +9444,26 @@
                 <a:ea typeface="Arial" pitchFamily="34" charset="-122"/>
                 <a:cs typeface="Arial" pitchFamily="34" charset="-120"/>
               </a:rPr>
-              <a:t>Euro 7, ELV recast, GB 38031 — dated, legally statused, mapped to the exact components they force. Proposals can never masquerade as law.</a:t>
-            </a:r>
-            <a:endParaRPr lang="en-US" sz="1100" dirty="0"/>
-          </a:p>
-        </p:txBody>
-      </p:sp>
-      <p:sp>
-        <p:nvSpPr>
-          <p:cNvPr id="32" name="Shape 27"/>
-          <p:cNvSpPr/>
-          <p:nvPr/>
-        </p:nvSpPr>
-        <p:spPr>
-          <a:xfrm>
-            <a:off x="6217920" y="3493008"/>
-            <a:ext cx="5440680" cy="1755648"/>
+              <a:t>Three AI sceptics — over-hype historian, supply-chain realist, regulatory analyst — stamp agree / caution / challenge on each card. They critique timing; they cannot change a number.</a:t>
+            </a:r>
+            <a:endParaRPr lang="en-US" sz="1050" dirty="0"/>
+          </a:p>
+        </p:txBody>
+      </p:sp>
+      <p:sp>
+        <p:nvSpPr>
+          <p:cNvPr id="23" name="Shape 18"/>
+          <p:cNvSpPr/>
+          <p:nvPr/>
+        </p:nvSpPr>
+        <p:spPr>
+          <a:xfrm>
+            <a:off x="6217920" y="3639312"/>
+            <a:ext cx="5440680" cy="1901952"/>
           </a:xfrm>
           <a:prstGeom prst="roundRect">
             <a:avLst>
-              <a:gd name="adj" fmla="val 3646"/>
+              <a:gd name="adj" fmla="val 3365"/>
             </a:avLst>
           </a:prstGeom>
           <a:solidFill>
@@ -9833,119 +9486,49 @@
       </p:sp>
       <p:sp>
         <p:nvSpPr>
-          <p:cNvPr id="33" name="Shape 28"/>
-          <p:cNvSpPr/>
-          <p:nvPr/>
-        </p:nvSpPr>
-        <p:spPr>
-          <a:xfrm>
-            <a:off x="6281928" y="3557016"/>
-            <a:ext cx="137160" cy="0"/>
-          </a:xfrm>
-          <a:prstGeom prst="line">
-            <a:avLst/>
-          </a:prstGeom>
-          <a:noFill/>
-          <a:ln w="19050">
-            <a:solidFill>
-              <a:srgbClr val="F59E0B"/>
-            </a:solidFill>
-            <a:prstDash val="solid"/>
-          </a:ln>
-        </p:spPr>
-      </p:sp>
-      <p:sp>
-        <p:nvSpPr>
-          <p:cNvPr id="34" name="Shape 29"/>
-          <p:cNvSpPr/>
-          <p:nvPr/>
-        </p:nvSpPr>
-        <p:spPr>
-          <a:xfrm>
-            <a:off x="6281928" y="3557016"/>
-            <a:ext cx="0" cy="137160"/>
-          </a:xfrm>
-          <a:prstGeom prst="line">
-            <a:avLst/>
-          </a:prstGeom>
-          <a:noFill/>
-          <a:ln w="19050">
-            <a:solidFill>
-              <a:srgbClr val="F59E0B"/>
-            </a:solidFill>
-            <a:prstDash val="solid"/>
-          </a:ln>
-        </p:spPr>
-      </p:sp>
-      <p:sp>
-        <p:nvSpPr>
-          <p:cNvPr id="35" name="Shape 30"/>
-          <p:cNvSpPr/>
-          <p:nvPr/>
-        </p:nvSpPr>
-        <p:spPr>
-          <a:xfrm>
-            <a:off x="11457432" y="5184648"/>
-            <a:ext cx="137160" cy="0"/>
-          </a:xfrm>
-          <a:prstGeom prst="line">
-            <a:avLst/>
-          </a:prstGeom>
-          <a:noFill/>
-          <a:ln w="19050">
-            <a:solidFill>
-              <a:srgbClr val="F59E0B"/>
-            </a:solidFill>
-            <a:prstDash val="solid"/>
-          </a:ln>
-        </p:spPr>
-      </p:sp>
-      <p:sp>
-        <p:nvSpPr>
-          <p:cNvPr id="36" name="Shape 31"/>
-          <p:cNvSpPr/>
-          <p:nvPr/>
-        </p:nvSpPr>
-        <p:spPr>
-          <a:xfrm>
-            <a:off x="11594592" y="5047488"/>
-            <a:ext cx="0" cy="137160"/>
-          </a:xfrm>
-          <a:prstGeom prst="line">
-            <a:avLst/>
-          </a:prstGeom>
-          <a:noFill/>
-          <a:ln w="19050">
-            <a:solidFill>
-              <a:srgbClr val="F59E0B"/>
-            </a:solidFill>
-            <a:prstDash val="solid"/>
-          </a:ln>
-        </p:spPr>
-      </p:sp>
-      <p:sp>
-        <p:nvSpPr>
-          <p:cNvPr id="37" name="Shape 32"/>
-          <p:cNvSpPr/>
-          <p:nvPr/>
-        </p:nvSpPr>
-        <p:spPr>
-          <a:xfrm>
-            <a:off x="6437376" y="3712464"/>
-            <a:ext cx="566928" cy="566928"/>
+          <p:cNvPr id="24" name="Shape 19"/>
+          <p:cNvSpPr/>
+          <p:nvPr/>
+        </p:nvSpPr>
+        <p:spPr>
+          <a:xfrm>
+            <a:off x="6217920" y="3639312"/>
+            <a:ext cx="5440680" cy="566928"/>
+          </a:xfrm>
+          <a:prstGeom prst="roundRect">
+            <a:avLst>
+              <a:gd name="adj" fmla="val 11290"/>
+            </a:avLst>
+          </a:prstGeom>
+          <a:solidFill>
+            <a:srgbClr val="0D1F33"/>
+          </a:solidFill>
+          <a:ln/>
+        </p:spPr>
+      </p:sp>
+      <p:sp>
+        <p:nvSpPr>
+          <p:cNvPr id="25" name="Shape 20"/>
+          <p:cNvSpPr/>
+          <p:nvPr/>
+        </p:nvSpPr>
+        <p:spPr>
+          <a:xfrm>
+            <a:off x="6345936" y="3712464"/>
+            <a:ext cx="420624" cy="420624"/>
           </a:xfrm>
           <a:prstGeom prst="ellipse">
             <a:avLst/>
           </a:prstGeom>
           <a:solidFill>
-            <a:srgbClr val="6D28D9"/>
+            <a:srgbClr val="0D1F33"/>
           </a:solidFill>
           <a:ln/>
         </p:spPr>
       </p:sp>
       <p:pic>
         <p:nvPicPr>
-          <p:cNvPr id="38" name="Image 3" descr="preencoded.png">    </p:cNvPr>
+          <p:cNvPr id="26" name="Image 3" descr="preencoded.png">    </p:cNvPr>
           <p:cNvPicPr>
             <a:picLocks noChangeAspect="1"/>
           </p:cNvPicPr>
@@ -9959,8 +9542,8 @@
         </p:blipFill>
         <p:spPr>
           <a:xfrm>
-            <a:off x="6567769" y="3842857"/>
-            <a:ext cx="306141" cy="306141"/>
+            <a:off x="6430061" y="3796589"/>
+            <a:ext cx="252374" cy="252374"/>
           </a:xfrm>
           <a:prstGeom prst="rect">
             <a:avLst/>
@@ -9969,69 +9552,69 @@
       </p:pic>
       <p:sp>
         <p:nvSpPr>
-          <p:cNvPr id="39" name="Text 33"/>
-          <p:cNvSpPr/>
-          <p:nvPr/>
-        </p:nvSpPr>
-        <p:spPr>
-          <a:xfrm>
-            <a:off x="7178040" y="3675888"/>
-            <a:ext cx="4315968" cy="292608"/>
-          </a:xfrm>
-          <a:prstGeom prst="rect">
-            <a:avLst/>
-          </a:prstGeom>
-          <a:noFill/>
-          <a:ln/>
-        </p:spPr>
-        <p:txBody>
-          <a:bodyPr wrap="square" lIns="0" tIns="0" rIns="0" bIns="0" rtlCol="0" anchor="ctr"/>
-          <a:lstStyle/>
-          <a:p>
-            <a:pPr indent="0" marL="0">
-              <a:buNone/>
-            </a:pPr>
-            <a:r>
-              <a:rPr lang="en-US" sz="1450" b="1" dirty="0">
-                <a:solidFill>
-                  <a:srgbClr val="0D1F33"/>
+          <p:cNvPr id="27" name="Text 21"/>
+          <p:cNvSpPr/>
+          <p:nvPr/>
+        </p:nvSpPr>
+        <p:spPr>
+          <a:xfrm>
+            <a:off x="6903720" y="3639312"/>
+            <a:ext cx="4572000" cy="566928"/>
+          </a:xfrm>
+          <a:prstGeom prst="rect">
+            <a:avLst/>
+          </a:prstGeom>
+          <a:noFill/>
+          <a:ln/>
+        </p:spPr>
+        <p:txBody>
+          <a:bodyPr wrap="square" lIns="0" tIns="0" rIns="0" bIns="0" rtlCol="0" anchor="ctr"/>
+          <a:lstStyle/>
+          <a:p>
+            <a:pPr indent="0" marL="0">
+              <a:buNone/>
+            </a:pPr>
+            <a:r>
+              <a:rPr lang="en-US" sz="1400" b="1" dirty="0">
+                <a:solidFill>
+                  <a:srgbClr val="FFFFFF"/>
                 </a:solidFill>
                 <a:latin typeface="Arial" pitchFamily="34" charset="0"/>
                 <a:ea typeface="Arial" pitchFamily="34" charset="-122"/>
                 <a:cs typeface="Arial" pitchFamily="34" charset="-120"/>
               </a:rPr>
-              <a:t>Segment &amp; competitor radar</a:t>
-            </a:r>
-            <a:endParaRPr lang="en-US" sz="1450" dirty="0"/>
-          </a:p>
-        </p:txBody>
-      </p:sp>
-      <p:sp>
-        <p:nvSpPr>
-          <p:cNvPr id="40" name="Text 34"/>
-          <p:cNvSpPr/>
-          <p:nvPr/>
-        </p:nvSpPr>
-        <p:spPr>
-          <a:xfrm>
-            <a:off x="7178040" y="3986784"/>
-            <a:ext cx="4315968" cy="1143000"/>
-          </a:xfrm>
-          <a:prstGeom prst="rect">
-            <a:avLst/>
-          </a:prstGeom>
-          <a:noFill/>
-          <a:ln/>
-        </p:spPr>
-        <p:txBody>
-          <a:bodyPr wrap="square" lIns="0" tIns="0" rIns="0" bIns="0" rtlCol="0" anchor="ctr"/>
-          <a:lstStyle/>
-          <a:p>
-            <a:pPr indent="0" marL="0">
-              <a:buNone/>
-            </a:pPr>
-            <a:r>
-              <a:rPr lang="en-US" sz="1100" dirty="0">
+              <a:t>Prediction Ledger</a:t>
+            </a:r>
+            <a:endParaRPr lang="en-US" sz="1400" dirty="0"/>
+          </a:p>
+        </p:txBody>
+      </p:sp>
+      <p:sp>
+        <p:nvSpPr>
+          <p:cNvPr id="28" name="Text 22"/>
+          <p:cNvSpPr/>
+          <p:nvPr/>
+        </p:nvSpPr>
+        <p:spPr>
+          <a:xfrm>
+            <a:off x="6446520" y="4325112"/>
+            <a:ext cx="4983480" cy="1143000"/>
+          </a:xfrm>
+          <a:prstGeom prst="rect">
+            <a:avLst/>
+          </a:prstGeom>
+          <a:noFill/>
+          <a:ln/>
+        </p:spPr>
+        <p:txBody>
+          <a:bodyPr wrap="square" lIns="0" tIns="0" rIns="0" bIns="0" rtlCol="0" anchor="ctr"/>
+          <a:lstStyle/>
+          <a:p>
+            <a:pPr indent="0" marL="0">
+              <a:buNone/>
+            </a:pPr>
+            <a:r>
+              <a:rPr lang="en-US" sz="1050" dirty="0">
                 <a:solidFill>
                   <a:srgbClr val="5B6B7F"/>
                 </a:solidFill>
@@ -10039,90 +9622,15 @@
                 <a:ea typeface="Arial" pitchFamily="34" charset="-122"/>
                 <a:cs typeface="Arial" pitchFamily="34" charset="-120"/>
               </a:rPr>
-              <a:t>Our off-road/luxury battleground benchmarked continuously — Defender OCTA to Yangwang U8 — each with the announced next move to watch.</a:t>
-            </a:r>
-            <a:endParaRPr lang="en-US" sz="1100" dirty="0"/>
-          </a:p>
-        </p:txBody>
-      </p:sp>
-      <p:sp>
-        <p:nvSpPr>
-          <p:cNvPr id="41" name="Shape 35"/>
-          <p:cNvSpPr/>
-          <p:nvPr/>
-        </p:nvSpPr>
-        <p:spPr>
-          <a:xfrm>
-            <a:off x="2103120" y="5650992"/>
-            <a:ext cx="7982712" cy="566928"/>
-          </a:xfrm>
-          <a:prstGeom prst="roundRect">
-            <a:avLst>
-              <a:gd name="adj" fmla="val 50000"/>
-            </a:avLst>
-          </a:prstGeom>
-          <a:solidFill>
-            <a:srgbClr val="0D1F33"/>
-          </a:solidFill>
-          <a:ln/>
-        </p:spPr>
-      </p:sp>
-      <p:sp>
-        <p:nvSpPr>
-          <p:cNvPr id="42" name="Text 36"/>
-          <p:cNvSpPr/>
-          <p:nvPr/>
-        </p:nvSpPr>
-        <p:spPr>
-          <a:xfrm>
-            <a:off x="2103120" y="5650992"/>
-            <a:ext cx="7982712" cy="566928"/>
-          </a:xfrm>
-          <a:prstGeom prst="rect">
-            <a:avLst/>
-          </a:prstGeom>
-          <a:noFill/>
-          <a:ln/>
-        </p:spPr>
-        <p:txBody>
-          <a:bodyPr wrap="square" lIns="0" tIns="0" rIns="0" bIns="0" rtlCol="0" anchor="ctr"/>
-          <a:lstStyle/>
-          <a:p>
-            <a:pPr algn="ctr" indent="0" marL="0">
-              <a:buNone/>
-            </a:pPr>
-            <a:r>
-              <a:rPr lang="en-US" sz="1300" b="1" dirty="0">
-                <a:solidFill>
-                  <a:srgbClr val="F59E0B"/>
-                </a:solidFill>
-                <a:latin typeface="Arial" pitchFamily="34" charset="0"/>
-                <a:ea typeface="Arial" pitchFamily="34" charset="-122"/>
-                <a:cs typeface="Arial" pitchFamily="34" charset="-120"/>
-              </a:rPr>
-              <a:t>Minutes, not weeks </a:t>
-            </a:r>
-            <a:pPr algn="ctr" indent="0" marL="0">
-              <a:buNone/>
-            </a:pPr>
-            <a:r>
-              <a:rPr lang="en-US" sz="1300" dirty="0">
-                <a:solidFill>
-                  <a:srgbClr val="D5DEE9"/>
-                </a:solidFill>
-                <a:latin typeface="Arial" pitchFamily="34" charset="0"/>
-                <a:ea typeface="Arial" pitchFamily="34" charset="-122"/>
-                <a:cs typeface="Arial" pitchFamily="34" charset="-120"/>
-              </a:rPr>
-              <a:t> ·  self-serve, part-level, in our commodity language — for every engineer</a:t>
-            </a:r>
-            <a:endParaRPr lang="en-US" sz="1300" dirty="0"/>
-          </a:p>
-        </p:txBody>
-      </p:sp>
-      <p:sp>
-        <p:nvSpPr>
-          <p:cNvPr id="43" name="Text 37"/>
+              <a:t>Every forecast can be snapshotted. On re-curation the tool scores its own past projections — mean error, shown to us. "A foresight tool that never checks its past predictions is astrology."</a:t>
+            </a:r>
+            <a:endParaRPr lang="en-US" sz="1050" dirty="0"/>
+          </a:p>
+        </p:txBody>
+      </p:sp>
+      <p:sp>
+        <p:nvSpPr>
+          <p:cNvPr id="29" name="Text 23"/>
           <p:cNvSpPr/>
           <p:nvPr/>
         </p:nvSpPr>
@@ -10181,7 +9689,7 @@
                 <a:ea typeface="Courier New" pitchFamily="34" charset="-122"/>
                 <a:cs typeface="Courier New" pitchFamily="34" charset="-120"/>
               </a:rPr>
-              <a:t>  ·  Technology Foresight Engine  ·  14/16</a:t>
+              <a:t>  ·  Technology Foresight Engine  ·  13/17</a:t>
             </a:r>
             <a:endParaRPr lang="en-US" sz="900" dirty="0"/>
           </a:p>
@@ -10228,7 +9736,7 @@
         <p:spPr>
           <a:xfrm>
             <a:off x="502920" y="347472"/>
-            <a:ext cx="905256" cy="329184"/>
+            <a:ext cx="1711757" cy="329184"/>
           </a:xfrm>
           <a:prstGeom prst="roundRect">
             <a:avLst>
@@ -10250,7 +9758,7 @@
         <p:spPr>
           <a:xfrm>
             <a:off x="502920" y="347472"/>
-            <a:ext cx="905256" cy="329184"/>
+            <a:ext cx="1711757" cy="329184"/>
           </a:xfrm>
           <a:prstGeom prst="rect">
             <a:avLst/>
@@ -10274,7 +9782,7 @@
                 <a:ea typeface="Courier New" pitchFamily="34" charset="-122"/>
                 <a:cs typeface="Courier New" pitchFamily="34" charset="-120"/>
               </a:rPr>
-              <a:t>TRUST</a:t>
+              <a:t>BUSINESS VALUE</a:t>
             </a:r>
             <a:endParaRPr lang="en-US" sz="1100" dirty="0"/>
           </a:p>
@@ -10313,15 +9821,161 @@
                 <a:ea typeface="Arial" pitchFamily="34" charset="-122"/>
                 <a:cs typeface="Arial" pitchFamily="34" charset="-120"/>
               </a:rPr>
-              <a:t>Engineered and audited like a product, not a demo</a:t>
+              <a:t>What this changes for us</a:t>
             </a:r>
             <a:endParaRPr lang="en-US" sz="2800" dirty="0"/>
           </a:p>
         </p:txBody>
+      </p:sp>
+      <p:sp>
+        <p:nvSpPr>
+          <p:cNvPr id="5" name="Shape 3"/>
+          <p:cNvSpPr/>
+          <p:nvPr/>
+        </p:nvSpPr>
+        <p:spPr>
+          <a:xfrm>
+            <a:off x="502920" y="1554480"/>
+            <a:ext cx="5440680" cy="1755648"/>
+          </a:xfrm>
+          <a:prstGeom prst="roundRect">
+            <a:avLst>
+              <a:gd name="adj" fmla="val 3646"/>
+            </a:avLst>
+          </a:prstGeom>
+          <a:solidFill>
+            <a:srgbClr val="FFFFFF"/>
+          </a:solidFill>
+          <a:ln w="9525">
+            <a:solidFill>
+              <a:srgbClr val="D7E0EA"/>
+            </a:solidFill>
+            <a:prstDash val="solid"/>
+          </a:ln>
+          <a:effectLst>
+            <a:outerShdw sx="100000" sy="100000" kx="0" ky="0" algn="bl" rotWithShape="0" blurRad="88900" dist="25400" dir="5400000">
+              <a:srgbClr val="9FB0C2">
+                <a:alpha val="30000"/>
+              </a:srgbClr>
+            </a:outerShdw>
+          </a:effectLst>
+        </p:spPr>
+      </p:sp>
+      <p:sp>
+        <p:nvSpPr>
+          <p:cNvPr id="6" name="Shape 4"/>
+          <p:cNvSpPr/>
+          <p:nvPr/>
+        </p:nvSpPr>
+        <p:spPr>
+          <a:xfrm>
+            <a:off x="566928" y="1618488"/>
+            <a:ext cx="137160" cy="0"/>
+          </a:xfrm>
+          <a:prstGeom prst="line">
+            <a:avLst/>
+          </a:prstGeom>
+          <a:noFill/>
+          <a:ln w="19050">
+            <a:solidFill>
+              <a:srgbClr val="F59E0B"/>
+            </a:solidFill>
+            <a:prstDash val="solid"/>
+          </a:ln>
+        </p:spPr>
+      </p:sp>
+      <p:sp>
+        <p:nvSpPr>
+          <p:cNvPr id="7" name="Shape 5"/>
+          <p:cNvSpPr/>
+          <p:nvPr/>
+        </p:nvSpPr>
+        <p:spPr>
+          <a:xfrm>
+            <a:off x="566928" y="1618488"/>
+            <a:ext cx="0" cy="137160"/>
+          </a:xfrm>
+          <a:prstGeom prst="line">
+            <a:avLst/>
+          </a:prstGeom>
+          <a:noFill/>
+          <a:ln w="19050">
+            <a:solidFill>
+              <a:srgbClr val="F59E0B"/>
+            </a:solidFill>
+            <a:prstDash val="solid"/>
+          </a:ln>
+        </p:spPr>
+      </p:sp>
+      <p:sp>
+        <p:nvSpPr>
+          <p:cNvPr id="8" name="Shape 6"/>
+          <p:cNvSpPr/>
+          <p:nvPr/>
+        </p:nvSpPr>
+        <p:spPr>
+          <a:xfrm>
+            <a:off x="5742432" y="3246120"/>
+            <a:ext cx="137160" cy="0"/>
+          </a:xfrm>
+          <a:prstGeom prst="line">
+            <a:avLst/>
+          </a:prstGeom>
+          <a:noFill/>
+          <a:ln w="19050">
+            <a:solidFill>
+              <a:srgbClr val="F59E0B"/>
+            </a:solidFill>
+            <a:prstDash val="solid"/>
+          </a:ln>
+        </p:spPr>
+      </p:sp>
+      <p:sp>
+        <p:nvSpPr>
+          <p:cNvPr id="9" name="Shape 7"/>
+          <p:cNvSpPr/>
+          <p:nvPr/>
+        </p:nvSpPr>
+        <p:spPr>
+          <a:xfrm>
+            <a:off x="5879592" y="3108960"/>
+            <a:ext cx="0" cy="137160"/>
+          </a:xfrm>
+          <a:prstGeom prst="line">
+            <a:avLst/>
+          </a:prstGeom>
+          <a:noFill/>
+          <a:ln w="19050">
+            <a:solidFill>
+              <a:srgbClr val="F59E0B"/>
+            </a:solidFill>
+            <a:prstDash val="solid"/>
+          </a:ln>
+        </p:spPr>
+      </p:sp>
+      <p:sp>
+        <p:nvSpPr>
+          <p:cNvPr id="10" name="Shape 8"/>
+          <p:cNvSpPr/>
+          <p:nvPr/>
+        </p:nvSpPr>
+        <p:spPr>
+          <a:xfrm>
+            <a:off x="722376" y="1773936"/>
+            <a:ext cx="566928" cy="566928"/>
+          </a:xfrm>
+          <a:prstGeom prst="ellipse">
+            <a:avLst/>
+          </a:prstGeom>
+          <a:solidFill>
+            <a:srgbClr val="0D1F33"/>
+          </a:solidFill>
+          <a:ln/>
+        </p:spPr>
       </p:sp>
       <p:pic>
         <p:nvPicPr>
-          <p:cNvPr id="5" name="Image 0" descr="preencoded.png">    </p:cNvPr>
+          <p:cNvPr id="11" name="Image 0" descr="preencoded.png">    </p:cNvPr>
           <p:cNvPicPr>
             <a:picLocks noChangeAspect="1"/>
           </p:cNvPicPr>
@@ -10335,8 +9989,8 @@
         </p:blipFill>
         <p:spPr>
           <a:xfrm>
-            <a:off x="548640" y="1572768"/>
-            <a:ext cx="329184" cy="329184"/>
+            <a:off x="852769" y="1904329"/>
+            <a:ext cx="306141" cy="306141"/>
           </a:xfrm>
           <a:prstGeom prst="rect">
             <a:avLst/>
@@ -10345,14 +9999,14 @@
       </p:pic>
       <p:sp>
         <p:nvSpPr>
-          <p:cNvPr id="6" name="Text 3"/>
-          <p:cNvSpPr/>
-          <p:nvPr/>
-        </p:nvSpPr>
-        <p:spPr>
-          <a:xfrm>
-            <a:off x="1024128" y="1517904"/>
-            <a:ext cx="5120640" cy="292608"/>
+          <p:cNvPr id="12" name="Text 9"/>
+          <p:cNvSpPr/>
+          <p:nvPr/>
+        </p:nvSpPr>
+        <p:spPr>
+          <a:xfrm>
+            <a:off x="1463040" y="1737360"/>
+            <a:ext cx="4315968" cy="292608"/>
           </a:xfrm>
           <a:prstGeom prst="rect">
             <a:avLst/>
@@ -10376,7 +10030,7 @@
                 <a:ea typeface="Arial" pitchFamily="34" charset="-122"/>
                 <a:cs typeface="Arial" pitchFamily="34" charset="-120"/>
               </a:rPr>
-              <a:t>326 automated tests</a:t>
+              <a:t>Sharper sourcing decisions</a:t>
             </a:r>
             <a:endParaRPr lang="en-US" sz="1450" dirty="0"/>
           </a:p>
@@ -10384,30 +10038,30 @@
       </p:sp>
       <p:sp>
         <p:nvSpPr>
-          <p:cNvPr id="7" name="Text 4"/>
-          <p:cNvSpPr/>
-          <p:nvPr/>
-        </p:nvSpPr>
-        <p:spPr>
-          <a:xfrm>
-            <a:off x="1024128" y="1801368"/>
-            <a:ext cx="5669280" cy="548640"/>
-          </a:xfrm>
-          <a:prstGeom prst="rect">
-            <a:avLst/>
-          </a:prstGeom>
-          <a:noFill/>
-          <a:ln/>
-        </p:spPr>
-        <p:txBody>
-          <a:bodyPr wrap="square" lIns="0" tIns="0" rIns="0" bIns="0" rtlCol="0" anchor="ctr"/>
-          <a:lstStyle/>
-          <a:p>
-            <a:pPr indent="0" marL="0">
-              <a:buNone/>
-            </a:pPr>
-            <a:r>
-              <a:rPr lang="en-US" sz="1050" dirty="0">
+          <p:cNvPr id="13" name="Text 10"/>
+          <p:cNvSpPr/>
+          <p:nvPr/>
+        </p:nvSpPr>
+        <p:spPr>
+          <a:xfrm>
+            <a:off x="1463040" y="2048256"/>
+            <a:ext cx="4315968" cy="1143000"/>
+          </a:xfrm>
+          <a:prstGeom prst="rect">
+            <a:avLst/>
+          </a:prstGeom>
+          <a:noFill/>
+          <a:ln/>
+        </p:spPr>
+        <p:txBody>
+          <a:bodyPr wrap="square" lIns="0" tIns="0" rIns="0" bIns="0" rtlCol="0" anchor="ctr"/>
+          <a:lstStyle/>
+          <a:p>
+            <a:pPr indent="0" marL="0">
+              <a:buNone/>
+            </a:pPr>
+            <a:r>
+              <a:rPr lang="en-US" sz="1100" dirty="0">
                 <a:solidFill>
                   <a:srgbClr val="5B6B7F"/>
                 </a:solidFill>
@@ -10415,15 +10069,161 @@
                 <a:ea typeface="Arial" pitchFamily="34" charset="-122"/>
                 <a:cs typeface="Arial" pitchFamily="34" charset="-120"/>
               </a:rPr>
-              <a:t>Register integrity, model rules and coverage are CI-enforced — an adoption claim without evidence fails the build.</a:t>
-            </a:r>
-            <a:endParaRPr lang="en-US" sz="1050" dirty="0"/>
-          </a:p>
-        </p:txBody>
+              <a:t>Check the technology future of a part before the 7-year contract: what replaces it, when, at what cost trajectory — with confidence tiers on every call.</a:t>
+            </a:r>
+            <a:endParaRPr lang="en-US" sz="1100" dirty="0"/>
+          </a:p>
+        </p:txBody>
+      </p:sp>
+      <p:sp>
+        <p:nvSpPr>
+          <p:cNvPr id="14" name="Shape 11"/>
+          <p:cNvSpPr/>
+          <p:nvPr/>
+        </p:nvSpPr>
+        <p:spPr>
+          <a:xfrm>
+            <a:off x="6217920" y="1554480"/>
+            <a:ext cx="5440680" cy="1755648"/>
+          </a:xfrm>
+          <a:prstGeom prst="roundRect">
+            <a:avLst>
+              <a:gd name="adj" fmla="val 3646"/>
+            </a:avLst>
+          </a:prstGeom>
+          <a:solidFill>
+            <a:srgbClr val="FFFFFF"/>
+          </a:solidFill>
+          <a:ln w="9525">
+            <a:solidFill>
+              <a:srgbClr val="D7E0EA"/>
+            </a:solidFill>
+            <a:prstDash val="solid"/>
+          </a:ln>
+          <a:effectLst>
+            <a:outerShdw sx="100000" sy="100000" kx="0" ky="0" algn="bl" rotWithShape="0" blurRad="88900" dist="25400" dir="5400000">
+              <a:srgbClr val="9FB0C2">
+                <a:alpha val="30000"/>
+              </a:srgbClr>
+            </a:outerShdw>
+          </a:effectLst>
+        </p:spPr>
+      </p:sp>
+      <p:sp>
+        <p:nvSpPr>
+          <p:cNvPr id="15" name="Shape 12"/>
+          <p:cNvSpPr/>
+          <p:nvPr/>
+        </p:nvSpPr>
+        <p:spPr>
+          <a:xfrm>
+            <a:off x="6281928" y="1618488"/>
+            <a:ext cx="137160" cy="0"/>
+          </a:xfrm>
+          <a:prstGeom prst="line">
+            <a:avLst/>
+          </a:prstGeom>
+          <a:noFill/>
+          <a:ln w="19050">
+            <a:solidFill>
+              <a:srgbClr val="F59E0B"/>
+            </a:solidFill>
+            <a:prstDash val="solid"/>
+          </a:ln>
+        </p:spPr>
+      </p:sp>
+      <p:sp>
+        <p:nvSpPr>
+          <p:cNvPr id="16" name="Shape 13"/>
+          <p:cNvSpPr/>
+          <p:nvPr/>
+        </p:nvSpPr>
+        <p:spPr>
+          <a:xfrm>
+            <a:off x="6281928" y="1618488"/>
+            <a:ext cx="0" cy="137160"/>
+          </a:xfrm>
+          <a:prstGeom prst="line">
+            <a:avLst/>
+          </a:prstGeom>
+          <a:noFill/>
+          <a:ln w="19050">
+            <a:solidFill>
+              <a:srgbClr val="F59E0B"/>
+            </a:solidFill>
+            <a:prstDash val="solid"/>
+          </a:ln>
+        </p:spPr>
+      </p:sp>
+      <p:sp>
+        <p:nvSpPr>
+          <p:cNvPr id="17" name="Shape 14"/>
+          <p:cNvSpPr/>
+          <p:nvPr/>
+        </p:nvSpPr>
+        <p:spPr>
+          <a:xfrm>
+            <a:off x="11457432" y="3246120"/>
+            <a:ext cx="137160" cy="0"/>
+          </a:xfrm>
+          <a:prstGeom prst="line">
+            <a:avLst/>
+          </a:prstGeom>
+          <a:noFill/>
+          <a:ln w="19050">
+            <a:solidFill>
+              <a:srgbClr val="F59E0B"/>
+            </a:solidFill>
+            <a:prstDash val="solid"/>
+          </a:ln>
+        </p:spPr>
+      </p:sp>
+      <p:sp>
+        <p:nvSpPr>
+          <p:cNvPr id="18" name="Shape 15"/>
+          <p:cNvSpPr/>
+          <p:nvPr/>
+        </p:nvSpPr>
+        <p:spPr>
+          <a:xfrm>
+            <a:off x="11594592" y="3108960"/>
+            <a:ext cx="0" cy="137160"/>
+          </a:xfrm>
+          <a:prstGeom prst="line">
+            <a:avLst/>
+          </a:prstGeom>
+          <a:noFill/>
+          <a:ln w="19050">
+            <a:solidFill>
+              <a:srgbClr val="F59E0B"/>
+            </a:solidFill>
+            <a:prstDash val="solid"/>
+          </a:ln>
+        </p:spPr>
+      </p:sp>
+      <p:sp>
+        <p:nvSpPr>
+          <p:cNvPr id="19" name="Shape 16"/>
+          <p:cNvSpPr/>
+          <p:nvPr/>
+        </p:nvSpPr>
+        <p:spPr>
+          <a:xfrm>
+            <a:off x="6437376" y="1773936"/>
+            <a:ext cx="566928" cy="566928"/>
+          </a:xfrm>
+          <a:prstGeom prst="ellipse">
+            <a:avLst/>
+          </a:prstGeom>
+          <a:solidFill>
+            <a:srgbClr val="F59E0B"/>
+          </a:solidFill>
+          <a:ln/>
+        </p:spPr>
       </p:sp>
       <p:pic>
         <p:nvPicPr>
-          <p:cNvPr id="8" name="Image 1" descr="preencoded.png">    </p:cNvPr>
+          <p:cNvPr id="20" name="Image 1" descr="preencoded.png">    </p:cNvPr>
           <p:cNvPicPr>
             <a:picLocks noChangeAspect="1"/>
           </p:cNvPicPr>
@@ -10437,8 +10237,8 @@
         </p:blipFill>
         <p:spPr>
           <a:xfrm>
-            <a:off x="548640" y="2432304"/>
-            <a:ext cx="329184" cy="329184"/>
+            <a:off x="6567769" y="1904329"/>
+            <a:ext cx="306141" cy="306141"/>
           </a:xfrm>
           <a:prstGeom prst="rect">
             <a:avLst/>
@@ -10447,14 +10247,14 @@
       </p:pic>
       <p:sp>
         <p:nvSpPr>
-          <p:cNvPr id="9" name="Text 5"/>
-          <p:cNvSpPr/>
-          <p:nvPr/>
-        </p:nvSpPr>
-        <p:spPr>
-          <a:xfrm>
-            <a:off x="1024128" y="2377440"/>
-            <a:ext cx="5120640" cy="292608"/>
+          <p:cNvPr id="21" name="Text 17"/>
+          <p:cNvSpPr/>
+          <p:nvPr/>
+        </p:nvSpPr>
+        <p:spPr>
+          <a:xfrm>
+            <a:off x="7178040" y="1737360"/>
+            <a:ext cx="4315968" cy="292608"/>
           </a:xfrm>
           <a:prstGeom prst="rect">
             <a:avLst/>
@@ -10478,7 +10278,7 @@
                 <a:ea typeface="Arial" pitchFamily="34" charset="-122"/>
                 <a:cs typeface="Arial" pitchFamily="34" charset="-120"/>
               </a:rPr>
-              <a:t>Independently fact-checked</a:t>
+              <a:t>Negotiation leverage</a:t>
             </a:r>
             <a:endParaRPr lang="en-US" sz="1450" dirty="0"/>
           </a:p>
@@ -10486,30 +10286,30 @@
       </p:sp>
       <p:sp>
         <p:nvSpPr>
-          <p:cNvPr id="10" name="Text 6"/>
-          <p:cNvSpPr/>
-          <p:nvPr/>
-        </p:nvSpPr>
-        <p:spPr>
-          <a:xfrm>
-            <a:off x="1024128" y="2660904"/>
-            <a:ext cx="5669280" cy="548640"/>
-          </a:xfrm>
-          <a:prstGeom prst="rect">
-            <a:avLst/>
-          </a:prstGeom>
-          <a:noFill/>
-          <a:ln/>
-        </p:spPr>
-        <p:txBody>
-          <a:bodyPr wrap="square" lIns="0" tIns="0" rIns="0" bIns="0" rtlCol="0" anchor="ctr"/>
-          <a:lstStyle/>
-          <a:p>
-            <a:pPr indent="0" marL="0">
-              <a:buNone/>
-            </a:pPr>
-            <a:r>
-              <a:rPr lang="en-US" sz="1050" dirty="0">
+          <p:cNvPr id="22" name="Text 18"/>
+          <p:cNvSpPr/>
+          <p:nvPr/>
+        </p:nvSpPr>
+        <p:spPr>
+          <a:xfrm>
+            <a:off x="7178040" y="2048256"/>
+            <a:ext cx="4315968" cy="1143000"/>
+          </a:xfrm>
+          <a:prstGeom prst="rect">
+            <a:avLst/>
+          </a:prstGeom>
+          <a:noFill/>
+          <a:ln/>
+        </p:spPr>
+        <p:txBody>
+          <a:bodyPr wrap="square" lIns="0" tIns="0" rIns="0" bIns="0" rtlCol="0" anchor="ctr"/>
+          <a:lstStyle/>
+          <a:p>
+            <a:pPr indent="0" marL="0">
+              <a:buNone/>
+            </a:pPr>
+            <a:r>
+              <a:rPr lang="en-US" sz="1100" dirty="0">
                 <a:solidFill>
                   <a:srgbClr val="5B6B7F"/>
                 </a:solidFill>
@@ -10517,15 +10317,161 @@
                 <a:ea typeface="Arial" pitchFamily="34" charset="-122"/>
                 <a:cs typeface="Arial" pitchFamily="34" charset="-120"/>
               </a:rPr>
-              <a:t>A two-chair audit verified the riskiest claims against primary sources; every finding is fixed and test-locked.</a:t>
-            </a:r>
-            <a:endParaRPr lang="en-US" sz="1050" dirty="0"/>
-          </a:p>
-        </p:txBody>
+              <a:t>Wright’s-law trajectories say what a part SHOULD cost in 2029-31 — a defensible fact base for LTAs, productivity clauses and make-vs-buy.</a:t>
+            </a:r>
+            <a:endParaRPr lang="en-US" sz="1100" dirty="0"/>
+          </a:p>
+        </p:txBody>
+      </p:sp>
+      <p:sp>
+        <p:nvSpPr>
+          <p:cNvPr id="23" name="Shape 19"/>
+          <p:cNvSpPr/>
+          <p:nvPr/>
+        </p:nvSpPr>
+        <p:spPr>
+          <a:xfrm>
+            <a:off x="502920" y="3493008"/>
+            <a:ext cx="5440680" cy="1755648"/>
+          </a:xfrm>
+          <a:prstGeom prst="roundRect">
+            <a:avLst>
+              <a:gd name="adj" fmla="val 3646"/>
+            </a:avLst>
+          </a:prstGeom>
+          <a:solidFill>
+            <a:srgbClr val="FFFFFF"/>
+          </a:solidFill>
+          <a:ln w="9525">
+            <a:solidFill>
+              <a:srgbClr val="D7E0EA"/>
+            </a:solidFill>
+            <a:prstDash val="solid"/>
+          </a:ln>
+          <a:effectLst>
+            <a:outerShdw sx="100000" sy="100000" kx="0" ky="0" algn="bl" rotWithShape="0" blurRad="88900" dist="25400" dir="5400000">
+              <a:srgbClr val="9FB0C2">
+                <a:alpha val="30000"/>
+              </a:srgbClr>
+            </a:outerShdw>
+          </a:effectLst>
+        </p:spPr>
+      </p:sp>
+      <p:sp>
+        <p:nvSpPr>
+          <p:cNvPr id="24" name="Shape 20"/>
+          <p:cNvSpPr/>
+          <p:nvPr/>
+        </p:nvSpPr>
+        <p:spPr>
+          <a:xfrm>
+            <a:off x="566928" y="3557016"/>
+            <a:ext cx="137160" cy="0"/>
+          </a:xfrm>
+          <a:prstGeom prst="line">
+            <a:avLst/>
+          </a:prstGeom>
+          <a:noFill/>
+          <a:ln w="19050">
+            <a:solidFill>
+              <a:srgbClr val="F59E0B"/>
+            </a:solidFill>
+            <a:prstDash val="solid"/>
+          </a:ln>
+        </p:spPr>
+      </p:sp>
+      <p:sp>
+        <p:nvSpPr>
+          <p:cNvPr id="25" name="Shape 21"/>
+          <p:cNvSpPr/>
+          <p:nvPr/>
+        </p:nvSpPr>
+        <p:spPr>
+          <a:xfrm>
+            <a:off x="566928" y="3557016"/>
+            <a:ext cx="0" cy="137160"/>
+          </a:xfrm>
+          <a:prstGeom prst="line">
+            <a:avLst/>
+          </a:prstGeom>
+          <a:noFill/>
+          <a:ln w="19050">
+            <a:solidFill>
+              <a:srgbClr val="F59E0B"/>
+            </a:solidFill>
+            <a:prstDash val="solid"/>
+          </a:ln>
+        </p:spPr>
+      </p:sp>
+      <p:sp>
+        <p:nvSpPr>
+          <p:cNvPr id="26" name="Shape 22"/>
+          <p:cNvSpPr/>
+          <p:nvPr/>
+        </p:nvSpPr>
+        <p:spPr>
+          <a:xfrm>
+            <a:off x="5742432" y="5184648"/>
+            <a:ext cx="137160" cy="0"/>
+          </a:xfrm>
+          <a:prstGeom prst="line">
+            <a:avLst/>
+          </a:prstGeom>
+          <a:noFill/>
+          <a:ln w="19050">
+            <a:solidFill>
+              <a:srgbClr val="F59E0B"/>
+            </a:solidFill>
+            <a:prstDash val="solid"/>
+          </a:ln>
+        </p:spPr>
+      </p:sp>
+      <p:sp>
+        <p:nvSpPr>
+          <p:cNvPr id="27" name="Shape 23"/>
+          <p:cNvSpPr/>
+          <p:nvPr/>
+        </p:nvSpPr>
+        <p:spPr>
+          <a:xfrm>
+            <a:off x="5879592" y="5047488"/>
+            <a:ext cx="0" cy="137160"/>
+          </a:xfrm>
+          <a:prstGeom prst="line">
+            <a:avLst/>
+          </a:prstGeom>
+          <a:noFill/>
+          <a:ln w="19050">
+            <a:solidFill>
+              <a:srgbClr val="F59E0B"/>
+            </a:solidFill>
+            <a:prstDash val="solid"/>
+          </a:ln>
+        </p:spPr>
+      </p:sp>
+      <p:sp>
+        <p:nvSpPr>
+          <p:cNvPr id="28" name="Shape 24"/>
+          <p:cNvSpPr/>
+          <p:nvPr/>
+        </p:nvSpPr>
+        <p:spPr>
+          <a:xfrm>
+            <a:off x="722376" y="3712464"/>
+            <a:ext cx="566928" cy="566928"/>
+          </a:xfrm>
+          <a:prstGeom prst="ellipse">
+            <a:avLst/>
+          </a:prstGeom>
+          <a:solidFill>
+            <a:srgbClr val="0D9488"/>
+          </a:solidFill>
+          <a:ln/>
+        </p:spPr>
       </p:sp>
       <p:pic>
         <p:nvPicPr>
-          <p:cNvPr id="11" name="Image 2" descr="preencoded.png">    </p:cNvPr>
+          <p:cNvPr id="29" name="Image 2" descr="preencoded.png">    </p:cNvPr>
           <p:cNvPicPr>
             <a:picLocks noChangeAspect="1"/>
           </p:cNvPicPr>
@@ -10539,8 +10485,8 @@
         </p:blipFill>
         <p:spPr>
           <a:xfrm>
-            <a:off x="548640" y="3291840"/>
-            <a:ext cx="329184" cy="329184"/>
+            <a:off x="852769" y="3842857"/>
+            <a:ext cx="306141" cy="306141"/>
           </a:xfrm>
           <a:prstGeom prst="rect">
             <a:avLst/>
@@ -10549,14 +10495,14 @@
       </p:pic>
       <p:sp>
         <p:nvSpPr>
-          <p:cNvPr id="12" name="Text 7"/>
-          <p:cNvSpPr/>
-          <p:nvPr/>
-        </p:nvSpPr>
-        <p:spPr>
-          <a:xfrm>
-            <a:off x="1024128" y="3236976"/>
-            <a:ext cx="5120640" cy="292608"/>
+          <p:cNvPr id="30" name="Text 25"/>
+          <p:cNvSpPr/>
+          <p:nvPr/>
+        </p:nvSpPr>
+        <p:spPr>
+          <a:xfrm>
+            <a:off x="1463040" y="3675888"/>
+            <a:ext cx="4315968" cy="292608"/>
           </a:xfrm>
           <a:prstGeom prst="rect">
             <a:avLst/>
@@ -10580,7 +10526,7 @@
                 <a:ea typeface="Arial" pitchFamily="34" charset="-122"/>
                 <a:cs typeface="Arial" pitchFamily="34" charset="-120"/>
               </a:rPr>
-              <a:t>Honesty architecture</a:t>
+              <a:t>Regulatory de-risking</a:t>
             </a:r>
             <a:endParaRPr lang="en-US" sz="1450" dirty="0"/>
           </a:p>
@@ -10588,30 +10534,30 @@
       </p:sp>
       <p:sp>
         <p:nvSpPr>
-          <p:cNvPr id="13" name="Text 8"/>
-          <p:cNvSpPr/>
-          <p:nvPr/>
-        </p:nvSpPr>
-        <p:spPr>
-          <a:xfrm>
-            <a:off x="1024128" y="3520440"/>
-            <a:ext cx="5669280" cy="548640"/>
-          </a:xfrm>
-          <a:prstGeom prst="rect">
-            <a:avLst/>
-          </a:prstGeom>
-          <a:noFill/>
-          <a:ln/>
-        </p:spPr>
-        <p:txBody>
-          <a:bodyPr wrap="square" lIns="0" tIns="0" rIns="0" bIns="0" rtlCol="0" anchor="ctr"/>
-          <a:lstStyle/>
-          <a:p>
-            <a:pPr indent="0" marL="0">
-              <a:buNone/>
-            </a:pPr>
-            <a:r>
-              <a:rPr lang="en-US" sz="1050" dirty="0">
+          <p:cNvPr id="31" name="Text 26"/>
+          <p:cNvSpPr/>
+          <p:nvPr/>
+        </p:nvSpPr>
+        <p:spPr>
+          <a:xfrm>
+            <a:off x="1463040" y="3986784"/>
+            <a:ext cx="4315968" cy="1143000"/>
+          </a:xfrm>
+          <a:prstGeom prst="rect">
+            <a:avLst/>
+          </a:prstGeom>
+          <a:noFill/>
+          <a:ln/>
+        </p:spPr>
+        <p:txBody>
+          <a:bodyPr wrap="square" lIns="0" tIns="0" rIns="0" bIns="0" rtlCol="0" anchor="ctr"/>
+          <a:lstStyle/>
+          <a:p>
+            <a:pPr indent="0" marL="0">
+              <a:buNone/>
+            </a:pPr>
+            <a:r>
+              <a:rPr lang="en-US" sz="1100" dirty="0">
                 <a:solidFill>
                   <a:srgbClr val="5B6B7F"/>
                 </a:solidFill>
@@ -10619,15 +10565,161 @@
                 <a:ea typeface="Arial" pitchFamily="34" charset="-122"/>
                 <a:cs typeface="Arial" pitchFamily="34" charset="-120"/>
               </a:rPr>
-              <a:t>Confidence tiers · "modelled" labels · regulation legal status · adoption ceilings · uncertainty bands. It says "I don’t know" rather than guessing.</a:t>
-            </a:r>
-            <a:endParaRPr lang="en-US" sz="1050" dirty="0"/>
-          </a:p>
-        </p:txBody>
+              <a:t>Euro 7, ELV recast, GB 38031 — dated, legally statused, mapped to the exact components they force. Proposals can never masquerade as law.</a:t>
+            </a:r>
+            <a:endParaRPr lang="en-US" sz="1100" dirty="0"/>
+          </a:p>
+        </p:txBody>
+      </p:sp>
+      <p:sp>
+        <p:nvSpPr>
+          <p:cNvPr id="32" name="Shape 27"/>
+          <p:cNvSpPr/>
+          <p:nvPr/>
+        </p:nvSpPr>
+        <p:spPr>
+          <a:xfrm>
+            <a:off x="6217920" y="3493008"/>
+            <a:ext cx="5440680" cy="1755648"/>
+          </a:xfrm>
+          <a:prstGeom prst="roundRect">
+            <a:avLst>
+              <a:gd name="adj" fmla="val 3646"/>
+            </a:avLst>
+          </a:prstGeom>
+          <a:solidFill>
+            <a:srgbClr val="FFFFFF"/>
+          </a:solidFill>
+          <a:ln w="9525">
+            <a:solidFill>
+              <a:srgbClr val="D7E0EA"/>
+            </a:solidFill>
+            <a:prstDash val="solid"/>
+          </a:ln>
+          <a:effectLst>
+            <a:outerShdw sx="100000" sy="100000" kx="0" ky="0" algn="bl" rotWithShape="0" blurRad="88900" dist="25400" dir="5400000">
+              <a:srgbClr val="9FB0C2">
+                <a:alpha val="30000"/>
+              </a:srgbClr>
+            </a:outerShdw>
+          </a:effectLst>
+        </p:spPr>
+      </p:sp>
+      <p:sp>
+        <p:nvSpPr>
+          <p:cNvPr id="33" name="Shape 28"/>
+          <p:cNvSpPr/>
+          <p:nvPr/>
+        </p:nvSpPr>
+        <p:spPr>
+          <a:xfrm>
+            <a:off x="6281928" y="3557016"/>
+            <a:ext cx="137160" cy="0"/>
+          </a:xfrm>
+          <a:prstGeom prst="line">
+            <a:avLst/>
+          </a:prstGeom>
+          <a:noFill/>
+          <a:ln w="19050">
+            <a:solidFill>
+              <a:srgbClr val="F59E0B"/>
+            </a:solidFill>
+            <a:prstDash val="solid"/>
+          </a:ln>
+        </p:spPr>
+      </p:sp>
+      <p:sp>
+        <p:nvSpPr>
+          <p:cNvPr id="34" name="Shape 29"/>
+          <p:cNvSpPr/>
+          <p:nvPr/>
+        </p:nvSpPr>
+        <p:spPr>
+          <a:xfrm>
+            <a:off x="6281928" y="3557016"/>
+            <a:ext cx="0" cy="137160"/>
+          </a:xfrm>
+          <a:prstGeom prst="line">
+            <a:avLst/>
+          </a:prstGeom>
+          <a:noFill/>
+          <a:ln w="19050">
+            <a:solidFill>
+              <a:srgbClr val="F59E0B"/>
+            </a:solidFill>
+            <a:prstDash val="solid"/>
+          </a:ln>
+        </p:spPr>
+      </p:sp>
+      <p:sp>
+        <p:nvSpPr>
+          <p:cNvPr id="35" name="Shape 30"/>
+          <p:cNvSpPr/>
+          <p:nvPr/>
+        </p:nvSpPr>
+        <p:spPr>
+          <a:xfrm>
+            <a:off x="11457432" y="5184648"/>
+            <a:ext cx="137160" cy="0"/>
+          </a:xfrm>
+          <a:prstGeom prst="line">
+            <a:avLst/>
+          </a:prstGeom>
+          <a:noFill/>
+          <a:ln w="19050">
+            <a:solidFill>
+              <a:srgbClr val="F59E0B"/>
+            </a:solidFill>
+            <a:prstDash val="solid"/>
+          </a:ln>
+        </p:spPr>
+      </p:sp>
+      <p:sp>
+        <p:nvSpPr>
+          <p:cNvPr id="36" name="Shape 31"/>
+          <p:cNvSpPr/>
+          <p:nvPr/>
+        </p:nvSpPr>
+        <p:spPr>
+          <a:xfrm>
+            <a:off x="11594592" y="5047488"/>
+            <a:ext cx="0" cy="137160"/>
+          </a:xfrm>
+          <a:prstGeom prst="line">
+            <a:avLst/>
+          </a:prstGeom>
+          <a:noFill/>
+          <a:ln w="19050">
+            <a:solidFill>
+              <a:srgbClr val="F59E0B"/>
+            </a:solidFill>
+            <a:prstDash val="solid"/>
+          </a:ln>
+        </p:spPr>
+      </p:sp>
+      <p:sp>
+        <p:nvSpPr>
+          <p:cNvPr id="37" name="Shape 32"/>
+          <p:cNvSpPr/>
+          <p:nvPr/>
+        </p:nvSpPr>
+        <p:spPr>
+          <a:xfrm>
+            <a:off x="6437376" y="3712464"/>
+            <a:ext cx="566928" cy="566928"/>
+          </a:xfrm>
+          <a:prstGeom prst="ellipse">
+            <a:avLst/>
+          </a:prstGeom>
+          <a:solidFill>
+            <a:srgbClr val="6D28D9"/>
+          </a:solidFill>
+          <a:ln/>
+        </p:spPr>
       </p:sp>
       <p:pic>
         <p:nvPicPr>
-          <p:cNvPr id="14" name="Image 3" descr="preencoded.png">    </p:cNvPr>
+          <p:cNvPr id="38" name="Image 3" descr="preencoded.png">    </p:cNvPr>
           <p:cNvPicPr>
             <a:picLocks noChangeAspect="1"/>
           </p:cNvPicPr>
@@ -10641,8 +10733,8 @@
         </p:blipFill>
         <p:spPr>
           <a:xfrm>
-            <a:off x="548640" y="4151376"/>
-            <a:ext cx="329184" cy="329184"/>
+            <a:off x="6567769" y="3842857"/>
+            <a:ext cx="306141" cy="306141"/>
           </a:xfrm>
           <a:prstGeom prst="rect">
             <a:avLst/>
@@ -10651,14 +10743,14 @@
       </p:pic>
       <p:sp>
         <p:nvSpPr>
-          <p:cNvPr id="15" name="Text 9"/>
-          <p:cNvSpPr/>
-          <p:nvPr/>
-        </p:nvSpPr>
-        <p:spPr>
-          <a:xfrm>
-            <a:off x="1024128" y="4096512"/>
-            <a:ext cx="5120640" cy="292608"/>
+          <p:cNvPr id="39" name="Text 33"/>
+          <p:cNvSpPr/>
+          <p:nvPr/>
+        </p:nvSpPr>
+        <p:spPr>
+          <a:xfrm>
+            <a:off x="7178040" y="3675888"/>
+            <a:ext cx="4315968" cy="292608"/>
           </a:xfrm>
           <a:prstGeom prst="rect">
             <a:avLst/>
@@ -10682,7 +10774,7 @@
                 <a:ea typeface="Arial" pitchFamily="34" charset="-122"/>
                 <a:cs typeface="Arial" pitchFamily="34" charset="-120"/>
               </a:rPr>
-              <a:t>Grounded AI, enforced in code</a:t>
+              <a:t>Segment &amp; competitor radar</a:t>
             </a:r>
             <a:endParaRPr lang="en-US" sz="1450" dirty="0"/>
           </a:p>
@@ -10690,30 +10782,30 @@
       </p:sp>
       <p:sp>
         <p:nvSpPr>
-          <p:cNvPr id="16" name="Text 10"/>
-          <p:cNvSpPr/>
-          <p:nvPr/>
-        </p:nvSpPr>
-        <p:spPr>
-          <a:xfrm>
-            <a:off x="1024128" y="4379976"/>
-            <a:ext cx="5669280" cy="548640"/>
-          </a:xfrm>
-          <a:prstGeom prst="rect">
-            <a:avLst/>
-          </a:prstGeom>
-          <a:noFill/>
-          <a:ln/>
-        </p:spPr>
-        <p:txBody>
-          <a:bodyPr wrap="square" lIns="0" tIns="0" rIns="0" bIns="0" rtlCol="0" anchor="ctr"/>
-          <a:lstStyle/>
-          <a:p>
-            <a:pPr indent="0" marL="0">
-              <a:buNone/>
-            </a:pPr>
-            <a:r>
-              <a:rPr lang="en-US" sz="1050" dirty="0">
+          <p:cNvPr id="40" name="Text 34"/>
+          <p:cNvSpPr/>
+          <p:nvPr/>
+        </p:nvSpPr>
+        <p:spPr>
+          <a:xfrm>
+            <a:off x="7178040" y="3986784"/>
+            <a:ext cx="4315968" cy="1143000"/>
+          </a:xfrm>
+          <a:prstGeom prst="rect">
+            <a:avLst/>
+          </a:prstGeom>
+          <a:noFill/>
+          <a:ln/>
+        </p:spPr>
+        <p:txBody>
+          <a:bodyPr wrap="square" lIns="0" tIns="0" rIns="0" bIns="0" rtlCol="0" anchor="ctr"/>
+          <a:lstStyle/>
+          <a:p>
+            <a:pPr indent="0" marL="0">
+              <a:buNone/>
+            </a:pPr>
+            <a:r>
+              <a:rPr lang="en-US" sz="1100" dirty="0">
                 <a:solidFill>
                   <a:srgbClr val="5B6B7F"/>
                 </a:solidFill>
@@ -10721,477 +10813,149 @@
                 <a:ea typeface="Arial" pitchFamily="34" charset="-122"/>
                 <a:cs typeface="Arial" pitchFamily="34" charset="-120"/>
               </a:rPr>
-              <a:t>Briefing, panel and research are grounded in engine output; uncited findings are dropped server-side.</a:t>
-            </a:r>
-            <a:endParaRPr lang="en-US" sz="1050" dirty="0"/>
-          </a:p>
-        </p:txBody>
-      </p:sp>
-      <p:pic>
-        <p:nvPicPr>
-          <p:cNvPr id="17" name="Image 4" descr="preencoded.png">    </p:cNvPr>
-          <p:cNvPicPr>
-            <a:picLocks noChangeAspect="1"/>
-          </p:cNvPicPr>
-          <p:nvPr/>
-        </p:nvPicPr>
-        <p:blipFill>
-          <a:blip r:embed="rId5"/>
-          <a:stretch>
-            <a:fillRect/>
-          </a:stretch>
-        </p:blipFill>
-        <p:spPr>
-          <a:xfrm>
-            <a:off x="548640" y="5010912"/>
-            <a:ext cx="329184" cy="329184"/>
-          </a:xfrm>
-          <a:prstGeom prst="rect">
-            <a:avLst/>
-          </a:prstGeom>
-        </p:spPr>
-      </p:pic>
-      <p:sp>
-        <p:nvSpPr>
-          <p:cNvPr id="18" name="Text 11"/>
-          <p:cNvSpPr/>
-          <p:nvPr/>
-        </p:nvSpPr>
-        <p:spPr>
-          <a:xfrm>
-            <a:off x="1024128" y="4956048"/>
-            <a:ext cx="5120640" cy="292608"/>
-          </a:xfrm>
-          <a:prstGeom prst="rect">
-            <a:avLst/>
-          </a:prstGeom>
-          <a:noFill/>
-          <a:ln/>
-        </p:spPr>
-        <p:txBody>
-          <a:bodyPr wrap="square" lIns="0" tIns="0" rIns="0" bIns="0" rtlCol="0" anchor="ctr"/>
-          <a:lstStyle/>
-          <a:p>
-            <a:pPr indent="0" marL="0">
-              <a:buNone/>
-            </a:pPr>
-            <a:r>
-              <a:rPr lang="en-US" sz="1450" b="1" dirty="0">
-                <a:solidFill>
-                  <a:srgbClr val="0D1F33"/>
+              <a:t>Our off-road/luxury battleground benchmarked continuously — Defender OCTA to Yangwang U8 — each with the announced next move to watch.</a:t>
+            </a:r>
+            <a:endParaRPr lang="en-US" sz="1100" dirty="0"/>
+          </a:p>
+        </p:txBody>
+      </p:sp>
+      <p:sp>
+        <p:nvSpPr>
+          <p:cNvPr id="41" name="Shape 35"/>
+          <p:cNvSpPr/>
+          <p:nvPr/>
+        </p:nvSpPr>
+        <p:spPr>
+          <a:xfrm>
+            <a:off x="2103120" y="5650992"/>
+            <a:ext cx="7982712" cy="566928"/>
+          </a:xfrm>
+          <a:prstGeom prst="roundRect">
+            <a:avLst>
+              <a:gd name="adj" fmla="val 50000"/>
+            </a:avLst>
+          </a:prstGeom>
+          <a:solidFill>
+            <a:srgbClr val="0D1F33"/>
+          </a:solidFill>
+          <a:ln/>
+        </p:spPr>
+      </p:sp>
+      <p:sp>
+        <p:nvSpPr>
+          <p:cNvPr id="42" name="Text 36"/>
+          <p:cNvSpPr/>
+          <p:nvPr/>
+        </p:nvSpPr>
+        <p:spPr>
+          <a:xfrm>
+            <a:off x="2103120" y="5650992"/>
+            <a:ext cx="7982712" cy="566928"/>
+          </a:xfrm>
+          <a:prstGeom prst="rect">
+            <a:avLst/>
+          </a:prstGeom>
+          <a:noFill/>
+          <a:ln/>
+        </p:spPr>
+        <p:txBody>
+          <a:bodyPr wrap="square" lIns="0" tIns="0" rIns="0" bIns="0" rtlCol="0" anchor="ctr"/>
+          <a:lstStyle/>
+          <a:p>
+            <a:pPr algn="ctr" indent="0" marL="0">
+              <a:buNone/>
+            </a:pPr>
+            <a:r>
+              <a:rPr lang="en-US" sz="1300" b="1" dirty="0">
+                <a:solidFill>
+                  <a:srgbClr val="F59E0B"/>
                 </a:solidFill>
                 <a:latin typeface="Arial" pitchFamily="34" charset="0"/>
                 <a:ea typeface="Arial" pitchFamily="34" charset="-122"/>
                 <a:cs typeface="Arial" pitchFamily="34" charset="-120"/>
               </a:rPr>
-              <a:t>Self-scoring</a:t>
-            </a:r>
-            <a:endParaRPr lang="en-US" sz="1450" dirty="0"/>
-          </a:p>
-        </p:txBody>
-      </p:sp>
-      <p:sp>
-        <p:nvSpPr>
-          <p:cNvPr id="19" name="Text 12"/>
-          <p:cNvSpPr/>
-          <p:nvPr/>
-        </p:nvSpPr>
-        <p:spPr>
-          <a:xfrm>
-            <a:off x="1024128" y="5239512"/>
-            <a:ext cx="5669280" cy="548640"/>
-          </a:xfrm>
-          <a:prstGeom prst="rect">
-            <a:avLst/>
-          </a:prstGeom>
-          <a:noFill/>
-          <a:ln/>
-        </p:spPr>
-        <p:txBody>
-          <a:bodyPr wrap="square" lIns="0" tIns="0" rIns="0" bIns="0" rtlCol="0" anchor="ctr"/>
-          <a:lstStyle/>
-          <a:p>
-            <a:pPr indent="0" marL="0">
-              <a:buNone/>
-            </a:pPr>
-            <a:r>
-              <a:rPr lang="en-US" sz="1050" dirty="0">
-                <a:solidFill>
-                  <a:srgbClr val="5B6B7F"/>
+              <a:t>Minutes, not weeks </a:t>
+            </a:r>
+            <a:pPr algn="ctr" indent="0" marL="0">
+              <a:buNone/>
+            </a:pPr>
+            <a:r>
+              <a:rPr lang="en-US" sz="1300" dirty="0">
+                <a:solidFill>
+                  <a:srgbClr val="D5DEE9"/>
                 </a:solidFill>
                 <a:latin typeface="Arial" pitchFamily="34" charset="0"/>
                 <a:ea typeface="Arial" pitchFamily="34" charset="-122"/>
                 <a:cs typeface="Arial" pitchFamily="34" charset="-120"/>
               </a:rPr>
-              <a:t>The Prediction Ledger snapshots forecasts and scores them on re-curation — Tetlock discipline, built in.</a:t>
-            </a:r>
-            <a:endParaRPr lang="en-US" sz="1050" dirty="0"/>
-          </a:p>
-        </p:txBody>
-      </p:sp>
-      <p:sp>
-        <p:nvSpPr>
-          <p:cNvPr id="20" name="Shape 13"/>
-          <p:cNvSpPr/>
-          <p:nvPr/>
-        </p:nvSpPr>
-        <p:spPr>
-          <a:xfrm>
-            <a:off x="7178040" y="1554480"/>
-            <a:ext cx="4507992" cy="4206240"/>
-          </a:xfrm>
-          <a:prstGeom prst="roundRect">
-            <a:avLst>
-              <a:gd name="adj" fmla="val 1957"/>
-            </a:avLst>
-          </a:prstGeom>
-          <a:solidFill>
-            <a:srgbClr val="0D1F33"/>
-          </a:solidFill>
-          <a:ln/>
-          <a:effectLst>
-            <a:outerShdw sx="100000" sy="100000" kx="0" ky="0" algn="bl" rotWithShape="0" blurRad="101600" dist="25400" dir="5400000">
-              <a:srgbClr val="9FB0C2">
-                <a:alpha val="35000"/>
-              </a:srgbClr>
-            </a:outerShdw>
-          </a:effectLst>
-        </p:spPr>
-      </p:sp>
-      <p:sp>
-        <p:nvSpPr>
-          <p:cNvPr id="21" name="Shape 14"/>
-          <p:cNvSpPr/>
-          <p:nvPr/>
-        </p:nvSpPr>
-        <p:spPr>
-          <a:xfrm>
-            <a:off x="7296912" y="1673352"/>
-            <a:ext cx="137160" cy="0"/>
-          </a:xfrm>
-          <a:prstGeom prst="line">
-            <a:avLst/>
-          </a:prstGeom>
-          <a:noFill/>
-          <a:ln w="19050">
-            <a:solidFill>
-              <a:srgbClr val="F59E0B"/>
-            </a:solidFill>
-            <a:prstDash val="solid"/>
-          </a:ln>
-        </p:spPr>
-      </p:sp>
-      <p:sp>
-        <p:nvSpPr>
-          <p:cNvPr id="22" name="Shape 15"/>
-          <p:cNvSpPr/>
-          <p:nvPr/>
-        </p:nvSpPr>
-        <p:spPr>
-          <a:xfrm>
-            <a:off x="7296912" y="1673352"/>
-            <a:ext cx="0" cy="137160"/>
-          </a:xfrm>
-          <a:prstGeom prst="line">
-            <a:avLst/>
-          </a:prstGeom>
-          <a:noFill/>
-          <a:ln w="19050">
-            <a:solidFill>
-              <a:srgbClr val="F59E0B"/>
-            </a:solidFill>
-            <a:prstDash val="solid"/>
-          </a:ln>
-        </p:spPr>
-      </p:sp>
-      <p:sp>
-        <p:nvSpPr>
-          <p:cNvPr id="23" name="Shape 16"/>
-          <p:cNvSpPr/>
-          <p:nvPr/>
-        </p:nvSpPr>
-        <p:spPr>
-          <a:xfrm>
-            <a:off x="11430000" y="5641848"/>
-            <a:ext cx="137160" cy="0"/>
-          </a:xfrm>
-          <a:prstGeom prst="line">
-            <a:avLst/>
-          </a:prstGeom>
-          <a:noFill/>
-          <a:ln w="19050">
-            <a:solidFill>
-              <a:srgbClr val="F59E0B"/>
-            </a:solidFill>
-            <a:prstDash val="solid"/>
-          </a:ln>
-        </p:spPr>
-      </p:sp>
-      <p:sp>
-        <p:nvSpPr>
-          <p:cNvPr id="24" name="Shape 17"/>
-          <p:cNvSpPr/>
-          <p:nvPr/>
-        </p:nvSpPr>
-        <p:spPr>
-          <a:xfrm>
-            <a:off x="11567160" y="5504688"/>
-            <a:ext cx="0" cy="137160"/>
-          </a:xfrm>
-          <a:prstGeom prst="line">
-            <a:avLst/>
-          </a:prstGeom>
-          <a:noFill/>
-          <a:ln w="19050">
-            <a:solidFill>
-              <a:srgbClr val="F59E0B"/>
-            </a:solidFill>
-            <a:prstDash val="solid"/>
-          </a:ln>
-        </p:spPr>
-      </p:sp>
-      <p:pic>
-        <p:nvPicPr>
-          <p:cNvPr id="25" name="Image 5" descr="preencoded.png">    </p:cNvPr>
-          <p:cNvPicPr>
-            <a:picLocks noChangeAspect="1"/>
-          </p:cNvPicPr>
-          <p:nvPr/>
-        </p:nvPicPr>
-        <p:blipFill>
-          <a:blip r:embed="rId6"/>
-          <a:stretch>
-            <a:fillRect/>
-          </a:stretch>
-        </p:blipFill>
-        <p:spPr>
-          <a:xfrm>
-            <a:off x="7498080" y="1828800"/>
-            <a:ext cx="420624" cy="420624"/>
-          </a:xfrm>
-          <a:prstGeom prst="rect">
-            <a:avLst/>
-          </a:prstGeom>
-        </p:spPr>
-      </p:pic>
-      <p:sp>
-        <p:nvSpPr>
-          <p:cNvPr id="26" name="Text 18"/>
-          <p:cNvSpPr/>
-          <p:nvPr/>
-        </p:nvSpPr>
-        <p:spPr>
-          <a:xfrm>
-            <a:off x="8046720" y="1883664"/>
-            <a:ext cx="3474720" cy="347472"/>
-          </a:xfrm>
-          <a:prstGeom prst="rect">
-            <a:avLst/>
-          </a:prstGeom>
-          <a:noFill/>
-          <a:ln/>
-        </p:spPr>
-        <p:txBody>
-          <a:bodyPr wrap="square" lIns="0" tIns="0" rIns="0" bIns="0" rtlCol="0" anchor="ctr"/>
-          <a:lstStyle/>
-          <a:p>
-            <a:pPr indent="0" marL="0">
-              <a:buNone/>
-            </a:pPr>
-            <a:r>
-              <a:rPr lang="en-US" sz="1400" b="1" dirty="0">
-                <a:solidFill>
-                  <a:srgbClr val="FFFFFF"/>
-                </a:solidFill>
-                <a:latin typeface="Arial" pitchFamily="34" charset="0"/>
-                <a:ea typeface="Arial" pitchFamily="34" charset="-122"/>
-                <a:cs typeface="Arial" pitchFamily="34" charset="-120"/>
-              </a:rPr>
-              <a:t>The test we set ourselves</a:t>
-            </a:r>
-            <a:endParaRPr lang="en-US" sz="1400" dirty="0"/>
-          </a:p>
-        </p:txBody>
-      </p:sp>
-      <p:sp>
-        <p:nvSpPr>
-          <p:cNvPr id="27" name="Text 19"/>
-          <p:cNvSpPr/>
-          <p:nvPr/>
-        </p:nvSpPr>
-        <p:spPr>
-          <a:xfrm>
-            <a:off x="7498080" y="2450592"/>
-            <a:ext cx="3886200" cy="868680"/>
-          </a:xfrm>
-          <a:prstGeom prst="rect">
-            <a:avLst/>
-          </a:prstGeom>
-          <a:noFill/>
-          <a:ln/>
-        </p:spPr>
-        <p:txBody>
-          <a:bodyPr wrap="square" lIns="0" tIns="0" rIns="0" bIns="0" rtlCol="0" anchor="ctr"/>
-          <a:lstStyle/>
-          <a:p>
-            <a:pPr indent="0" marL="0">
-              <a:buNone/>
-            </a:pPr>
-            <a:r>
-              <a:rPr lang="en-US" sz="1500" i="1" dirty="0">
-                <a:solidFill>
-                  <a:srgbClr val="F59E0B"/>
-                </a:solidFill>
-                <a:latin typeface="Arial" pitchFamily="34" charset="0"/>
-                <a:ea typeface="Arial" pitchFamily="34" charset="-122"/>
-                <a:cs typeface="Arial" pitchFamily="34" charset="-120"/>
-              </a:rPr>
-              <a:t>"A foresight tool that never checks its own past predictions is astrology."</a:t>
-            </a:r>
-            <a:endParaRPr lang="en-US" sz="1500" dirty="0"/>
-          </a:p>
-        </p:txBody>
-      </p:sp>
-      <p:sp>
-        <p:nvSpPr>
-          <p:cNvPr id="28" name="Text 20"/>
-          <p:cNvSpPr/>
-          <p:nvPr/>
-        </p:nvSpPr>
-        <p:spPr>
-          <a:xfrm>
-            <a:off x="7498080" y="3429000"/>
-            <a:ext cx="3886200" cy="1371600"/>
-          </a:xfrm>
-          <a:prstGeom prst="rect">
-            <a:avLst/>
-          </a:prstGeom>
-          <a:noFill/>
-          <a:ln/>
-        </p:spPr>
-        <p:txBody>
-          <a:bodyPr wrap="square" lIns="0" tIns="0" rIns="0" bIns="0" rtlCol="0" anchor="ctr"/>
-          <a:lstStyle/>
-          <a:p>
-            <a:pPr indent="0" marL="0">
-              <a:buNone/>
-            </a:pPr>
-            <a:r>
-              <a:rPr lang="en-US" sz="1150" dirty="0">
-                <a:solidFill>
-                  <a:srgbClr val="C7D2DE"/>
-                </a:solidFill>
-                <a:latin typeface="Arial" pitchFamily="34" charset="0"/>
-                <a:ea typeface="Arial" pitchFamily="34" charset="-122"/>
-                <a:cs typeface="Arial" pitchFamily="34" charset="-120"/>
-              </a:rPr>
-              <a:t>Every prediction can be snapshotted. When the register is re-curated, the tool computes exactly how far its old projections were off — and shows us the error. No other tool in this space grades its own homework.</a:t>
-            </a:r>
-            <a:endParaRPr lang="en-US" sz="1150" dirty="0"/>
-          </a:p>
-        </p:txBody>
-      </p:sp>
-      <p:sp>
-        <p:nvSpPr>
-          <p:cNvPr id="29" name="Text 21"/>
-          <p:cNvSpPr/>
-          <p:nvPr/>
-        </p:nvSpPr>
-        <p:spPr>
-          <a:xfrm>
-            <a:off x="7498080" y="5166360"/>
-            <a:ext cx="3886200" cy="274320"/>
-          </a:xfrm>
-          <a:prstGeom prst="rect">
-            <a:avLst/>
-          </a:prstGeom>
-          <a:noFill/>
-          <a:ln/>
-        </p:spPr>
-        <p:txBody>
-          <a:bodyPr wrap="square" lIns="0" tIns="0" rIns="0" bIns="0" rtlCol="0" anchor="ctr"/>
-          <a:lstStyle/>
-          <a:p>
-            <a:pPr indent="0" marL="0">
-              <a:buNone/>
-            </a:pPr>
-            <a:r>
-              <a:rPr lang="en-US" sz="1050" b="1" dirty="0">
-                <a:solidFill>
-                  <a:srgbClr val="0D9488"/>
+              <a:t> ·  self-serve, part-level, in our commodity language — for every engineer</a:t>
+            </a:r>
+            <a:endParaRPr lang="en-US" sz="1300" dirty="0"/>
+          </a:p>
+        </p:txBody>
+      </p:sp>
+      <p:sp>
+        <p:nvSpPr>
+          <p:cNvPr id="43" name="Text 37"/>
+          <p:cNvSpPr/>
+          <p:nvPr/>
+        </p:nvSpPr>
+        <p:spPr>
+          <a:xfrm>
+            <a:off x="502920" y="6492240"/>
+            <a:ext cx="7315200" cy="256032"/>
+          </a:xfrm>
+          <a:prstGeom prst="rect">
+            <a:avLst/>
+          </a:prstGeom>
+          <a:noFill/>
+          <a:ln/>
+        </p:spPr>
+        <p:txBody>
+          <a:bodyPr wrap="square" lIns="0" tIns="0" rIns="0" bIns="0" rtlCol="0" anchor="ctr"/>
+          <a:lstStyle/>
+          <a:p>
+            <a:pPr indent="0" marL="0">
+              <a:buNone/>
+            </a:pPr>
+            <a:r>
+              <a:rPr lang="en-US" sz="900" b="1" dirty="0">
+                <a:solidFill>
+                  <a:srgbClr val="5B6B7F"/>
                 </a:solidFill>
                 <a:latin typeface="Courier New" pitchFamily="34" charset="0"/>
                 <a:ea typeface="Courier New" pitchFamily="34" charset="-122"/>
                 <a:cs typeface="Courier New" pitchFamily="34" charset="-120"/>
               </a:rPr>
-              <a:t>audited · test-locked · self-scoring</a:t>
-            </a:r>
-            <a:endParaRPr lang="en-US" sz="1050" dirty="0"/>
-          </a:p>
-        </p:txBody>
-      </p:sp>
-      <p:sp>
-        <p:nvSpPr>
-          <p:cNvPr id="30" name="Text 22"/>
-          <p:cNvSpPr/>
-          <p:nvPr/>
-        </p:nvSpPr>
-        <p:spPr>
-          <a:xfrm>
-            <a:off x="502920" y="6492240"/>
-            <a:ext cx="7315200" cy="256032"/>
-          </a:xfrm>
-          <a:prstGeom prst="rect">
-            <a:avLst/>
-          </a:prstGeom>
-          <a:noFill/>
-          <a:ln/>
-        </p:spPr>
-        <p:txBody>
-          <a:bodyPr wrap="square" lIns="0" tIns="0" rIns="0" bIns="0" rtlCol="0" anchor="ctr"/>
-          <a:lstStyle/>
-          <a:p>
+              <a:t>BrainSpark </a:t>
+            </a:r>
             <a:pPr indent="0" marL="0">
               <a:buNone/>
             </a:pPr>
             <a:r>
               <a:rPr lang="en-US" sz="900" b="1" dirty="0">
                 <a:solidFill>
-                  <a:srgbClr val="5B6B7F"/>
+                  <a:srgbClr val="F59E0B"/>
                 </a:solidFill>
                 <a:latin typeface="Courier New" pitchFamily="34" charset="0"/>
                 <a:ea typeface="Courier New" pitchFamily="34" charset="-122"/>
                 <a:cs typeface="Courier New" pitchFamily="34" charset="-120"/>
               </a:rPr>
-              <a:t>BrainSpark </a:t>
-            </a:r>
-            <a:pPr indent="0" marL="0">
-              <a:buNone/>
-            </a:pPr>
-            <a:r>
-              <a:rPr lang="en-US" sz="900" b="1" dirty="0">
-                <a:solidFill>
-                  <a:srgbClr val="F59E0B"/>
+              <a:t>Horizon</a:t>
+            </a:r>
+            <a:pPr indent="0" marL="0">
+              <a:buNone/>
+            </a:pPr>
+            <a:r>
+              <a:rPr lang="en-US" sz="900" dirty="0">
+                <a:solidFill>
+                  <a:srgbClr val="93A3B5"/>
                 </a:solidFill>
                 <a:latin typeface="Courier New" pitchFamily="34" charset="0"/>
                 <a:ea typeface="Courier New" pitchFamily="34" charset="-122"/>
                 <a:cs typeface="Courier New" pitchFamily="34" charset="-120"/>
               </a:rPr>
-              <a:t>Horizon</a:t>
-            </a:r>
-            <a:pPr indent="0" marL="0">
-              <a:buNone/>
-            </a:pPr>
-            <a:r>
-              <a:rPr lang="en-US" sz="900" dirty="0">
-                <a:solidFill>
-                  <a:srgbClr val="93A3B5"/>
-                </a:solidFill>
-                <a:latin typeface="Courier New" pitchFamily="34" charset="0"/>
-                <a:ea typeface="Courier New" pitchFamily="34" charset="-122"/>
-                <a:cs typeface="Courier New" pitchFamily="34" charset="-120"/>
-              </a:rPr>
-              <a:t>  ·  Technology Foresight Engine  ·  15/16</a:t>
+              <a:t>  ·  Technology Foresight Engine  ·  14/17</a:t>
             </a:r>
             <a:endParaRPr lang="en-US" sz="900" dirty="0"/>
           </a:p>
@@ -11208,6 +10972,1016 @@
 <file path=ppt/slides/slide16.xml><?xml version="1.0" encoding="utf-8"?>
 <p:sld xmlns:a="http://schemas.openxmlformats.org/drawingml/2006/main" xmlns:r="http://schemas.openxmlformats.org/officeDocument/2006/relationships" xmlns:p="http://schemas.openxmlformats.org/presentationml/2006/main">
   <p:cSld name="Slide 16">
+    <p:bg>
+      <p:bgPr>
+        <a:solidFill>
+          <a:srgbClr val="FFFFFF"/>
+        </a:solidFill>
+      </p:bgPr>
+    </p:bg>
+    <p:spTree>
+      <p:nvGrpSpPr>
+        <p:cNvPr id="1" name=""/>
+        <p:cNvGrpSpPr/>
+        <p:nvPr/>
+      </p:nvGrpSpPr>
+      <p:grpSpPr>
+        <a:xfrm>
+          <a:off x="0" y="0"/>
+          <a:ext cx="0" cy="0"/>
+          <a:chOff x="0" y="0"/>
+          <a:chExt cx="0" cy="0"/>
+        </a:xfrm>
+      </p:grpSpPr>
+      <p:sp>
+        <p:nvSpPr>
+          <p:cNvPr id="2" name="Shape 0"/>
+          <p:cNvSpPr/>
+          <p:nvPr/>
+        </p:nvSpPr>
+        <p:spPr>
+          <a:xfrm>
+            <a:off x="502920" y="347472"/>
+            <a:ext cx="905256" cy="329184"/>
+          </a:xfrm>
+          <a:prstGeom prst="roundRect">
+            <a:avLst>
+              <a:gd name="adj" fmla="val 50000"/>
+            </a:avLst>
+          </a:prstGeom>
+          <a:solidFill>
+            <a:srgbClr val="0D1F33"/>
+          </a:solidFill>
+          <a:ln/>
+        </p:spPr>
+      </p:sp>
+      <p:sp>
+        <p:nvSpPr>
+          <p:cNvPr id="3" name="Text 1"/>
+          <p:cNvSpPr/>
+          <p:nvPr/>
+        </p:nvSpPr>
+        <p:spPr>
+          <a:xfrm>
+            <a:off x="502920" y="347472"/>
+            <a:ext cx="905256" cy="329184"/>
+          </a:xfrm>
+          <a:prstGeom prst="rect">
+            <a:avLst/>
+          </a:prstGeom>
+          <a:noFill/>
+          <a:ln/>
+        </p:spPr>
+        <p:txBody>
+          <a:bodyPr wrap="square" lIns="0" tIns="0" rIns="0" bIns="0" rtlCol="0" anchor="ctr"/>
+          <a:lstStyle/>
+          <a:p>
+            <a:pPr algn="ctr" indent="0" marL="0">
+              <a:buNone/>
+            </a:pPr>
+            <a:r>
+              <a:rPr lang="en-US" sz="1100" b="1" spc="200" kern="0" dirty="0">
+                <a:solidFill>
+                  <a:srgbClr val="F59E0B"/>
+                </a:solidFill>
+                <a:latin typeface="Courier New" pitchFamily="34" charset="0"/>
+                <a:ea typeface="Courier New" pitchFamily="34" charset="-122"/>
+                <a:cs typeface="Courier New" pitchFamily="34" charset="-120"/>
+              </a:rPr>
+              <a:t>TRUST</a:t>
+            </a:r>
+            <a:endParaRPr lang="en-US" sz="1100" dirty="0"/>
+          </a:p>
+        </p:txBody>
+      </p:sp>
+      <p:sp>
+        <p:nvSpPr>
+          <p:cNvPr id="4" name="Text 2"/>
+          <p:cNvSpPr/>
+          <p:nvPr/>
+        </p:nvSpPr>
+        <p:spPr>
+          <a:xfrm>
+            <a:off x="502920" y="749808"/>
+            <a:ext cx="11155680" cy="566928"/>
+          </a:xfrm>
+          <a:prstGeom prst="rect">
+            <a:avLst/>
+          </a:prstGeom>
+          <a:noFill/>
+          <a:ln/>
+        </p:spPr>
+        <p:txBody>
+          <a:bodyPr wrap="square" lIns="0" tIns="0" rIns="0" bIns="0" rtlCol="0" anchor="ctr"/>
+          <a:lstStyle/>
+          <a:p>
+            <a:pPr indent="0" marL="0">
+              <a:buNone/>
+            </a:pPr>
+            <a:r>
+              <a:rPr lang="en-US" sz="2800" b="1" dirty="0">
+                <a:solidFill>
+                  <a:srgbClr val="0D1F33"/>
+                </a:solidFill>
+                <a:latin typeface="Arial" pitchFamily="34" charset="0"/>
+                <a:ea typeface="Arial" pitchFamily="34" charset="-122"/>
+                <a:cs typeface="Arial" pitchFamily="34" charset="-120"/>
+              </a:rPr>
+              <a:t>Engineered and audited like a product, not a demo</a:t>
+            </a:r>
+            <a:endParaRPr lang="en-US" sz="2800" dirty="0"/>
+          </a:p>
+        </p:txBody>
+      </p:sp>
+      <p:pic>
+        <p:nvPicPr>
+          <p:cNvPr id="5" name="Image 0" descr="preencoded.png">    </p:cNvPr>
+          <p:cNvPicPr>
+            <a:picLocks noChangeAspect="1"/>
+          </p:cNvPicPr>
+          <p:nvPr/>
+        </p:nvPicPr>
+        <p:blipFill>
+          <a:blip r:embed="rId1"/>
+          <a:stretch>
+            <a:fillRect/>
+          </a:stretch>
+        </p:blipFill>
+        <p:spPr>
+          <a:xfrm>
+            <a:off x="548640" y="1572768"/>
+            <a:ext cx="329184" cy="329184"/>
+          </a:xfrm>
+          <a:prstGeom prst="rect">
+            <a:avLst/>
+          </a:prstGeom>
+        </p:spPr>
+      </p:pic>
+      <p:sp>
+        <p:nvSpPr>
+          <p:cNvPr id="6" name="Text 3"/>
+          <p:cNvSpPr/>
+          <p:nvPr/>
+        </p:nvSpPr>
+        <p:spPr>
+          <a:xfrm>
+            <a:off x="1024128" y="1517904"/>
+            <a:ext cx="5120640" cy="292608"/>
+          </a:xfrm>
+          <a:prstGeom prst="rect">
+            <a:avLst/>
+          </a:prstGeom>
+          <a:noFill/>
+          <a:ln/>
+        </p:spPr>
+        <p:txBody>
+          <a:bodyPr wrap="square" lIns="0" tIns="0" rIns="0" bIns="0" rtlCol="0" anchor="ctr"/>
+          <a:lstStyle/>
+          <a:p>
+            <a:pPr indent="0" marL="0">
+              <a:buNone/>
+            </a:pPr>
+            <a:r>
+              <a:rPr lang="en-US" sz="1450" b="1" dirty="0">
+                <a:solidFill>
+                  <a:srgbClr val="0D1F33"/>
+                </a:solidFill>
+                <a:latin typeface="Arial" pitchFamily="34" charset="0"/>
+                <a:ea typeface="Arial" pitchFamily="34" charset="-122"/>
+                <a:cs typeface="Arial" pitchFamily="34" charset="-120"/>
+              </a:rPr>
+              <a:t>758 automated tests</a:t>
+            </a:r>
+            <a:endParaRPr lang="en-US" sz="1450" dirty="0"/>
+          </a:p>
+        </p:txBody>
+      </p:sp>
+      <p:sp>
+        <p:nvSpPr>
+          <p:cNvPr id="7" name="Text 4"/>
+          <p:cNvSpPr/>
+          <p:nvPr/>
+        </p:nvSpPr>
+        <p:spPr>
+          <a:xfrm>
+            <a:off x="1024128" y="1801368"/>
+            <a:ext cx="5669280" cy="548640"/>
+          </a:xfrm>
+          <a:prstGeom prst="rect">
+            <a:avLst/>
+          </a:prstGeom>
+          <a:noFill/>
+          <a:ln/>
+        </p:spPr>
+        <p:txBody>
+          <a:bodyPr wrap="square" lIns="0" tIns="0" rIns="0" bIns="0" rtlCol="0" anchor="ctr"/>
+          <a:lstStyle/>
+          <a:p>
+            <a:pPr indent="0" marL="0">
+              <a:buNone/>
+            </a:pPr>
+            <a:r>
+              <a:rPr lang="en-US" sz="1050" dirty="0">
+                <a:solidFill>
+                  <a:srgbClr val="5B6B7F"/>
+                </a:solidFill>
+                <a:latin typeface="Arial" pitchFamily="34" charset="0"/>
+                <a:ea typeface="Arial" pitchFamily="34" charset="-122"/>
+                <a:cs typeface="Arial" pitchFamily="34" charset="-120"/>
+              </a:rPr>
+              <a:t>Register integrity, model rules and coverage are CI-enforced — an adoption claim without evidence fails the build.</a:t>
+            </a:r>
+            <a:endParaRPr lang="en-US" sz="1050" dirty="0"/>
+          </a:p>
+        </p:txBody>
+      </p:sp>
+      <p:pic>
+        <p:nvPicPr>
+          <p:cNvPr id="8" name="Image 1" descr="preencoded.png">    </p:cNvPr>
+          <p:cNvPicPr>
+            <a:picLocks noChangeAspect="1"/>
+          </p:cNvPicPr>
+          <p:nvPr/>
+        </p:nvPicPr>
+        <p:blipFill>
+          <a:blip r:embed="rId2"/>
+          <a:stretch>
+            <a:fillRect/>
+          </a:stretch>
+        </p:blipFill>
+        <p:spPr>
+          <a:xfrm>
+            <a:off x="548640" y="2432304"/>
+            <a:ext cx="329184" cy="329184"/>
+          </a:xfrm>
+          <a:prstGeom prst="rect">
+            <a:avLst/>
+          </a:prstGeom>
+        </p:spPr>
+      </p:pic>
+      <p:sp>
+        <p:nvSpPr>
+          <p:cNvPr id="9" name="Text 5"/>
+          <p:cNvSpPr/>
+          <p:nvPr/>
+        </p:nvSpPr>
+        <p:spPr>
+          <a:xfrm>
+            <a:off x="1024128" y="2377440"/>
+            <a:ext cx="5120640" cy="292608"/>
+          </a:xfrm>
+          <a:prstGeom prst="rect">
+            <a:avLst/>
+          </a:prstGeom>
+          <a:noFill/>
+          <a:ln/>
+        </p:spPr>
+        <p:txBody>
+          <a:bodyPr wrap="square" lIns="0" tIns="0" rIns="0" bIns="0" rtlCol="0" anchor="ctr"/>
+          <a:lstStyle/>
+          <a:p>
+            <a:pPr indent="0" marL="0">
+              <a:buNone/>
+            </a:pPr>
+            <a:r>
+              <a:rPr lang="en-US" sz="1450" b="1" dirty="0">
+                <a:solidFill>
+                  <a:srgbClr val="0D1F33"/>
+                </a:solidFill>
+                <a:latin typeface="Arial" pitchFamily="34" charset="0"/>
+                <a:ea typeface="Arial" pitchFamily="34" charset="-122"/>
+                <a:cs typeface="Arial" pitchFamily="34" charset="-120"/>
+              </a:rPr>
+              <a:t>Independently fact-checked</a:t>
+            </a:r>
+            <a:endParaRPr lang="en-US" sz="1450" dirty="0"/>
+          </a:p>
+        </p:txBody>
+      </p:sp>
+      <p:sp>
+        <p:nvSpPr>
+          <p:cNvPr id="10" name="Text 6"/>
+          <p:cNvSpPr/>
+          <p:nvPr/>
+        </p:nvSpPr>
+        <p:spPr>
+          <a:xfrm>
+            <a:off x="1024128" y="2660904"/>
+            <a:ext cx="5669280" cy="548640"/>
+          </a:xfrm>
+          <a:prstGeom prst="rect">
+            <a:avLst/>
+          </a:prstGeom>
+          <a:noFill/>
+          <a:ln/>
+        </p:spPr>
+        <p:txBody>
+          <a:bodyPr wrap="square" lIns="0" tIns="0" rIns="0" bIns="0" rtlCol="0" anchor="ctr"/>
+          <a:lstStyle/>
+          <a:p>
+            <a:pPr indent="0" marL="0">
+              <a:buNone/>
+            </a:pPr>
+            <a:r>
+              <a:rPr lang="en-US" sz="1050" dirty="0">
+                <a:solidFill>
+                  <a:srgbClr val="5B6B7F"/>
+                </a:solidFill>
+                <a:latin typeface="Arial" pitchFamily="34" charset="0"/>
+                <a:ea typeface="Arial" pitchFamily="34" charset="-122"/>
+                <a:cs typeface="Arial" pitchFamily="34" charset="-120"/>
+              </a:rPr>
+              <a:t>A two-chair audit verified the riskiest claims against primary sources; every finding is fixed and test-locked.</a:t>
+            </a:r>
+            <a:endParaRPr lang="en-US" sz="1050" dirty="0"/>
+          </a:p>
+        </p:txBody>
+      </p:sp>
+      <p:pic>
+        <p:nvPicPr>
+          <p:cNvPr id="11" name="Image 2" descr="preencoded.png">    </p:cNvPr>
+          <p:cNvPicPr>
+            <a:picLocks noChangeAspect="1"/>
+          </p:cNvPicPr>
+          <p:nvPr/>
+        </p:nvPicPr>
+        <p:blipFill>
+          <a:blip r:embed="rId3"/>
+          <a:stretch>
+            <a:fillRect/>
+          </a:stretch>
+        </p:blipFill>
+        <p:spPr>
+          <a:xfrm>
+            <a:off x="548640" y="3291840"/>
+            <a:ext cx="329184" cy="329184"/>
+          </a:xfrm>
+          <a:prstGeom prst="rect">
+            <a:avLst/>
+          </a:prstGeom>
+        </p:spPr>
+      </p:pic>
+      <p:sp>
+        <p:nvSpPr>
+          <p:cNvPr id="12" name="Text 7"/>
+          <p:cNvSpPr/>
+          <p:nvPr/>
+        </p:nvSpPr>
+        <p:spPr>
+          <a:xfrm>
+            <a:off x="1024128" y="3236976"/>
+            <a:ext cx="5120640" cy="292608"/>
+          </a:xfrm>
+          <a:prstGeom prst="rect">
+            <a:avLst/>
+          </a:prstGeom>
+          <a:noFill/>
+          <a:ln/>
+        </p:spPr>
+        <p:txBody>
+          <a:bodyPr wrap="square" lIns="0" tIns="0" rIns="0" bIns="0" rtlCol="0" anchor="ctr"/>
+          <a:lstStyle/>
+          <a:p>
+            <a:pPr indent="0" marL="0">
+              <a:buNone/>
+            </a:pPr>
+            <a:r>
+              <a:rPr lang="en-US" sz="1450" b="1" dirty="0">
+                <a:solidFill>
+                  <a:srgbClr val="0D1F33"/>
+                </a:solidFill>
+                <a:latin typeface="Arial" pitchFamily="34" charset="0"/>
+                <a:ea typeface="Arial" pitchFamily="34" charset="-122"/>
+                <a:cs typeface="Arial" pitchFamily="34" charset="-120"/>
+              </a:rPr>
+              <a:t>Honesty architecture</a:t>
+            </a:r>
+            <a:endParaRPr lang="en-US" sz="1450" dirty="0"/>
+          </a:p>
+        </p:txBody>
+      </p:sp>
+      <p:sp>
+        <p:nvSpPr>
+          <p:cNvPr id="13" name="Text 8"/>
+          <p:cNvSpPr/>
+          <p:nvPr/>
+        </p:nvSpPr>
+        <p:spPr>
+          <a:xfrm>
+            <a:off x="1024128" y="3520440"/>
+            <a:ext cx="5669280" cy="548640"/>
+          </a:xfrm>
+          <a:prstGeom prst="rect">
+            <a:avLst/>
+          </a:prstGeom>
+          <a:noFill/>
+          <a:ln/>
+        </p:spPr>
+        <p:txBody>
+          <a:bodyPr wrap="square" lIns="0" tIns="0" rIns="0" bIns="0" rtlCol="0" anchor="ctr"/>
+          <a:lstStyle/>
+          <a:p>
+            <a:pPr indent="0" marL="0">
+              <a:buNone/>
+            </a:pPr>
+            <a:r>
+              <a:rPr lang="en-US" sz="1050" dirty="0">
+                <a:solidFill>
+                  <a:srgbClr val="5B6B7F"/>
+                </a:solidFill>
+                <a:latin typeface="Arial" pitchFamily="34" charset="0"/>
+                <a:ea typeface="Arial" pitchFamily="34" charset="-122"/>
+                <a:cs typeface="Arial" pitchFamily="34" charset="-120"/>
+              </a:rPr>
+              <a:t>Confidence tiers · "modelled" labels · regulation legal status · adoption ceilings · uncertainty bands. It says "I don’t know" rather than guessing.</a:t>
+            </a:r>
+            <a:endParaRPr lang="en-US" sz="1050" dirty="0"/>
+          </a:p>
+        </p:txBody>
+      </p:sp>
+      <p:pic>
+        <p:nvPicPr>
+          <p:cNvPr id="14" name="Image 3" descr="preencoded.png">    </p:cNvPr>
+          <p:cNvPicPr>
+            <a:picLocks noChangeAspect="1"/>
+          </p:cNvPicPr>
+          <p:nvPr/>
+        </p:nvPicPr>
+        <p:blipFill>
+          <a:blip r:embed="rId4"/>
+          <a:stretch>
+            <a:fillRect/>
+          </a:stretch>
+        </p:blipFill>
+        <p:spPr>
+          <a:xfrm>
+            <a:off x="548640" y="4151376"/>
+            <a:ext cx="329184" cy="329184"/>
+          </a:xfrm>
+          <a:prstGeom prst="rect">
+            <a:avLst/>
+          </a:prstGeom>
+        </p:spPr>
+      </p:pic>
+      <p:sp>
+        <p:nvSpPr>
+          <p:cNvPr id="15" name="Text 9"/>
+          <p:cNvSpPr/>
+          <p:nvPr/>
+        </p:nvSpPr>
+        <p:spPr>
+          <a:xfrm>
+            <a:off x="1024128" y="4096512"/>
+            <a:ext cx="5120640" cy="292608"/>
+          </a:xfrm>
+          <a:prstGeom prst="rect">
+            <a:avLst/>
+          </a:prstGeom>
+          <a:noFill/>
+          <a:ln/>
+        </p:spPr>
+        <p:txBody>
+          <a:bodyPr wrap="square" lIns="0" tIns="0" rIns="0" bIns="0" rtlCol="0" anchor="ctr"/>
+          <a:lstStyle/>
+          <a:p>
+            <a:pPr indent="0" marL="0">
+              <a:buNone/>
+            </a:pPr>
+            <a:r>
+              <a:rPr lang="en-US" sz="1450" b="1" dirty="0">
+                <a:solidFill>
+                  <a:srgbClr val="0D1F33"/>
+                </a:solidFill>
+                <a:latin typeface="Arial" pitchFamily="34" charset="0"/>
+                <a:ea typeface="Arial" pitchFamily="34" charset="-122"/>
+                <a:cs typeface="Arial" pitchFamily="34" charset="-120"/>
+              </a:rPr>
+              <a:t>Grounded AI, enforced in code</a:t>
+            </a:r>
+            <a:endParaRPr lang="en-US" sz="1450" dirty="0"/>
+          </a:p>
+        </p:txBody>
+      </p:sp>
+      <p:sp>
+        <p:nvSpPr>
+          <p:cNvPr id="16" name="Text 10"/>
+          <p:cNvSpPr/>
+          <p:nvPr/>
+        </p:nvSpPr>
+        <p:spPr>
+          <a:xfrm>
+            <a:off x="1024128" y="4379976"/>
+            <a:ext cx="5669280" cy="548640"/>
+          </a:xfrm>
+          <a:prstGeom prst="rect">
+            <a:avLst/>
+          </a:prstGeom>
+          <a:noFill/>
+          <a:ln/>
+        </p:spPr>
+        <p:txBody>
+          <a:bodyPr wrap="square" lIns="0" tIns="0" rIns="0" bIns="0" rtlCol="0" anchor="ctr"/>
+          <a:lstStyle/>
+          <a:p>
+            <a:pPr indent="0" marL="0">
+              <a:buNone/>
+            </a:pPr>
+            <a:r>
+              <a:rPr lang="en-US" sz="1050" dirty="0">
+                <a:solidFill>
+                  <a:srgbClr val="5B6B7F"/>
+                </a:solidFill>
+                <a:latin typeface="Arial" pitchFamily="34" charset="0"/>
+                <a:ea typeface="Arial" pitchFamily="34" charset="-122"/>
+                <a:cs typeface="Arial" pitchFamily="34" charset="-120"/>
+              </a:rPr>
+              <a:t>Briefing, panel and research are grounded in engine output; uncited findings are dropped server-side.</a:t>
+            </a:r>
+            <a:endParaRPr lang="en-US" sz="1050" dirty="0"/>
+          </a:p>
+        </p:txBody>
+      </p:sp>
+      <p:pic>
+        <p:nvPicPr>
+          <p:cNvPr id="17" name="Image 4" descr="preencoded.png">    </p:cNvPr>
+          <p:cNvPicPr>
+            <a:picLocks noChangeAspect="1"/>
+          </p:cNvPicPr>
+          <p:nvPr/>
+        </p:nvPicPr>
+        <p:blipFill>
+          <a:blip r:embed="rId5"/>
+          <a:stretch>
+            <a:fillRect/>
+          </a:stretch>
+        </p:blipFill>
+        <p:spPr>
+          <a:xfrm>
+            <a:off x="548640" y="5010912"/>
+            <a:ext cx="329184" cy="329184"/>
+          </a:xfrm>
+          <a:prstGeom prst="rect">
+            <a:avLst/>
+          </a:prstGeom>
+        </p:spPr>
+      </p:pic>
+      <p:sp>
+        <p:nvSpPr>
+          <p:cNvPr id="18" name="Text 11"/>
+          <p:cNvSpPr/>
+          <p:nvPr/>
+        </p:nvSpPr>
+        <p:spPr>
+          <a:xfrm>
+            <a:off x="1024128" y="4956048"/>
+            <a:ext cx="5120640" cy="292608"/>
+          </a:xfrm>
+          <a:prstGeom prst="rect">
+            <a:avLst/>
+          </a:prstGeom>
+          <a:noFill/>
+          <a:ln/>
+        </p:spPr>
+        <p:txBody>
+          <a:bodyPr wrap="square" lIns="0" tIns="0" rIns="0" bIns="0" rtlCol="0" anchor="ctr"/>
+          <a:lstStyle/>
+          <a:p>
+            <a:pPr indent="0" marL="0">
+              <a:buNone/>
+            </a:pPr>
+            <a:r>
+              <a:rPr lang="en-US" sz="1450" b="1" dirty="0">
+                <a:solidFill>
+                  <a:srgbClr val="0D1F33"/>
+                </a:solidFill>
+                <a:latin typeface="Arial" pitchFamily="34" charset="0"/>
+                <a:ea typeface="Arial" pitchFamily="34" charset="-122"/>
+                <a:cs typeface="Arial" pitchFamily="34" charset="-120"/>
+              </a:rPr>
+              <a:t>Self-scoring</a:t>
+            </a:r>
+            <a:endParaRPr lang="en-US" sz="1450" dirty="0"/>
+          </a:p>
+        </p:txBody>
+      </p:sp>
+      <p:sp>
+        <p:nvSpPr>
+          <p:cNvPr id="19" name="Text 12"/>
+          <p:cNvSpPr/>
+          <p:nvPr/>
+        </p:nvSpPr>
+        <p:spPr>
+          <a:xfrm>
+            <a:off x="1024128" y="5239512"/>
+            <a:ext cx="5669280" cy="548640"/>
+          </a:xfrm>
+          <a:prstGeom prst="rect">
+            <a:avLst/>
+          </a:prstGeom>
+          <a:noFill/>
+          <a:ln/>
+        </p:spPr>
+        <p:txBody>
+          <a:bodyPr wrap="square" lIns="0" tIns="0" rIns="0" bIns="0" rtlCol="0" anchor="ctr"/>
+          <a:lstStyle/>
+          <a:p>
+            <a:pPr indent="0" marL="0">
+              <a:buNone/>
+            </a:pPr>
+            <a:r>
+              <a:rPr lang="en-US" sz="1050" dirty="0">
+                <a:solidFill>
+                  <a:srgbClr val="5B6B7F"/>
+                </a:solidFill>
+                <a:latin typeface="Arial" pitchFamily="34" charset="0"/>
+                <a:ea typeface="Arial" pitchFamily="34" charset="-122"/>
+                <a:cs typeface="Arial" pitchFamily="34" charset="-120"/>
+              </a:rPr>
+              <a:t>The Prediction Ledger snapshots forecasts and scores them on re-curation — Tetlock discipline, built in.</a:t>
+            </a:r>
+            <a:endParaRPr lang="en-US" sz="1050" dirty="0"/>
+          </a:p>
+        </p:txBody>
+      </p:sp>
+      <p:sp>
+        <p:nvSpPr>
+          <p:cNvPr id="20" name="Shape 13"/>
+          <p:cNvSpPr/>
+          <p:nvPr/>
+        </p:nvSpPr>
+        <p:spPr>
+          <a:xfrm>
+            <a:off x="7178040" y="1554480"/>
+            <a:ext cx="4507992" cy="4206240"/>
+          </a:xfrm>
+          <a:prstGeom prst="roundRect">
+            <a:avLst>
+              <a:gd name="adj" fmla="val 1957"/>
+            </a:avLst>
+          </a:prstGeom>
+          <a:solidFill>
+            <a:srgbClr val="0D1F33"/>
+          </a:solidFill>
+          <a:ln/>
+          <a:effectLst>
+            <a:outerShdw sx="100000" sy="100000" kx="0" ky="0" algn="bl" rotWithShape="0" blurRad="101600" dist="25400" dir="5400000">
+              <a:srgbClr val="9FB0C2">
+                <a:alpha val="35000"/>
+              </a:srgbClr>
+            </a:outerShdw>
+          </a:effectLst>
+        </p:spPr>
+      </p:sp>
+      <p:sp>
+        <p:nvSpPr>
+          <p:cNvPr id="21" name="Shape 14"/>
+          <p:cNvSpPr/>
+          <p:nvPr/>
+        </p:nvSpPr>
+        <p:spPr>
+          <a:xfrm>
+            <a:off x="7296912" y="1673352"/>
+            <a:ext cx="137160" cy="0"/>
+          </a:xfrm>
+          <a:prstGeom prst="line">
+            <a:avLst/>
+          </a:prstGeom>
+          <a:noFill/>
+          <a:ln w="19050">
+            <a:solidFill>
+              <a:srgbClr val="F59E0B"/>
+            </a:solidFill>
+            <a:prstDash val="solid"/>
+          </a:ln>
+        </p:spPr>
+      </p:sp>
+      <p:sp>
+        <p:nvSpPr>
+          <p:cNvPr id="22" name="Shape 15"/>
+          <p:cNvSpPr/>
+          <p:nvPr/>
+        </p:nvSpPr>
+        <p:spPr>
+          <a:xfrm>
+            <a:off x="7296912" y="1673352"/>
+            <a:ext cx="0" cy="137160"/>
+          </a:xfrm>
+          <a:prstGeom prst="line">
+            <a:avLst/>
+          </a:prstGeom>
+          <a:noFill/>
+          <a:ln w="19050">
+            <a:solidFill>
+              <a:srgbClr val="F59E0B"/>
+            </a:solidFill>
+            <a:prstDash val="solid"/>
+          </a:ln>
+        </p:spPr>
+      </p:sp>
+      <p:sp>
+        <p:nvSpPr>
+          <p:cNvPr id="23" name="Shape 16"/>
+          <p:cNvSpPr/>
+          <p:nvPr/>
+        </p:nvSpPr>
+        <p:spPr>
+          <a:xfrm>
+            <a:off x="11430000" y="5641848"/>
+            <a:ext cx="137160" cy="0"/>
+          </a:xfrm>
+          <a:prstGeom prst="line">
+            <a:avLst/>
+          </a:prstGeom>
+          <a:noFill/>
+          <a:ln w="19050">
+            <a:solidFill>
+              <a:srgbClr val="F59E0B"/>
+            </a:solidFill>
+            <a:prstDash val="solid"/>
+          </a:ln>
+        </p:spPr>
+      </p:sp>
+      <p:sp>
+        <p:nvSpPr>
+          <p:cNvPr id="24" name="Shape 17"/>
+          <p:cNvSpPr/>
+          <p:nvPr/>
+        </p:nvSpPr>
+        <p:spPr>
+          <a:xfrm>
+            <a:off x="11567160" y="5504688"/>
+            <a:ext cx="0" cy="137160"/>
+          </a:xfrm>
+          <a:prstGeom prst="line">
+            <a:avLst/>
+          </a:prstGeom>
+          <a:noFill/>
+          <a:ln w="19050">
+            <a:solidFill>
+              <a:srgbClr val="F59E0B"/>
+            </a:solidFill>
+            <a:prstDash val="solid"/>
+          </a:ln>
+        </p:spPr>
+      </p:sp>
+      <p:pic>
+        <p:nvPicPr>
+          <p:cNvPr id="25" name="Image 5" descr="preencoded.png">    </p:cNvPr>
+          <p:cNvPicPr>
+            <a:picLocks noChangeAspect="1"/>
+          </p:cNvPicPr>
+          <p:nvPr/>
+        </p:nvPicPr>
+        <p:blipFill>
+          <a:blip r:embed="rId6"/>
+          <a:stretch>
+            <a:fillRect/>
+          </a:stretch>
+        </p:blipFill>
+        <p:spPr>
+          <a:xfrm>
+            <a:off x="7498080" y="1828800"/>
+            <a:ext cx="420624" cy="420624"/>
+          </a:xfrm>
+          <a:prstGeom prst="rect">
+            <a:avLst/>
+          </a:prstGeom>
+        </p:spPr>
+      </p:pic>
+      <p:sp>
+        <p:nvSpPr>
+          <p:cNvPr id="26" name="Text 18"/>
+          <p:cNvSpPr/>
+          <p:nvPr/>
+        </p:nvSpPr>
+        <p:spPr>
+          <a:xfrm>
+            <a:off x="8046720" y="1883664"/>
+            <a:ext cx="3474720" cy="347472"/>
+          </a:xfrm>
+          <a:prstGeom prst="rect">
+            <a:avLst/>
+          </a:prstGeom>
+          <a:noFill/>
+          <a:ln/>
+        </p:spPr>
+        <p:txBody>
+          <a:bodyPr wrap="square" lIns="0" tIns="0" rIns="0" bIns="0" rtlCol="0" anchor="ctr"/>
+          <a:lstStyle/>
+          <a:p>
+            <a:pPr indent="0" marL="0">
+              <a:buNone/>
+            </a:pPr>
+            <a:r>
+              <a:rPr lang="en-US" sz="1400" b="1" dirty="0">
+                <a:solidFill>
+                  <a:srgbClr val="FFFFFF"/>
+                </a:solidFill>
+                <a:latin typeface="Arial" pitchFamily="34" charset="0"/>
+                <a:ea typeface="Arial" pitchFamily="34" charset="-122"/>
+                <a:cs typeface="Arial" pitchFamily="34" charset="-120"/>
+              </a:rPr>
+              <a:t>The test we set ourselves</a:t>
+            </a:r>
+            <a:endParaRPr lang="en-US" sz="1400" dirty="0"/>
+          </a:p>
+        </p:txBody>
+      </p:sp>
+      <p:sp>
+        <p:nvSpPr>
+          <p:cNvPr id="27" name="Text 19"/>
+          <p:cNvSpPr/>
+          <p:nvPr/>
+        </p:nvSpPr>
+        <p:spPr>
+          <a:xfrm>
+            <a:off x="7498080" y="2450592"/>
+            <a:ext cx="3886200" cy="868680"/>
+          </a:xfrm>
+          <a:prstGeom prst="rect">
+            <a:avLst/>
+          </a:prstGeom>
+          <a:noFill/>
+          <a:ln/>
+        </p:spPr>
+        <p:txBody>
+          <a:bodyPr wrap="square" lIns="0" tIns="0" rIns="0" bIns="0" rtlCol="0" anchor="ctr"/>
+          <a:lstStyle/>
+          <a:p>
+            <a:pPr indent="0" marL="0">
+              <a:buNone/>
+            </a:pPr>
+            <a:r>
+              <a:rPr lang="en-US" sz="1500" i="1" dirty="0">
+                <a:solidFill>
+                  <a:srgbClr val="F59E0B"/>
+                </a:solidFill>
+                <a:latin typeface="Arial" pitchFamily="34" charset="0"/>
+                <a:ea typeface="Arial" pitchFamily="34" charset="-122"/>
+                <a:cs typeface="Arial" pitchFamily="34" charset="-120"/>
+              </a:rPr>
+              <a:t>"A foresight tool that never checks its own past predictions is astrology."</a:t>
+            </a:r>
+            <a:endParaRPr lang="en-US" sz="1500" dirty="0"/>
+          </a:p>
+        </p:txBody>
+      </p:sp>
+      <p:sp>
+        <p:nvSpPr>
+          <p:cNvPr id="28" name="Text 20"/>
+          <p:cNvSpPr/>
+          <p:nvPr/>
+        </p:nvSpPr>
+        <p:spPr>
+          <a:xfrm>
+            <a:off x="7498080" y="3429000"/>
+            <a:ext cx="3886200" cy="1371600"/>
+          </a:xfrm>
+          <a:prstGeom prst="rect">
+            <a:avLst/>
+          </a:prstGeom>
+          <a:noFill/>
+          <a:ln/>
+        </p:spPr>
+        <p:txBody>
+          <a:bodyPr wrap="square" lIns="0" tIns="0" rIns="0" bIns="0" rtlCol="0" anchor="ctr"/>
+          <a:lstStyle/>
+          <a:p>
+            <a:pPr indent="0" marL="0">
+              <a:buNone/>
+            </a:pPr>
+            <a:r>
+              <a:rPr lang="en-US" sz="1150" dirty="0">
+                <a:solidFill>
+                  <a:srgbClr val="C7D2DE"/>
+                </a:solidFill>
+                <a:latin typeface="Arial" pitchFamily="34" charset="0"/>
+                <a:ea typeface="Arial" pitchFamily="34" charset="-122"/>
+                <a:cs typeface="Arial" pitchFamily="34" charset="-120"/>
+              </a:rPr>
+              <a:t>Every prediction can be snapshotted. When the register is re-curated, the tool computes exactly how far its old projections were off — and shows us the error. No other tool in this space grades its own homework.</a:t>
+            </a:r>
+            <a:endParaRPr lang="en-US" sz="1150" dirty="0"/>
+          </a:p>
+        </p:txBody>
+      </p:sp>
+      <p:sp>
+        <p:nvSpPr>
+          <p:cNvPr id="29" name="Text 21"/>
+          <p:cNvSpPr/>
+          <p:nvPr/>
+        </p:nvSpPr>
+        <p:spPr>
+          <a:xfrm>
+            <a:off x="7498080" y="5166360"/>
+            <a:ext cx="3886200" cy="274320"/>
+          </a:xfrm>
+          <a:prstGeom prst="rect">
+            <a:avLst/>
+          </a:prstGeom>
+          <a:noFill/>
+          <a:ln/>
+        </p:spPr>
+        <p:txBody>
+          <a:bodyPr wrap="square" lIns="0" tIns="0" rIns="0" bIns="0" rtlCol="0" anchor="ctr"/>
+          <a:lstStyle/>
+          <a:p>
+            <a:pPr indent="0" marL="0">
+              <a:buNone/>
+            </a:pPr>
+            <a:r>
+              <a:rPr lang="en-US" sz="1050" b="1" dirty="0">
+                <a:solidFill>
+                  <a:srgbClr val="0D9488"/>
+                </a:solidFill>
+                <a:latin typeface="Courier New" pitchFamily="34" charset="0"/>
+                <a:ea typeface="Courier New" pitchFamily="34" charset="-122"/>
+                <a:cs typeface="Courier New" pitchFamily="34" charset="-120"/>
+              </a:rPr>
+              <a:t>audited · test-locked · self-scoring</a:t>
+            </a:r>
+            <a:endParaRPr lang="en-US" sz="1050" dirty="0"/>
+          </a:p>
+        </p:txBody>
+      </p:sp>
+      <p:sp>
+        <p:nvSpPr>
+          <p:cNvPr id="30" name="Text 22"/>
+          <p:cNvSpPr/>
+          <p:nvPr/>
+        </p:nvSpPr>
+        <p:spPr>
+          <a:xfrm>
+            <a:off x="502920" y="6492240"/>
+            <a:ext cx="7315200" cy="256032"/>
+          </a:xfrm>
+          <a:prstGeom prst="rect">
+            <a:avLst/>
+          </a:prstGeom>
+          <a:noFill/>
+          <a:ln/>
+        </p:spPr>
+        <p:txBody>
+          <a:bodyPr wrap="square" lIns="0" tIns="0" rIns="0" bIns="0" rtlCol="0" anchor="ctr"/>
+          <a:lstStyle/>
+          <a:p>
+            <a:pPr indent="0" marL="0">
+              <a:buNone/>
+            </a:pPr>
+            <a:r>
+              <a:rPr lang="en-US" sz="900" b="1" dirty="0">
+                <a:solidFill>
+                  <a:srgbClr val="5B6B7F"/>
+                </a:solidFill>
+                <a:latin typeface="Courier New" pitchFamily="34" charset="0"/>
+                <a:ea typeface="Courier New" pitchFamily="34" charset="-122"/>
+                <a:cs typeface="Courier New" pitchFamily="34" charset="-120"/>
+              </a:rPr>
+              <a:t>BrainSpark </a:t>
+            </a:r>
+            <a:pPr indent="0" marL="0">
+              <a:buNone/>
+            </a:pPr>
+            <a:r>
+              <a:rPr lang="en-US" sz="900" b="1" dirty="0">
+                <a:solidFill>
+                  <a:srgbClr val="F59E0B"/>
+                </a:solidFill>
+                <a:latin typeface="Courier New" pitchFamily="34" charset="0"/>
+                <a:ea typeface="Courier New" pitchFamily="34" charset="-122"/>
+                <a:cs typeface="Courier New" pitchFamily="34" charset="-120"/>
+              </a:rPr>
+              <a:t>Horizon</a:t>
+            </a:r>
+            <a:pPr indent="0" marL="0">
+              <a:buNone/>
+            </a:pPr>
+            <a:r>
+              <a:rPr lang="en-US" sz="900" dirty="0">
+                <a:solidFill>
+                  <a:srgbClr val="93A3B5"/>
+                </a:solidFill>
+                <a:latin typeface="Courier New" pitchFamily="34" charset="0"/>
+                <a:ea typeface="Courier New" pitchFamily="34" charset="-122"/>
+                <a:cs typeface="Courier New" pitchFamily="34" charset="-120"/>
+              </a:rPr>
+              <a:t>  ·  Technology Foresight Engine  ·  15/17</a:t>
+            </a:r>
+            <a:endParaRPr lang="en-US" sz="900" dirty="0"/>
+          </a:p>
+        </p:txBody>
+      </p:sp>
+    </p:spTree>
+  </p:cSld>
+  <p:clrMapOvr>
+    <a:masterClrMapping/>
+  </p:clrMapOvr>
+</p:sld>
+</file>
+
+<file path=ppt/slides/slide17.xml><?xml version="1.0" encoding="utf-8"?>
+<p:sld xmlns:a="http://schemas.openxmlformats.org/drawingml/2006/main" xmlns:r="http://schemas.openxmlformats.org/officeDocument/2006/relationships" xmlns:p="http://schemas.openxmlformats.org/presentationml/2006/main">
+  <p:cSld name="Slide 17">
     <p:bg>
       <p:bgPr>
         <a:solidFill>
@@ -12534,7 +13308,7 @@
                 <a:ea typeface="Arial" pitchFamily="34" charset="-122"/>
                 <a:cs typeface="Arial" pitchFamily="34" charset="-120"/>
               </a:rPr>
-              <a:t>13 AI tools, one platform</a:t>
+              <a:t>22 AI tools, one platform</a:t>
             </a:r>
             <a:endParaRPr lang="en-US" sz="1450" dirty="0"/>
           </a:p>
@@ -12573,7 +13347,7 @@
                 <a:ea typeface="Arial" pitchFamily="34" charset="-122"/>
                 <a:cs typeface="Arial" pitchFamily="34" charset="-120"/>
               </a:rPr>
-              <a:t>BrainSpark already generates cost ideas, should-costs parts, reads CAD and PCBs, and tracks savings to realisation.</a:t>
+              <a:t>BrainSpark already generates cost ideas, should-costs parts, reads CAD and PCBs, measures manufacturability, and tracks savings to realisation.</a:t>
             </a:r>
             <a:endParaRPr lang="en-US" sz="1050" dirty="0"/>
           </a:p>
@@ -12808,7 +13582,7 @@
                 <a:ea typeface="Courier New" pitchFamily="34" charset="-122"/>
                 <a:cs typeface="Courier New" pitchFamily="34" charset="-120"/>
               </a:rPr>
-              <a:t>139 technologies · 9 commodities · 4 powertrains · audited 07/2026</a:t>
+              <a:t>180 technologies · 9 commodities · 4 powertrains · audited 07/2026</a:t>
             </a:r>
             <a:endParaRPr lang="en-US" sz="1050" dirty="0"/>
           </a:p>
@@ -13614,7 +14388,7 @@
                 <a:ea typeface="Courier New" pitchFamily="34" charset="-122"/>
                 <a:cs typeface="Courier New" pitchFamily="34" charset="-120"/>
               </a:rPr>
-              <a:t>  ·  Technology Foresight Engine  ·  2/16</a:t>
+              <a:t>  ·  Technology Foresight Engine  ·  1/17</a:t>
             </a:r>
             <a:endParaRPr lang="en-US" sz="900" dirty="0"/>
           </a:p>
@@ -14539,7 +15313,7 @@
                 <a:ea typeface="Courier New" pitchFamily="34" charset="-122"/>
                 <a:cs typeface="Courier New" pitchFamily="34" charset="-120"/>
               </a:rPr>
-              <a:t>  ·  Technology Foresight Engine  ·  3/16</a:t>
+              <a:t>  ·  Technology Foresight Engine  ·  2/17</a:t>
             </a:r>
             <a:endParaRPr lang="en-US" sz="900" dirty="0"/>
           </a:p>
@@ -14849,7 +15623,7 @@
                 <a:ea typeface="Arial" pitchFamily="34" charset="-122"/>
                 <a:cs typeface="Arial" pitchFamily="34" charset="-120"/>
               </a:rPr>
-              <a:t>139 technologies, every one with automotive TRL 1-9, current adoption share, named production evidence, players, cost trend</a:t>
+              <a:t>180 technologies, every one with automotive TRL 1-9, current adoption share, named production evidence, players, cost trend</a:t>
             </a:r>
             <a:endParaRPr lang="en-US" sz="1050" dirty="0"/>
           </a:p>
@@ -15705,7 +16479,7 @@
                 <a:ea typeface="Courier New" pitchFamily="34" charset="-122"/>
                 <a:cs typeface="Courier New" pitchFamily="34" charset="-120"/>
               </a:rPr>
-              <a:t>  ·  Technology Foresight Engine  ·  4/16</a:t>
+              <a:t>  ·  Technology Foresight Engine  ·  3/17</a:t>
             </a:r>
             <a:endParaRPr lang="en-US" sz="900" dirty="0"/>
           </a:p>
@@ -16812,7 +17586,7 @@
                 <a:ea typeface="Arial" pitchFamily="34" charset="-122"/>
                 <a:cs typeface="Arial" pitchFamily="34" charset="-120"/>
               </a:rPr>
-              <a:t>search-term + commodity-classifier resolution against the 139 curated technologies</a:t>
+              <a:t>search-term + commodity-classifier resolution against the 180 curated technologies</a:t>
             </a:r>
             <a:endParaRPr lang="en-US" sz="980" dirty="0"/>
           </a:p>
@@ -17513,7 +18287,7 @@
                 <a:ea typeface="Courier New" pitchFamily="34" charset="-122"/>
                 <a:cs typeface="Courier New" pitchFamily="34" charset="-120"/>
               </a:rPr>
-              <a:t>Stack: deterministic JavaScript engines · curated evidence register · SQLite ledger · Claude LLM (schema-forced, grounded) · PatentsView + web retrieval · React UI — locked by 326 CI tests.</a:t>
+              <a:t>Stack: deterministic JavaScript engines · curated evidence register · SQLite ledger · Claude LLM (schema-forced, grounded) · PatentsView + web retrieval · React UI — locked by 758 CI tests.</a:t>
             </a:r>
             <a:endParaRPr lang="en-US" sz="950" dirty="0"/>
           </a:p>
@@ -17580,7 +18354,7 @@
                 <a:ea typeface="Courier New" pitchFamily="34" charset="-122"/>
                 <a:cs typeface="Courier New" pitchFamily="34" charset="-120"/>
               </a:rPr>
-              <a:t>  ·  Technology Foresight Engine  ·  5/16</a:t>
+              <a:t>  ·  Technology Foresight Engine  ·  4/17</a:t>
             </a:r>
             <a:endParaRPr lang="en-US" sz="900" dirty="0"/>
           </a:p>
@@ -18412,7 +19186,7 @@
                 <a:ea typeface="Arial" pitchFamily="34" charset="-122"/>
                 <a:cs typeface="Arial" pitchFamily="34" charset="-120"/>
               </a:rPr>
-              <a:t>139 technologies with TRL, adoption, production evidence</a:t>
+              <a:t>180 technologies with TRL, adoption, production evidence</a:t>
             </a:r>
             <a:endParaRPr lang="en-US" sz="1050" dirty="0"/>
           </a:p>
@@ -18926,7 +19700,7 @@
                 <a:ea typeface="Courier New" pitchFamily="34" charset="-122"/>
                 <a:cs typeface="Courier New" pitchFamily="34" charset="-120"/>
               </a:rPr>
-              <a:t>  ·  Technology Foresight Engine  ·  6/16</a:t>
+              <a:t>  ·  Technology Foresight Engine  ·  5/17</a:t>
             </a:r>
             <a:endParaRPr lang="en-US" sz="900" dirty="0"/>
           </a:p>
@@ -19126,7 +19900,7 @@
                 <a:ea typeface="Arial" pitchFamily="34" charset="-122"/>
                 <a:cs typeface="Arial" pitchFamily="34" charset="-120"/>
               </a:rPr>
-              <a:t>139</a:t>
+              <a:t>180</a:t>
             </a:r>
             <a:endParaRPr lang="en-US" sz="3300" dirty="0"/>
           </a:p>
@@ -19554,7 +20328,7 @@
                 <a:ea typeface="Arial" pitchFamily="34" charset="-122"/>
                 <a:cs typeface="Arial" pitchFamily="34" charset="-120"/>
               </a:rPr>
-              <a:t>14</a:t>
+              <a:t>15</a:t>
             </a:r>
             <a:endParaRPr lang="en-US" sz="3300" dirty="0"/>
           </a:p>
@@ -19861,7 +20635,7 @@
                 <a:ea typeface="Courier New" pitchFamily="34" charset="-122"/>
                 <a:cs typeface="Courier New" pitchFamily="34" charset="-120"/>
               </a:rPr>
-              <a:t>  ·  Technology Foresight Engine  ·  7/16</a:t>
+              <a:t>  ·  Technology Foresight Engine  ·  6/17</a:t>
             </a:r>
             <a:endParaRPr lang="en-US" sz="900" dirty="0"/>
           </a:p>
@@ -20697,7 +21471,7 @@
                 <a:ea typeface="Arial" pitchFamily="34" charset="-122"/>
                 <a:cs typeface="Arial" pitchFamily="34" charset="-120"/>
               </a:rPr>
-              <a:t>20</a:t>
+              <a:t>22</a:t>
             </a:r>
             <a:pPr indent="0" marL="0">
               <a:buNone/>
@@ -21223,7 +21997,7 @@
                 <a:ea typeface="Arial" pitchFamily="34" charset="-122"/>
                 <a:cs typeface="Arial" pitchFamily="34" charset="-120"/>
               </a:rPr>
-              <a:t>24</a:t>
+              <a:t>25</a:t>
             </a:r>
             <a:pPr indent="0" marL="0">
               <a:buNone/>
@@ -21638,7 +22412,7 @@
                 <a:ea typeface="Courier New" pitchFamily="34" charset="-122"/>
                 <a:cs typeface="Courier New" pitchFamily="34" charset="-120"/>
               </a:rPr>
-              <a:t>  ·  Technology Foresight Engine  ·  8/16</a:t>
+              <a:t>  ·  Technology Foresight Engine  ·  7/17</a:t>
             </a:r>
             <a:endParaRPr lang="en-US" sz="900" dirty="0"/>
           </a:p>
@@ -23915,7 +24689,7 @@
                 <a:ea typeface="Courier New" pitchFamily="34" charset="-122"/>
                 <a:cs typeface="Courier New" pitchFamily="34" charset="-120"/>
               </a:rPr>
-              <a:t>  ·  Technology Foresight Engine  ·  9/16</a:t>
+              <a:t>  ·  Technology Foresight Engine  ·  8/17</a:t>
             </a:r>
             <a:endParaRPr lang="en-US" sz="900" dirty="0"/>
           </a:p>
